--- a/2024/2024-02-23-AI-Updates.pptx
+++ b/2024/2024-02-23-AI-Updates.pptx
@@ -5,7 +5,7 @@
     <p:sldMasterId id="2147483659" r:id="rId1"/>
   </p:sldMasterIdLst>
   <p:notesMasterIdLst>
-    <p:notesMasterId r:id="rId24"/>
+    <p:notesMasterId r:id="rId26"/>
   </p:notesMasterIdLst>
   <p:sldIdLst>
     <p:sldId id="256" r:id="rId2"/>
@@ -30,16 +30,18 @@
     <p:sldId id="275" r:id="rId21"/>
     <p:sldId id="276" r:id="rId22"/>
     <p:sldId id="277" r:id="rId23"/>
+    <p:sldId id="278" r:id="rId24"/>
+    <p:sldId id="279" r:id="rId25"/>
   </p:sldIdLst>
   <p:sldSz cx="9144000" cy="5143500" type="screen16x9"/>
   <p:notesSz cx="6858000" cy="9144000"/>
   <p:embeddedFontLst>
     <p:embeddedFont>
       <p:font typeface="Roboto Mono" pitchFamily="49" charset="0"/>
-      <p:regular r:id="rId25"/>
-      <p:bold r:id="rId26"/>
-      <p:italic r:id="rId27"/>
-      <p:boldItalic r:id="rId28"/>
+      <p:regular r:id="rId27"/>
+      <p:bold r:id="rId28"/>
+      <p:italic r:id="rId29"/>
+      <p:boldItalic r:id="rId30"/>
     </p:embeddedFont>
   </p:embeddedFontLst>
   <p:defaultTextStyle>
@@ -840,7 +842,7 @@
   <p:cSld>
     <p:spTree>
       <p:nvGrpSpPr>
-        <p:cNvPr id="1" name="Shape 130"/>
+        <p:cNvPr id="1" name="Shape 133"/>
         <p:cNvGrpSpPr/>
         <p:nvPr/>
       </p:nvGrpSpPr>
@@ -854,7 +856,7 @@
       </p:grpSpPr>
       <p:sp>
         <p:nvSpPr>
-          <p:cNvPr id="131" name="Google Shape;131;g2bacc5fb6a8_0_0:notes"/>
+          <p:cNvPr id="134" name="Google Shape;134;g2bacc5fb6a8_0_0:notes"/>
           <p:cNvSpPr>
             <a:spLocks noGrp="1" noRot="1" noChangeAspect="1"/>
           </p:cNvSpPr>
@@ -895,7 +897,7 @@
       </p:sp>
       <p:sp>
         <p:nvSpPr>
-          <p:cNvPr id="132" name="Google Shape;132;g2bacc5fb6a8_0_0:notes"/>
+          <p:cNvPr id="135" name="Google Shape;135;g2bacc5fb6a8_0_0:notes"/>
           <p:cNvSpPr txBox="1">
             <a:spLocks noGrp="1"/>
           </p:cNvSpPr>
@@ -944,7 +946,7 @@
   <p:cSld>
     <p:spTree>
       <p:nvGrpSpPr>
-        <p:cNvPr id="1" name="Shape 144"/>
+        <p:cNvPr id="1" name="Shape 147"/>
         <p:cNvGrpSpPr/>
         <p:nvPr/>
       </p:nvGrpSpPr>
@@ -958,7 +960,7 @@
       </p:grpSpPr>
       <p:sp>
         <p:nvSpPr>
-          <p:cNvPr id="145" name="Google Shape;145;g2bb0d5757ec_0_16:notes"/>
+          <p:cNvPr id="148" name="Google Shape;148;g2bb0d5757ec_0_16:notes"/>
           <p:cNvSpPr>
             <a:spLocks noGrp="1" noRot="1" noChangeAspect="1"/>
           </p:cNvSpPr>
@@ -999,7 +1001,7 @@
       </p:sp>
       <p:sp>
         <p:nvSpPr>
-          <p:cNvPr id="146" name="Google Shape;146;g2bb0d5757ec_0_16:notes"/>
+          <p:cNvPr id="149" name="Google Shape;149;g2bb0d5757ec_0_16:notes"/>
           <p:cNvSpPr txBox="1">
             <a:spLocks noGrp="1"/>
           </p:cNvSpPr>
@@ -1048,7 +1050,7 @@
   <p:cSld>
     <p:spTree>
       <p:nvGrpSpPr>
-        <p:cNvPr id="1" name="Shape 152"/>
+        <p:cNvPr id="1" name="Shape 156"/>
         <p:cNvGrpSpPr/>
         <p:nvPr/>
       </p:nvGrpSpPr>
@@ -1062,7 +1064,7 @@
       </p:grpSpPr>
       <p:sp>
         <p:nvSpPr>
-          <p:cNvPr id="153" name="Google Shape;153;g2bacc5fb6a8_0_14:notes"/>
+          <p:cNvPr id="157" name="Google Shape;157;g2bacc5fb6a8_0_14:notes"/>
           <p:cNvSpPr>
             <a:spLocks noGrp="1" noRot="1" noChangeAspect="1"/>
           </p:cNvSpPr>
@@ -1103,7 +1105,7 @@
       </p:sp>
       <p:sp>
         <p:nvSpPr>
-          <p:cNvPr id="154" name="Google Shape;154;g2bacc5fb6a8_0_14:notes"/>
+          <p:cNvPr id="158" name="Google Shape;158;g2bacc5fb6a8_0_14:notes"/>
           <p:cNvSpPr txBox="1">
             <a:spLocks noGrp="1"/>
           </p:cNvSpPr>
@@ -1152,7 +1154,7 @@
   <p:cSld>
     <p:spTree>
       <p:nvGrpSpPr>
-        <p:cNvPr id="1" name="Shape 160"/>
+        <p:cNvPr id="1" name="Shape 164"/>
         <p:cNvGrpSpPr/>
         <p:nvPr/>
       </p:nvGrpSpPr>
@@ -1166,7 +1168,7 @@
       </p:grpSpPr>
       <p:sp>
         <p:nvSpPr>
-          <p:cNvPr id="161" name="Google Shape;161;g2ba352aa90c_0_0:notes"/>
+          <p:cNvPr id="165" name="Google Shape;165;g2ba352aa90c_0_0:notes"/>
           <p:cNvSpPr>
             <a:spLocks noGrp="1" noRot="1" noChangeAspect="1"/>
           </p:cNvSpPr>
@@ -1207,7 +1209,7 @@
       </p:sp>
       <p:sp>
         <p:nvSpPr>
-          <p:cNvPr id="162" name="Google Shape;162;g2ba352aa90c_0_0:notes"/>
+          <p:cNvPr id="166" name="Google Shape;166;g2ba352aa90c_0_0:notes"/>
           <p:cNvSpPr txBox="1">
             <a:spLocks noGrp="1"/>
           </p:cNvSpPr>
@@ -1256,7 +1258,7 @@
   <p:cSld>
     <p:spTree>
       <p:nvGrpSpPr>
-        <p:cNvPr id="1" name="Shape 170"/>
+        <p:cNvPr id="1" name="Shape 174"/>
         <p:cNvGrpSpPr/>
         <p:nvPr/>
       </p:nvGrpSpPr>
@@ -1270,7 +1272,7 @@
       </p:grpSpPr>
       <p:sp>
         <p:nvSpPr>
-          <p:cNvPr id="171" name="Google Shape;171;g2bb0aac8bdd_0_0:notes"/>
+          <p:cNvPr id="175" name="Google Shape;175;g2bb0aac8bdd_0_0:notes"/>
           <p:cNvSpPr>
             <a:spLocks noGrp="1" noRot="1" noChangeAspect="1"/>
           </p:cNvSpPr>
@@ -1311,7 +1313,7 @@
       </p:sp>
       <p:sp>
         <p:nvSpPr>
-          <p:cNvPr id="172" name="Google Shape;172;g2bb0aac8bdd_0_0:notes"/>
+          <p:cNvPr id="176" name="Google Shape;176;g2bb0aac8bdd_0_0:notes"/>
           <p:cNvSpPr txBox="1">
             <a:spLocks noGrp="1"/>
           </p:cNvSpPr>
@@ -1360,7 +1362,7 @@
   <p:cSld>
     <p:spTree>
       <p:nvGrpSpPr>
-        <p:cNvPr id="1" name="Shape 180"/>
+        <p:cNvPr id="1" name="Shape 184"/>
         <p:cNvGrpSpPr/>
         <p:nvPr/>
       </p:nvGrpSpPr>
@@ -1374,7 +1376,7 @@
       </p:grpSpPr>
       <p:sp>
         <p:nvSpPr>
-          <p:cNvPr id="181" name="Google Shape;181;g2bb15e54125_0_0:notes"/>
+          <p:cNvPr id="185" name="Google Shape;185;g2bb15e54125_0_0:notes"/>
           <p:cNvSpPr>
             <a:spLocks noGrp="1" noRot="1" noChangeAspect="1"/>
           </p:cNvSpPr>
@@ -1415,7 +1417,7 @@
       </p:sp>
       <p:sp>
         <p:nvSpPr>
-          <p:cNvPr id="182" name="Google Shape;182;g2bb15e54125_0_0:notes"/>
+          <p:cNvPr id="186" name="Google Shape;186;g2bb15e54125_0_0:notes"/>
           <p:cNvSpPr txBox="1">
             <a:spLocks noGrp="1"/>
           </p:cNvSpPr>
@@ -1464,7 +1466,7 @@
   <p:cSld>
     <p:spTree>
       <p:nvGrpSpPr>
-        <p:cNvPr id="1" name="Shape 187"/>
+        <p:cNvPr id="1" name="Shape 191"/>
         <p:cNvGrpSpPr/>
         <p:nvPr/>
       </p:nvGrpSpPr>
@@ -1478,7 +1480,7 @@
       </p:grpSpPr>
       <p:sp>
         <p:nvSpPr>
-          <p:cNvPr id="188" name="Google Shape;188;g2bb15e54cb0_0_0:notes"/>
+          <p:cNvPr id="192" name="Google Shape;192;g2bb15e54cb0_0_0:notes"/>
           <p:cNvSpPr>
             <a:spLocks noGrp="1" noRot="1" noChangeAspect="1"/>
           </p:cNvSpPr>
@@ -1519,7 +1521,7 @@
       </p:sp>
       <p:sp>
         <p:nvSpPr>
-          <p:cNvPr id="189" name="Google Shape;189;g2bb15e54cb0_0_0:notes"/>
+          <p:cNvPr id="193" name="Google Shape;193;g2bb15e54cb0_0_0:notes"/>
           <p:cNvSpPr txBox="1">
             <a:spLocks noGrp="1"/>
           </p:cNvSpPr>
@@ -1568,7 +1570,7 @@
   <p:cSld>
     <p:spTree>
       <p:nvGrpSpPr>
-        <p:cNvPr id="1" name="Shape 195"/>
+        <p:cNvPr id="1" name="Shape 199"/>
         <p:cNvGrpSpPr/>
         <p:nvPr/>
       </p:nvGrpSpPr>
@@ -1582,7 +1584,7 @@
       </p:grpSpPr>
       <p:sp>
         <p:nvSpPr>
-          <p:cNvPr id="196" name="Google Shape;196;g2bb0d5757ec_0_0:notes"/>
+          <p:cNvPr id="200" name="Google Shape;200;g2bbd68d928c_0_4:notes"/>
           <p:cNvSpPr>
             <a:spLocks noGrp="1" noRot="1" noChangeAspect="1"/>
           </p:cNvSpPr>
@@ -1623,7 +1625,7 @@
       </p:sp>
       <p:sp>
         <p:nvSpPr>
-          <p:cNvPr id="197" name="Google Shape;197;g2bb0d5757ec_0_0:notes"/>
+          <p:cNvPr id="201" name="Google Shape;201;g2bbd68d928c_0_4:notes"/>
           <p:cNvSpPr txBox="1">
             <a:spLocks noGrp="1"/>
           </p:cNvSpPr>
@@ -1672,7 +1674,7 @@
   <p:cSld>
     <p:spTree>
       <p:nvGrpSpPr>
-        <p:cNvPr id="1" name="Shape 202"/>
+        <p:cNvPr id="1" name="Shape 213"/>
         <p:cNvGrpSpPr/>
         <p:nvPr/>
       </p:nvGrpSpPr>
@@ -1686,7 +1688,7 @@
       </p:grpSpPr>
       <p:sp>
         <p:nvSpPr>
-          <p:cNvPr id="203" name="Google Shape;203;g2b7eafe0074_1_9:notes"/>
+          <p:cNvPr id="214" name="Google Shape;214;g2bb0d5757ec_0_0:notes"/>
           <p:cNvSpPr>
             <a:spLocks noGrp="1" noRot="1" noChangeAspect="1"/>
           </p:cNvSpPr>
@@ -1727,7 +1729,7 @@
       </p:sp>
       <p:sp>
         <p:nvSpPr>
-          <p:cNvPr id="204" name="Google Shape;204;g2b7eafe0074_1_9:notes"/>
+          <p:cNvPr id="215" name="Google Shape;215;g2bb0d5757ec_0_0:notes"/>
           <p:cNvSpPr txBox="1">
             <a:spLocks noGrp="1"/>
           </p:cNvSpPr>
@@ -1776,7 +1778,7 @@
   <p:cSld>
     <p:spTree>
       <p:nvGrpSpPr>
-        <p:cNvPr id="1" name="Shape 211"/>
+        <p:cNvPr id="1" name="Shape 220"/>
         <p:cNvGrpSpPr/>
         <p:nvPr/>
       </p:nvGrpSpPr>
@@ -1790,7 +1792,7 @@
       </p:grpSpPr>
       <p:sp>
         <p:nvSpPr>
-          <p:cNvPr id="212" name="Google Shape;212;g2bb63b346ef_0_0:notes"/>
+          <p:cNvPr id="221" name="Google Shape;221;g2b7eafe0074_1_9:notes"/>
           <p:cNvSpPr>
             <a:spLocks noGrp="1" noRot="1" noChangeAspect="1"/>
           </p:cNvSpPr>
@@ -1831,7 +1833,7 @@
       </p:sp>
       <p:sp>
         <p:nvSpPr>
-          <p:cNvPr id="213" name="Google Shape;213;g2bb63b346ef_0_0:notes"/>
+          <p:cNvPr id="222" name="Google Shape;222;g2b7eafe0074_1_9:notes"/>
           <p:cNvSpPr txBox="1">
             <a:spLocks noGrp="1"/>
           </p:cNvSpPr>
@@ -1984,7 +1986,7 @@
   <p:cSld>
     <p:spTree>
       <p:nvGrpSpPr>
-        <p:cNvPr id="1" name="Shape 223"/>
+        <p:cNvPr id="1" name="Shape 229"/>
         <p:cNvGrpSpPr/>
         <p:nvPr/>
       </p:nvGrpSpPr>
@@ -1998,7 +2000,7 @@
       </p:grpSpPr>
       <p:sp>
         <p:nvSpPr>
-          <p:cNvPr id="224" name="Google Shape;224;g2bb63ba8922_0_0:notes"/>
+          <p:cNvPr id="230" name="Google Shape;230;g2bb63b346ef_0_0:notes"/>
           <p:cNvSpPr>
             <a:spLocks noGrp="1" noRot="1" noChangeAspect="1"/>
           </p:cNvSpPr>
@@ -2039,7 +2041,7 @@
       </p:sp>
       <p:sp>
         <p:nvSpPr>
-          <p:cNvPr id="225" name="Google Shape;225;g2bb63ba8922_0_0:notes"/>
+          <p:cNvPr id="231" name="Google Shape;231;g2bb63b346ef_0_0:notes"/>
           <p:cNvSpPr txBox="1">
             <a:spLocks noGrp="1"/>
           </p:cNvSpPr>
@@ -2088,7 +2090,7 @@
   <p:cSld>
     <p:spTree>
       <p:nvGrpSpPr>
-        <p:cNvPr id="1" name="Shape 230"/>
+        <p:cNvPr id="1" name="Shape 241"/>
         <p:cNvGrpSpPr/>
         <p:nvPr/>
       </p:nvGrpSpPr>
@@ -2102,7 +2104,7 @@
       </p:grpSpPr>
       <p:sp>
         <p:nvSpPr>
-          <p:cNvPr id="231" name="Google Shape;231;g2b9ba3ebc86_0_3:notes"/>
+          <p:cNvPr id="242" name="Google Shape;242;g2bb63ba8922_0_0:notes"/>
           <p:cNvSpPr>
             <a:spLocks noGrp="1" noRot="1" noChangeAspect="1"/>
           </p:cNvSpPr>
@@ -2143,7 +2145,7 @@
       </p:sp>
       <p:sp>
         <p:nvSpPr>
-          <p:cNvPr id="232" name="Google Shape;232;g2b9ba3ebc86_0_3:notes"/>
+          <p:cNvPr id="243" name="Google Shape;243;g2bb63ba8922_0_0:notes"/>
           <p:cNvSpPr txBox="1">
             <a:spLocks noGrp="1"/>
           </p:cNvSpPr>
@@ -2192,7 +2194,7 @@
   <p:cSld>
     <p:spTree>
       <p:nvGrpSpPr>
-        <p:cNvPr id="1" name="Shape 240"/>
+        <p:cNvPr id="1" name="Shape 248"/>
         <p:cNvGrpSpPr/>
         <p:nvPr/>
       </p:nvGrpSpPr>
@@ -2206,7 +2208,7 @@
       </p:grpSpPr>
       <p:sp>
         <p:nvSpPr>
-          <p:cNvPr id="241" name="Google Shape;241;g2b7eafe0074_1_29:notes"/>
+          <p:cNvPr id="249" name="Google Shape;249;g2bbdf1cc35a_0_3:notes"/>
           <p:cNvSpPr>
             <a:spLocks noGrp="1" noRot="1" noChangeAspect="1"/>
           </p:cNvSpPr>
@@ -2247,7 +2249,215 @@
       </p:sp>
       <p:sp>
         <p:nvSpPr>
-          <p:cNvPr id="242" name="Google Shape;242;g2b7eafe0074_1_29:notes"/>
+          <p:cNvPr id="250" name="Google Shape;250;g2bbdf1cc35a_0_3:notes"/>
+          <p:cNvSpPr txBox="1">
+            <a:spLocks noGrp="1"/>
+          </p:cNvSpPr>
+          <p:nvPr>
+            <p:ph type="body" idx="1"/>
+          </p:nvPr>
+        </p:nvSpPr>
+        <p:spPr>
+          <a:xfrm>
+            <a:off x="685800" y="4343400"/>
+            <a:ext cx="5486400" cy="4114800"/>
+          </a:xfrm>
+          <a:prstGeom prst="rect">
+            <a:avLst/>
+          </a:prstGeom>
+        </p:spPr>
+        <p:txBody>
+          <a:bodyPr spcFirstLastPara="1" wrap="square" lIns="91425" tIns="91425" rIns="91425" bIns="91425" anchor="t" anchorCtr="0">
+            <a:noAutofit/>
+          </a:bodyPr>
+          <a:lstStyle/>
+          <a:p>
+            <a:pPr marL="0" lvl="0" indent="0" algn="l" rtl="0">
+              <a:spcBef>
+                <a:spcPts val="0"/>
+              </a:spcBef>
+              <a:spcAft>
+                <a:spcPts val="0"/>
+              </a:spcAft>
+              <a:buNone/>
+            </a:pPr>
+            <a:endParaRPr/>
+          </a:p>
+        </p:txBody>
+      </p:sp>
+    </p:spTree>
+  </p:cSld>
+  <p:clrMapOvr>
+    <a:masterClrMapping/>
+  </p:clrMapOvr>
+</p:notes>
+</file>
+
+<file path=ppt/notesSlides/notesSlide23.xml><?xml version="1.0" encoding="utf-8"?>
+<p:notes xmlns:a="http://schemas.openxmlformats.org/drawingml/2006/main" xmlns:r="http://schemas.openxmlformats.org/officeDocument/2006/relationships" xmlns:p="http://schemas.openxmlformats.org/presentationml/2006/main" showMasterSp="0" showMasterPhAnim="0">
+  <p:cSld>
+    <p:spTree>
+      <p:nvGrpSpPr>
+        <p:cNvPr id="1" name="Shape 257"/>
+        <p:cNvGrpSpPr/>
+        <p:nvPr/>
+      </p:nvGrpSpPr>
+      <p:grpSpPr>
+        <a:xfrm>
+          <a:off x="0" y="0"/>
+          <a:ext cx="0" cy="0"/>
+          <a:chOff x="0" y="0"/>
+          <a:chExt cx="0" cy="0"/>
+        </a:xfrm>
+      </p:grpSpPr>
+      <p:sp>
+        <p:nvSpPr>
+          <p:cNvPr id="258" name="Google Shape;258;g2b9ba3ebc86_0_3:notes"/>
+          <p:cNvSpPr>
+            <a:spLocks noGrp="1" noRot="1" noChangeAspect="1"/>
+          </p:cNvSpPr>
+          <p:nvPr>
+            <p:ph type="sldImg" idx="2"/>
+          </p:nvPr>
+        </p:nvSpPr>
+        <p:spPr>
+          <a:xfrm>
+            <a:off x="381300" y="685800"/>
+            <a:ext cx="6096000" cy="3429000"/>
+          </a:xfrm>
+          <a:custGeom>
+            <a:avLst/>
+            <a:gdLst/>
+            <a:ahLst/>
+            <a:cxnLst/>
+            <a:rect l="l" t="t" r="r" b="b"/>
+            <a:pathLst>
+              <a:path w="120000" h="120000" extrusionOk="0">
+                <a:moveTo>
+                  <a:pt x="0" y="0"/>
+                </a:moveTo>
+                <a:lnTo>
+                  <a:pt x="120000" y="0"/>
+                </a:lnTo>
+                <a:lnTo>
+                  <a:pt x="120000" y="120000"/>
+                </a:lnTo>
+                <a:lnTo>
+                  <a:pt x="0" y="120000"/>
+                </a:lnTo>
+                <a:close/>
+              </a:path>
+            </a:pathLst>
+          </a:custGeom>
+        </p:spPr>
+      </p:sp>
+      <p:sp>
+        <p:nvSpPr>
+          <p:cNvPr id="259" name="Google Shape;259;g2b9ba3ebc86_0_3:notes"/>
+          <p:cNvSpPr txBox="1">
+            <a:spLocks noGrp="1"/>
+          </p:cNvSpPr>
+          <p:nvPr>
+            <p:ph type="body" idx="1"/>
+          </p:nvPr>
+        </p:nvSpPr>
+        <p:spPr>
+          <a:xfrm>
+            <a:off x="685800" y="4343400"/>
+            <a:ext cx="5486400" cy="4114800"/>
+          </a:xfrm>
+          <a:prstGeom prst="rect">
+            <a:avLst/>
+          </a:prstGeom>
+        </p:spPr>
+        <p:txBody>
+          <a:bodyPr spcFirstLastPara="1" wrap="square" lIns="91425" tIns="91425" rIns="91425" bIns="91425" anchor="t" anchorCtr="0">
+            <a:noAutofit/>
+          </a:bodyPr>
+          <a:lstStyle/>
+          <a:p>
+            <a:pPr marL="0" lvl="0" indent="0" algn="l" rtl="0">
+              <a:spcBef>
+                <a:spcPts val="0"/>
+              </a:spcBef>
+              <a:spcAft>
+                <a:spcPts val="0"/>
+              </a:spcAft>
+              <a:buNone/>
+            </a:pPr>
+            <a:endParaRPr/>
+          </a:p>
+        </p:txBody>
+      </p:sp>
+    </p:spTree>
+  </p:cSld>
+  <p:clrMapOvr>
+    <a:masterClrMapping/>
+  </p:clrMapOvr>
+</p:notes>
+</file>
+
+<file path=ppt/notesSlides/notesSlide24.xml><?xml version="1.0" encoding="utf-8"?>
+<p:notes xmlns:a="http://schemas.openxmlformats.org/drawingml/2006/main" xmlns:r="http://schemas.openxmlformats.org/officeDocument/2006/relationships" xmlns:p="http://schemas.openxmlformats.org/presentationml/2006/main" showMasterSp="0" showMasterPhAnim="0">
+  <p:cSld>
+    <p:spTree>
+      <p:nvGrpSpPr>
+        <p:cNvPr id="1" name="Shape 265"/>
+        <p:cNvGrpSpPr/>
+        <p:nvPr/>
+      </p:nvGrpSpPr>
+      <p:grpSpPr>
+        <a:xfrm>
+          <a:off x="0" y="0"/>
+          <a:ext cx="0" cy="0"/>
+          <a:chOff x="0" y="0"/>
+          <a:chExt cx="0" cy="0"/>
+        </a:xfrm>
+      </p:grpSpPr>
+      <p:sp>
+        <p:nvSpPr>
+          <p:cNvPr id="266" name="Google Shape;266;g2b7eafe0074_1_29:notes"/>
+          <p:cNvSpPr>
+            <a:spLocks noGrp="1" noRot="1" noChangeAspect="1"/>
+          </p:cNvSpPr>
+          <p:nvPr>
+            <p:ph type="sldImg" idx="2"/>
+          </p:nvPr>
+        </p:nvSpPr>
+        <p:spPr>
+          <a:xfrm>
+            <a:off x="381300" y="685800"/>
+            <a:ext cx="6096000" cy="3429000"/>
+          </a:xfrm>
+          <a:custGeom>
+            <a:avLst/>
+            <a:gdLst/>
+            <a:ahLst/>
+            <a:cxnLst/>
+            <a:rect l="l" t="t" r="r" b="b"/>
+            <a:pathLst>
+              <a:path w="120000" h="120000" extrusionOk="0">
+                <a:moveTo>
+                  <a:pt x="0" y="0"/>
+                </a:moveTo>
+                <a:lnTo>
+                  <a:pt x="120000" y="0"/>
+                </a:lnTo>
+                <a:lnTo>
+                  <a:pt x="120000" y="120000"/>
+                </a:lnTo>
+                <a:lnTo>
+                  <a:pt x="0" y="120000"/>
+                </a:lnTo>
+                <a:close/>
+              </a:path>
+            </a:pathLst>
+          </a:custGeom>
+        </p:spPr>
+      </p:sp>
+      <p:sp>
+        <p:nvSpPr>
+          <p:cNvPr id="267" name="Google Shape;267;g2b7eafe0074_1_29:notes"/>
           <p:cNvSpPr txBox="1">
             <a:spLocks noGrp="1"/>
           </p:cNvSpPr>
@@ -2608,7 +2818,7 @@
   <p:cSld>
     <p:spTree>
       <p:nvGrpSpPr>
-        <p:cNvPr id="1" name="Shape 89"/>
+        <p:cNvPr id="1" name="Shape 92"/>
         <p:cNvGrpSpPr/>
         <p:nvPr/>
       </p:nvGrpSpPr>
@@ -2622,7 +2832,7 @@
       </p:grpSpPr>
       <p:sp>
         <p:nvSpPr>
-          <p:cNvPr id="90" name="Google Shape;90;g2bad9bea683_0_0:notes"/>
+          <p:cNvPr id="93" name="Google Shape;93;g2bad9bea683_0_0:notes"/>
           <p:cNvSpPr>
             <a:spLocks noGrp="1" noRot="1" noChangeAspect="1"/>
           </p:cNvSpPr>
@@ -2663,7 +2873,7 @@
       </p:sp>
       <p:sp>
         <p:nvSpPr>
-          <p:cNvPr id="91" name="Google Shape;91;g2bad9bea683_0_0:notes"/>
+          <p:cNvPr id="94" name="Google Shape;94;g2bad9bea683_0_0:notes"/>
           <p:cNvSpPr txBox="1">
             <a:spLocks noGrp="1"/>
           </p:cNvSpPr>
@@ -2712,7 +2922,7 @@
   <p:cSld>
     <p:spTree>
       <p:nvGrpSpPr>
-        <p:cNvPr id="1" name="Shape 101"/>
+        <p:cNvPr id="1" name="Shape 104"/>
         <p:cNvGrpSpPr/>
         <p:nvPr/>
       </p:nvGrpSpPr>
@@ -2726,7 +2936,7 @@
       </p:grpSpPr>
       <p:sp>
         <p:nvSpPr>
-          <p:cNvPr id="102" name="Google Shape;102;g2ba5f586be2_1_0:notes"/>
+          <p:cNvPr id="105" name="Google Shape;105;g2ba5f586be2_1_0:notes"/>
           <p:cNvSpPr>
             <a:spLocks noGrp="1" noRot="1" noChangeAspect="1"/>
           </p:cNvSpPr>
@@ -2767,7 +2977,7 @@
       </p:sp>
       <p:sp>
         <p:nvSpPr>
-          <p:cNvPr id="103" name="Google Shape;103;g2ba5f586be2_1_0:notes"/>
+          <p:cNvPr id="106" name="Google Shape;106;g2ba5f586be2_1_0:notes"/>
           <p:cNvSpPr txBox="1">
             <a:spLocks noGrp="1"/>
           </p:cNvSpPr>
@@ -2816,7 +3026,7 @@
   <p:cSld>
     <p:spTree>
       <p:nvGrpSpPr>
-        <p:cNvPr id="1" name="Shape 111"/>
+        <p:cNvPr id="1" name="Shape 114"/>
         <p:cNvGrpSpPr/>
         <p:nvPr/>
       </p:nvGrpSpPr>
@@ -2830,7 +3040,7 @@
       </p:grpSpPr>
       <p:sp>
         <p:nvSpPr>
-          <p:cNvPr id="112" name="Google Shape;112;g2ba60d651b9_0_2:notes"/>
+          <p:cNvPr id="115" name="Google Shape;115;g2ba60d651b9_0_2:notes"/>
           <p:cNvSpPr>
             <a:spLocks noGrp="1" noRot="1" noChangeAspect="1"/>
           </p:cNvSpPr>
@@ -2871,7 +3081,7 @@
       </p:sp>
       <p:sp>
         <p:nvSpPr>
-          <p:cNvPr id="113" name="Google Shape;113;g2ba60d651b9_0_2:notes"/>
+          <p:cNvPr id="116" name="Google Shape;116;g2ba60d651b9_0_2:notes"/>
           <p:cNvSpPr txBox="1">
             <a:spLocks noGrp="1"/>
           </p:cNvSpPr>
@@ -2920,7 +3130,7 @@
   <p:cSld>
     <p:spTree>
       <p:nvGrpSpPr>
-        <p:cNvPr id="1" name="Shape 122"/>
+        <p:cNvPr id="1" name="Shape 125"/>
         <p:cNvGrpSpPr/>
         <p:nvPr/>
       </p:nvGrpSpPr>
@@ -2934,7 +3144,7 @@
       </p:grpSpPr>
       <p:sp>
         <p:nvSpPr>
-          <p:cNvPr id="123" name="Google Shape;123;g2baf2ccdf4e_0_0:notes"/>
+          <p:cNvPr id="126" name="Google Shape;126;g2baf2ccdf4e_0_0:notes"/>
           <p:cNvSpPr>
             <a:spLocks noGrp="1" noRot="1" noChangeAspect="1"/>
           </p:cNvSpPr>
@@ -2975,7 +3185,7 @@
       </p:sp>
       <p:sp>
         <p:nvSpPr>
-          <p:cNvPr id="124" name="Google Shape;124;g2baf2ccdf4e_0_0:notes"/>
+          <p:cNvPr id="127" name="Google Shape;127;g2baf2ccdf4e_0_0:notes"/>
           <p:cNvSpPr txBox="1">
             <a:spLocks noGrp="1"/>
           </p:cNvSpPr>
@@ -7793,8 +8003,8 @@
         </p:nvSpPr>
         <p:spPr>
           <a:xfrm>
-            <a:off x="137850" y="1280228"/>
-            <a:ext cx="4342500" cy="3632700"/>
+            <a:off x="137850" y="1127828"/>
+            <a:ext cx="4342500" cy="3879000"/>
           </a:xfrm>
           <a:prstGeom prst="rect">
             <a:avLst/>
@@ -8207,6 +8417,34 @@
               </a:solidFill>
             </a:endParaRPr>
           </a:p>
+          <a:p>
+            <a:pPr marL="228600" lvl="0" indent="-215900" algn="l" rtl="0">
+              <a:spcBef>
+                <a:spcPts val="0"/>
+              </a:spcBef>
+              <a:spcAft>
+                <a:spcPts val="0"/>
+              </a:spcAft>
+              <a:buClr>
+                <a:srgbClr val="3C78D8"/>
+              </a:buClr>
+              <a:buSzPts val="1600"/>
+              <a:buChar char="●"/>
+            </a:pPr>
+            <a:r>
+              <a:rPr lang="en" sz="1600" b="1">
+                <a:solidFill>
+                  <a:srgbClr val="3C78D8"/>
+                </a:solidFill>
+              </a:rPr>
+              <a:t>Magic AI - AI Software Engineer</a:t>
+            </a:r>
+            <a:endParaRPr sz="1600" b="1">
+              <a:solidFill>
+                <a:srgbClr val="3C78D8"/>
+              </a:solidFill>
+            </a:endParaRPr>
+          </a:p>
         </p:txBody>
       </p:sp>
       <p:sp>
@@ -8217,8 +8455,8 @@
         </p:nvSpPr>
         <p:spPr>
           <a:xfrm>
-            <a:off x="4672738" y="1277253"/>
-            <a:ext cx="4342500" cy="3386400"/>
+            <a:off x="4672738" y="1124853"/>
+            <a:ext cx="4342500" cy="3879000"/>
           </a:xfrm>
           <a:prstGeom prst="rect">
             <a:avLst/>
@@ -8259,7 +8497,7 @@
                   <a:srgbClr val="3C78D8"/>
                 </a:solidFill>
               </a:rPr>
-              <a:t>Magic AI - AI Software Engineer</a:t>
+              <a:t>YouTube CEO: 4 Big bets for 2024</a:t>
             </a:r>
             <a:endParaRPr sz="1600" b="1">
               <a:solidFill>
@@ -8287,7 +8525,7 @@
                   <a:srgbClr val="3C78D8"/>
                 </a:solidFill>
               </a:rPr>
-              <a:t>YouTube CEO: 4 Big bets for 2024</a:t>
+              <a:t>Text Embeddings Guide</a:t>
             </a:r>
             <a:endParaRPr sz="1600" b="1">
               <a:solidFill>
@@ -8315,7 +8553,7 @@
                   <a:srgbClr val="3C78D8"/>
                 </a:solidFill>
               </a:rPr>
-              <a:t>Text Embeddings Guide</a:t>
+              <a:t>Fine-Tuned 7b Outperforms GPT-4</a:t>
             </a:r>
             <a:endParaRPr sz="1600" b="1">
               <a:solidFill>
@@ -8483,7 +8721,7 @@
                   <a:srgbClr val="3C78D8"/>
                 </a:solidFill>
               </a:rPr>
-              <a:t>Gartner - How to Pilot Generative AI</a:t>
+              <a:t>Gemini Diversity Problem</a:t>
             </a:r>
             <a:endParaRPr sz="1600" b="1">
               <a:solidFill>
@@ -8511,7 +8749,7 @@
                   <a:srgbClr val="3C78D8"/>
                 </a:solidFill>
               </a:rPr>
-              <a:t>Crowd-sourced "Arena" Leaderboard</a:t>
+              <a:t>Gartner - How to Pilot Generative AI</a:t>
             </a:r>
             <a:endParaRPr sz="1600" b="1">
               <a:solidFill>
@@ -8539,7 +8777,7 @@
                   <a:srgbClr val="3C78D8"/>
                 </a:solidFill>
               </a:rPr>
-              <a:t>HELM Leaderboard</a:t>
+              <a:t>Crowd-sourced "Arena" Leaderboard</a:t>
             </a:r>
             <a:endParaRPr sz="1600" b="1">
               <a:solidFill>
@@ -8567,7 +8805,63 @@
                   <a:srgbClr val="3C78D8"/>
                 </a:solidFill>
               </a:rPr>
+              <a:t>HELM Leaderboard</a:t>
+            </a:r>
+            <a:endParaRPr sz="1600" b="1">
+              <a:solidFill>
+                <a:srgbClr val="3C78D8"/>
+              </a:solidFill>
+            </a:endParaRPr>
+          </a:p>
+          <a:p>
+            <a:pPr marL="228600" lvl="0" indent="-215900" algn="l" rtl="0">
+              <a:spcBef>
+                <a:spcPts val="0"/>
+              </a:spcBef>
+              <a:spcAft>
+                <a:spcPts val="0"/>
+              </a:spcAft>
+              <a:buClr>
+                <a:srgbClr val="3C78D8"/>
+              </a:buClr>
+              <a:buSzPts val="1600"/>
+              <a:buChar char="●"/>
+            </a:pPr>
+            <a:r>
+              <a:rPr lang="en" sz="1600" b="1">
+                <a:solidFill>
+                  <a:srgbClr val="3C78D8"/>
+                </a:solidFill>
+              </a:rPr>
               <a:t>LLM as Zero-cost Commodity</a:t>
+            </a:r>
+            <a:endParaRPr sz="1600" b="1">
+              <a:solidFill>
+                <a:srgbClr val="3C78D8"/>
+              </a:solidFill>
+            </a:endParaRPr>
+          </a:p>
+          <a:p>
+            <a:pPr marL="228600" lvl="0" indent="-215900" algn="l" rtl="0">
+              <a:spcBef>
+                <a:spcPts val="0"/>
+              </a:spcBef>
+              <a:spcAft>
+                <a:spcPts val="0"/>
+              </a:spcAft>
+              <a:buClr>
+                <a:srgbClr val="3C78D8"/>
+              </a:buClr>
+              <a:buSzPts val="1600"/>
+              <a:buChar char="●"/>
+            </a:pPr>
+            <a:r>
+              <a:rPr lang="en" sz="1600" b="1">
+                <a:solidFill>
+                  <a:srgbClr val="3C78D8"/>
+                </a:solidFill>
+              </a:rPr>
+              <a:t>Writing/Translation Jobs Go Down</a:t>
             </a:r>
             <a:endParaRPr sz="1600" b="1">
               <a:solidFill>
@@ -8613,8 +8907,8 @@
         </p:nvSpPr>
         <p:spPr>
           <a:xfrm>
-            <a:off x="2493250" y="228175"/>
-            <a:ext cx="4260300" cy="942000"/>
+            <a:off x="3027550" y="151975"/>
+            <a:ext cx="3192600" cy="942000"/>
           </a:xfrm>
           <a:prstGeom prst="rect">
             <a:avLst/>
@@ -8692,7 +8986,7 @@
   <p:cSld>
     <p:spTree>
       <p:nvGrpSpPr>
-        <p:cNvPr id="1" name="Shape 133"/>
+        <p:cNvPr id="1" name="Shape 136"/>
         <p:cNvGrpSpPr/>
         <p:nvPr/>
       </p:nvGrpSpPr>
@@ -8706,7 +9000,7 @@
       </p:grpSpPr>
       <p:sp>
         <p:nvSpPr>
-          <p:cNvPr id="134" name="Google Shape;134;p22"/>
+          <p:cNvPr id="137" name="Google Shape;137;p22"/>
           <p:cNvSpPr txBox="1"/>
           <p:nvPr/>
         </p:nvSpPr>
@@ -8890,7 +9184,7 @@
       </p:sp>
       <p:sp>
         <p:nvSpPr>
-          <p:cNvPr id="135" name="Google Shape;135;p22"/>
+          <p:cNvPr id="138" name="Google Shape;138;p22"/>
           <p:cNvSpPr txBox="1"/>
           <p:nvPr/>
         </p:nvSpPr>
@@ -8945,13 +9239,13 @@
       </p:sp>
       <p:sp>
         <p:nvSpPr>
-          <p:cNvPr id="136" name="Google Shape;136;p22"/>
+          <p:cNvPr id="139" name="Google Shape;139;p22"/>
           <p:cNvSpPr txBox="1"/>
           <p:nvPr/>
         </p:nvSpPr>
         <p:spPr>
           <a:xfrm>
-            <a:off x="72300" y="2506725"/>
+            <a:off x="64922" y="3694275"/>
             <a:ext cx="4362600" cy="1385400"/>
           </a:xfrm>
           <a:prstGeom prst="rect">
@@ -9094,7 +9388,7 @@
       </p:sp>
       <p:pic>
         <p:nvPicPr>
-          <p:cNvPr id="137" name="Google Shape;137;p22"/>
+          <p:cNvPr id="140" name="Google Shape;140;p22"/>
           <p:cNvPicPr preferRelativeResize="0"/>
           <p:nvPr/>
         </p:nvPicPr>
@@ -9113,41 +9407,8 @@
         </p:blipFill>
         <p:spPr>
           <a:xfrm>
-            <a:off x="4518200" y="2506725"/>
-            <a:ext cx="602275" cy="602275"/>
-          </a:xfrm>
-          <a:prstGeom prst="rect">
-            <a:avLst/>
-          </a:prstGeom>
-          <a:noFill/>
-          <a:ln>
-            <a:noFill/>
-          </a:ln>
-        </p:spPr>
-      </p:pic>
-      <p:pic>
-        <p:nvPicPr>
-          <p:cNvPr id="138" name="Google Shape;138;p22"/>
-          <p:cNvPicPr preferRelativeResize="0"/>
-          <p:nvPr/>
-        </p:nvPicPr>
-        <p:blipFill>
-          <a:blip r:embed="rId5" cstate="email">
-            <a:alphaModFix/>
-            <a:extLst>
-              <a:ext uri="{28A0092B-C50C-407E-A947-70E740481C1C}">
-                <a14:useLocalDpi xmlns:a14="http://schemas.microsoft.com/office/drawing/2010/main"/>
-              </a:ext>
-            </a:extLst>
-          </a:blip>
-          <a:stretch>
-            <a:fillRect/>
-          </a:stretch>
-        </p:blipFill>
-        <p:spPr>
-          <a:xfrm>
-            <a:off x="4518200" y="3154050"/>
-            <a:ext cx="1300875" cy="478150"/>
+            <a:off x="4511100" y="4539450"/>
+            <a:ext cx="1031050" cy="378975"/>
           </a:xfrm>
           <a:prstGeom prst="rect">
             <a:avLst/>
@@ -9160,14 +9421,14 @@
       </p:pic>
       <p:sp>
         <p:nvSpPr>
-          <p:cNvPr id="139" name="Google Shape;139;p22"/>
+          <p:cNvPr id="141" name="Google Shape;141;p22"/>
           <p:cNvSpPr txBox="1"/>
           <p:nvPr/>
         </p:nvSpPr>
         <p:spPr>
           <a:xfrm>
-            <a:off x="72300" y="4032925"/>
-            <a:ext cx="4362600" cy="985200"/>
+            <a:off x="6205225" y="3632200"/>
+            <a:ext cx="2869800" cy="1385400"/>
           </a:xfrm>
           <a:prstGeom prst="rect">
             <a:avLst/>
@@ -9209,7 +9470,7 @@
                 <a:ea typeface="Calibri"/>
                 <a:cs typeface="Calibri"/>
                 <a:sym typeface="Calibri"/>
-                <a:hlinkClick r:id="rId6"/>
+                <a:hlinkClick r:id="rId5"/>
               </a:rPr>
               <a:t>https://magic.dev</a:t>
             </a:r>
@@ -9263,12 +9524,12 @@
       </p:sp>
       <p:pic>
         <p:nvPicPr>
-          <p:cNvPr id="140" name="Google Shape;140;p22"/>
+          <p:cNvPr id="142" name="Google Shape;142;p22"/>
           <p:cNvPicPr preferRelativeResize="0"/>
           <p:nvPr/>
         </p:nvPicPr>
         <p:blipFill>
-          <a:blip r:embed="rId7" cstate="email">
+          <a:blip r:embed="rId6" cstate="email">
             <a:alphaModFix/>
             <a:extLst>
               <a:ext uri="{28A0092B-C50C-407E-A947-70E740481C1C}">
@@ -9282,8 +9543,8 @@
         </p:blipFill>
         <p:spPr>
           <a:xfrm>
-            <a:off x="4518200" y="4324288"/>
-            <a:ext cx="1654000" cy="402475"/>
+            <a:off x="4795426" y="3860398"/>
+            <a:ext cx="1341448" cy="326400"/>
           </a:xfrm>
           <a:prstGeom prst="rect">
             <a:avLst/>
@@ -9296,7 +9557,7 @@
       </p:pic>
       <p:sp>
         <p:nvSpPr>
-          <p:cNvPr id="141" name="Google Shape;141;p22"/>
+          <p:cNvPr id="143" name="Google Shape;143;p22"/>
           <p:cNvSpPr txBox="1"/>
           <p:nvPr/>
         </p:nvSpPr>
@@ -9345,7 +9606,7 @@
                 <a:ea typeface="Calibri"/>
                 <a:cs typeface="Calibri"/>
                 <a:sym typeface="Calibri"/>
-                <a:hlinkClick r:id="rId8"/>
+                <a:hlinkClick r:id="rId7"/>
               </a:rPr>
               <a:t>https://blog.youtube/inside-youtube/2024-letter-from-neal/</a:t>
             </a:r>
@@ -9535,12 +9796,12 @@
       </p:sp>
       <p:pic>
         <p:nvPicPr>
-          <p:cNvPr id="142" name="Google Shape;142;p22"/>
+          <p:cNvPr id="144" name="Google Shape;144;p22"/>
           <p:cNvPicPr preferRelativeResize="0"/>
           <p:nvPr/>
         </p:nvPicPr>
         <p:blipFill>
-          <a:blip r:embed="rId9" cstate="email">
+          <a:blip r:embed="rId8" cstate="email">
             <a:alphaModFix/>
             <a:extLst>
               <a:ext uri="{28A0092B-C50C-407E-A947-70E740481C1C}">
@@ -9554,7 +9815,7 @@
         </p:blipFill>
         <p:spPr>
           <a:xfrm>
-            <a:off x="7803050" y="2228200"/>
+            <a:off x="6513250" y="2242025"/>
             <a:ext cx="1237975" cy="1159326"/>
           </a:xfrm>
           <a:prstGeom prst="rect">
@@ -9568,13 +9829,13 @@
       </p:pic>
       <p:sp>
         <p:nvSpPr>
-          <p:cNvPr id="143" name="Google Shape;143;p22"/>
+          <p:cNvPr id="145" name="Google Shape;145;p22"/>
           <p:cNvSpPr txBox="1"/>
           <p:nvPr/>
         </p:nvSpPr>
         <p:spPr>
           <a:xfrm>
-            <a:off x="7832085" y="3387525"/>
+            <a:off x="7861135" y="2279250"/>
             <a:ext cx="1179900" cy="585000"/>
           </a:xfrm>
           <a:prstGeom prst="rect">
@@ -9656,6 +9917,199 @@
           </a:p>
         </p:txBody>
       </p:sp>
+      <p:sp>
+        <p:nvSpPr>
+          <p:cNvPr id="146" name="Google Shape;146;p22"/>
+          <p:cNvSpPr txBox="1"/>
+          <p:nvPr/>
+        </p:nvSpPr>
+        <p:spPr>
+          <a:xfrm>
+            <a:off x="72300" y="2422760"/>
+            <a:ext cx="4362600" cy="1185300"/>
+          </a:xfrm>
+          <a:prstGeom prst="rect">
+            <a:avLst/>
+          </a:prstGeom>
+          <a:solidFill>
+            <a:srgbClr val="FFF2CC"/>
+          </a:solidFill>
+          <a:ln w="9525" cap="flat" cmpd="sng">
+            <a:solidFill>
+              <a:srgbClr val="FF0000"/>
+            </a:solidFill>
+            <a:prstDash val="solid"/>
+            <a:round/>
+            <a:headEnd type="none" w="sm" len="sm"/>
+            <a:tailEnd type="none" w="sm" len="sm"/>
+          </a:ln>
+        </p:spPr>
+        <p:txBody>
+          <a:bodyPr spcFirstLastPara="1" wrap="square" lIns="91425" tIns="91425" rIns="91425" bIns="91425" anchor="t" anchorCtr="0">
+            <a:spAutoFit/>
+          </a:bodyPr>
+          <a:lstStyle/>
+          <a:p>
+            <a:pPr marL="228600" lvl="0" indent="-196850" algn="l" rtl="0">
+              <a:spcBef>
+                <a:spcPts val="0"/>
+              </a:spcBef>
+              <a:spcAft>
+                <a:spcPts val="0"/>
+              </a:spcAft>
+              <a:buSzPts val="1300"/>
+              <a:buFont typeface="Calibri"/>
+              <a:buChar char="●"/>
+            </a:pPr>
+            <a:r>
+              <a:rPr lang="en" sz="1300" b="1">
+                <a:solidFill>
+                  <a:srgbClr val="FF0000"/>
+                </a:solidFill>
+                <a:latin typeface="Calibri"/>
+                <a:ea typeface="Calibri"/>
+                <a:cs typeface="Calibri"/>
+                <a:sym typeface="Calibri"/>
+              </a:rPr>
+              <a:t>Phind-70B</a:t>
+            </a:r>
+            <a:r>
+              <a:rPr lang="en" sz="1300">
+                <a:latin typeface="Calibri"/>
+                <a:ea typeface="Calibri"/>
+                <a:cs typeface="Calibri"/>
+                <a:sym typeface="Calibri"/>
+              </a:rPr>
+              <a:t> is better than GPT-4-turbo for coding. </a:t>
+            </a:r>
+            <a:endParaRPr sz="1300">
+              <a:latin typeface="Calibri"/>
+              <a:ea typeface="Calibri"/>
+              <a:cs typeface="Calibri"/>
+              <a:sym typeface="Calibri"/>
+            </a:endParaRPr>
+          </a:p>
+          <a:p>
+            <a:pPr marL="228600" lvl="0" indent="-196850" algn="l" rtl="0">
+              <a:spcBef>
+                <a:spcPts val="0"/>
+              </a:spcBef>
+              <a:spcAft>
+                <a:spcPts val="0"/>
+              </a:spcAft>
+              <a:buSzPts val="1300"/>
+              <a:buFont typeface="Calibri"/>
+              <a:buChar char="●"/>
+            </a:pPr>
+            <a:r>
+              <a:rPr lang="en" sz="1300">
+                <a:latin typeface="Calibri"/>
+                <a:ea typeface="Calibri"/>
+                <a:cs typeface="Calibri"/>
+                <a:sym typeface="Calibri"/>
+              </a:rPr>
+              <a:t>Based on CodeLlama-70B, fine-tuned on 50 Bln tokens</a:t>
+            </a:r>
+            <a:endParaRPr sz="1300">
+              <a:latin typeface="Calibri"/>
+              <a:ea typeface="Calibri"/>
+              <a:cs typeface="Calibri"/>
+              <a:sym typeface="Calibri"/>
+            </a:endParaRPr>
+          </a:p>
+          <a:p>
+            <a:pPr marL="228600" lvl="0" indent="-196850" algn="l" rtl="0">
+              <a:spcBef>
+                <a:spcPts val="0"/>
+              </a:spcBef>
+              <a:spcAft>
+                <a:spcPts val="0"/>
+              </a:spcAft>
+              <a:buSzPts val="1300"/>
+              <a:buFont typeface="Calibri"/>
+              <a:buChar char="●"/>
+            </a:pPr>
+            <a:r>
+              <a:rPr lang="en" sz="1300">
+                <a:latin typeface="Calibri"/>
+                <a:ea typeface="Calibri"/>
+                <a:cs typeface="Calibri"/>
+                <a:sym typeface="Calibri"/>
+              </a:rPr>
+              <a:t>Context length 32K tokens.</a:t>
+            </a:r>
+            <a:endParaRPr sz="1300">
+              <a:latin typeface="Calibri"/>
+              <a:ea typeface="Calibri"/>
+              <a:cs typeface="Calibri"/>
+              <a:sym typeface="Calibri"/>
+            </a:endParaRPr>
+          </a:p>
+          <a:p>
+            <a:pPr marL="228600" lvl="0" indent="-196850" algn="l" rtl="0">
+              <a:spcBef>
+                <a:spcPts val="0"/>
+              </a:spcBef>
+              <a:spcAft>
+                <a:spcPts val="0"/>
+              </a:spcAft>
+              <a:buSzPts val="1300"/>
+              <a:buFont typeface="Calibri"/>
+              <a:buChar char="●"/>
+            </a:pPr>
+            <a:r>
+              <a:rPr lang="en" sz="1300">
+                <a:latin typeface="Calibri"/>
+                <a:ea typeface="Calibri"/>
+                <a:cs typeface="Calibri"/>
+                <a:sym typeface="Calibri"/>
+              </a:rPr>
+              <a:t>Scores 82.3% on HumanEval</a:t>
+            </a:r>
+            <a:endParaRPr sz="1300">
+              <a:latin typeface="Calibri"/>
+              <a:ea typeface="Calibri"/>
+              <a:cs typeface="Calibri"/>
+              <a:sym typeface="Calibri"/>
+            </a:endParaRPr>
+          </a:p>
+          <a:p>
+            <a:pPr marL="228600" lvl="0" indent="-196850" algn="l" rtl="0">
+              <a:spcBef>
+                <a:spcPts val="0"/>
+              </a:spcBef>
+              <a:spcAft>
+                <a:spcPts val="0"/>
+              </a:spcAft>
+              <a:buSzPts val="1300"/>
+              <a:buFont typeface="Calibri"/>
+              <a:buChar char="●"/>
+            </a:pPr>
+            <a:r>
+              <a:rPr lang="en" sz="1300" u="sng">
+                <a:solidFill>
+                  <a:schemeClr val="hlink"/>
+                </a:solidFill>
+                <a:latin typeface="Calibri"/>
+                <a:ea typeface="Calibri"/>
+                <a:cs typeface="Calibri"/>
+                <a:sym typeface="Calibri"/>
+                <a:hlinkClick r:id="rId9"/>
+              </a:rPr>
+              <a:t>https://www.phind.com/blog/introducing-phind-70b</a:t>
+            </a:r>
+            <a:endParaRPr sz="1300">
+              <a:solidFill>
+                <a:schemeClr val="dk1"/>
+              </a:solidFill>
+              <a:latin typeface="Calibri"/>
+              <a:ea typeface="Calibri"/>
+              <a:cs typeface="Calibri"/>
+              <a:sym typeface="Calibri"/>
+            </a:endParaRPr>
+          </a:p>
+        </p:txBody>
+      </p:sp>
     </p:spTree>
   </p:cSld>
   <p:clrMapOvr>
@@ -9669,7 +10123,7 @@
   <p:cSld>
     <p:spTree>
       <p:nvGrpSpPr>
-        <p:cNvPr id="1" name="Shape 147"/>
+        <p:cNvPr id="1" name="Shape 150"/>
         <p:cNvGrpSpPr/>
         <p:nvPr/>
       </p:nvGrpSpPr>
@@ -9683,7 +10137,7 @@
       </p:grpSpPr>
       <p:sp>
         <p:nvSpPr>
-          <p:cNvPr id="148" name="Google Shape;148;p23"/>
+          <p:cNvPr id="151" name="Google Shape;151;p23"/>
           <p:cNvSpPr txBox="1"/>
           <p:nvPr/>
         </p:nvSpPr>
@@ -9738,7 +10192,7 @@
       </p:sp>
       <p:sp>
         <p:nvSpPr>
-          <p:cNvPr id="149" name="Google Shape;149;p23"/>
+          <p:cNvPr id="152" name="Google Shape;152;p23"/>
           <p:cNvSpPr txBox="1"/>
           <p:nvPr/>
         </p:nvSpPr>
@@ -9829,7 +10283,7 @@
       </p:sp>
       <p:sp>
         <p:nvSpPr>
-          <p:cNvPr id="150" name="Google Shape;150;p23"/>
+          <p:cNvPr id="153" name="Google Shape;153;p23"/>
           <p:cNvSpPr txBox="1"/>
           <p:nvPr/>
         </p:nvSpPr>
@@ -9934,7 +10388,7 @@
       </p:sp>
       <p:pic>
         <p:nvPicPr>
-          <p:cNvPr id="151" name="Google Shape;151;p23"/>
+          <p:cNvPr id="154" name="Google Shape;154;p23"/>
           <p:cNvPicPr preferRelativeResize="0"/>
           <p:nvPr/>
         </p:nvPicPr>
@@ -9971,6 +10425,135 @@
           </a:ln>
         </p:spPr>
       </p:pic>
+      <p:sp>
+        <p:nvSpPr>
+          <p:cNvPr id="155" name="Google Shape;155;p23"/>
+          <p:cNvSpPr txBox="1"/>
+          <p:nvPr/>
+        </p:nvSpPr>
+        <p:spPr>
+          <a:xfrm>
+            <a:off x="40350" y="2167825"/>
+            <a:ext cx="4362600" cy="892800"/>
+          </a:xfrm>
+          <a:prstGeom prst="rect">
+            <a:avLst/>
+          </a:prstGeom>
+          <a:solidFill>
+            <a:srgbClr val="FFF2CC"/>
+          </a:solidFill>
+          <a:ln w="9525" cap="flat" cmpd="sng">
+            <a:solidFill>
+              <a:srgbClr val="FF0000"/>
+            </a:solidFill>
+            <a:prstDash val="solid"/>
+            <a:round/>
+            <a:headEnd type="none" w="sm" len="sm"/>
+            <a:tailEnd type="none" w="sm" len="sm"/>
+          </a:ln>
+        </p:spPr>
+        <p:txBody>
+          <a:bodyPr spcFirstLastPara="1" wrap="square" lIns="91425" tIns="91425" rIns="91425" bIns="91425" anchor="t" anchorCtr="0">
+            <a:spAutoFit/>
+          </a:bodyPr>
+          <a:lstStyle/>
+          <a:p>
+            <a:pPr marL="0" lvl="0" indent="0" algn="l" rtl="0">
+              <a:spcBef>
+                <a:spcPts val="0"/>
+              </a:spcBef>
+              <a:spcAft>
+                <a:spcPts val="0"/>
+              </a:spcAft>
+              <a:buNone/>
+            </a:pPr>
+            <a:r>
+              <a:rPr lang="en" sz="1300" b="1">
+                <a:solidFill>
+                  <a:srgbClr val="FF0000"/>
+                </a:solidFill>
+                <a:latin typeface="Calibri"/>
+                <a:ea typeface="Calibri"/>
+                <a:cs typeface="Calibri"/>
+                <a:sym typeface="Calibri"/>
+              </a:rPr>
+              <a:t>LoRA Land</a:t>
+            </a:r>
+            <a:r>
+              <a:rPr lang="en" sz="1300">
+                <a:latin typeface="Calibri"/>
+                <a:ea typeface="Calibri"/>
+                <a:cs typeface="Calibri"/>
+                <a:sym typeface="Calibri"/>
+              </a:rPr>
+              <a:t>: Fine-Tuned Open-Source LLMs </a:t>
+            </a:r>
+            <a:endParaRPr sz="1300">
+              <a:latin typeface="Calibri"/>
+              <a:ea typeface="Calibri"/>
+              <a:cs typeface="Calibri"/>
+              <a:sym typeface="Calibri"/>
+            </a:endParaRPr>
+          </a:p>
+          <a:p>
+            <a:pPr marL="0" lvl="0" indent="0" algn="l" rtl="0">
+              <a:spcBef>
+                <a:spcPts val="0"/>
+              </a:spcBef>
+              <a:spcAft>
+                <a:spcPts val="0"/>
+              </a:spcAft>
+              <a:buNone/>
+            </a:pPr>
+            <a:r>
+              <a:rPr lang="en" sz="1300">
+                <a:latin typeface="Calibri"/>
+                <a:ea typeface="Calibri"/>
+                <a:cs typeface="Calibri"/>
+                <a:sym typeface="Calibri"/>
+              </a:rPr>
+              <a:t>that Outperform GPT-4</a:t>
+            </a:r>
+            <a:r>
+              <a:rPr lang="en" sz="1000">
+                <a:latin typeface="Calibri"/>
+                <a:ea typeface="Calibri"/>
+                <a:cs typeface="Calibri"/>
+                <a:sym typeface="Calibri"/>
+              </a:rPr>
+              <a:t> - </a:t>
+            </a:r>
+            <a:r>
+              <a:rPr lang="en" sz="1000" u="sng">
+                <a:solidFill>
+                  <a:schemeClr val="hlink"/>
+                </a:solidFill>
+                <a:latin typeface="Calibri"/>
+                <a:ea typeface="Calibri"/>
+                <a:cs typeface="Calibri"/>
+                <a:sym typeface="Calibri"/>
+                <a:hlinkClick r:id="rId6"/>
+              </a:rPr>
+              <a:t>https://predibase.com/blog/lora-land-fine-tuned-open-source-llms-that-outperform-gpt-4</a:t>
+            </a:r>
+            <a:r>
+              <a:rPr lang="en" sz="1000">
+                <a:latin typeface="Calibri"/>
+                <a:ea typeface="Calibri"/>
+                <a:cs typeface="Calibri"/>
+                <a:sym typeface="Calibri"/>
+              </a:rPr>
+              <a:t> </a:t>
+            </a:r>
+            <a:endParaRPr sz="1600">
+              <a:latin typeface="Calibri"/>
+              <a:ea typeface="Calibri"/>
+              <a:cs typeface="Calibri"/>
+              <a:sym typeface="Calibri"/>
+            </a:endParaRPr>
+          </a:p>
+        </p:txBody>
+      </p:sp>
     </p:spTree>
   </p:cSld>
   <p:clrMapOvr>
@@ -9984,7 +10567,7 @@
   <p:cSld>
     <p:spTree>
       <p:nvGrpSpPr>
-        <p:cNvPr id="1" name="Shape 155"/>
+        <p:cNvPr id="1" name="Shape 159"/>
         <p:cNvGrpSpPr/>
         <p:nvPr/>
       </p:nvGrpSpPr>
@@ -9998,7 +10581,7 @@
       </p:grpSpPr>
       <p:sp>
         <p:nvSpPr>
-          <p:cNvPr id="156" name="Google Shape;156;p24"/>
+          <p:cNvPr id="160" name="Google Shape;160;p24"/>
           <p:cNvSpPr txBox="1"/>
           <p:nvPr/>
         </p:nvSpPr>
@@ -10097,7 +10680,7 @@
       </p:sp>
       <p:sp>
         <p:nvSpPr>
-          <p:cNvPr id="157" name="Google Shape;157;p24"/>
+          <p:cNvPr id="161" name="Google Shape;161;p24"/>
           <p:cNvSpPr txBox="1"/>
           <p:nvPr/>
         </p:nvSpPr>
@@ -10152,7 +10735,7 @@
       </p:sp>
       <p:pic>
         <p:nvPicPr>
-          <p:cNvPr id="158" name="Google Shape;158;p24"/>
+          <p:cNvPr id="162" name="Google Shape;162;p24"/>
           <p:cNvPicPr preferRelativeResize="0"/>
           <p:nvPr/>
         </p:nvPicPr>
@@ -10191,7 +10774,7 @@
       </p:pic>
       <p:sp>
         <p:nvSpPr>
-          <p:cNvPr id="159" name="Google Shape;159;p24"/>
+          <p:cNvPr id="163" name="Google Shape;163;p24"/>
           <p:cNvSpPr txBox="1"/>
           <p:nvPr/>
         </p:nvSpPr>
@@ -10297,7 +10880,7 @@
   <p:cSld>
     <p:spTree>
       <p:nvGrpSpPr>
-        <p:cNvPr id="1" name="Shape 163"/>
+        <p:cNvPr id="1" name="Shape 167"/>
         <p:cNvGrpSpPr/>
         <p:nvPr/>
       </p:nvGrpSpPr>
@@ -10311,7 +10894,7 @@
       </p:grpSpPr>
       <p:sp>
         <p:nvSpPr>
-          <p:cNvPr id="164" name="Google Shape;164;p25"/>
+          <p:cNvPr id="168" name="Google Shape;168;p25"/>
           <p:cNvSpPr txBox="1"/>
           <p:nvPr/>
         </p:nvSpPr>
@@ -10366,7 +10949,7 @@
       </p:sp>
       <p:sp>
         <p:nvSpPr>
-          <p:cNvPr id="165" name="Google Shape;165;p25"/>
+          <p:cNvPr id="169" name="Google Shape;169;p25"/>
           <p:cNvSpPr txBox="1"/>
           <p:nvPr/>
         </p:nvSpPr>
@@ -10487,7 +11070,7 @@
       </p:sp>
       <p:pic>
         <p:nvPicPr>
-          <p:cNvPr id="166" name="Google Shape;166;p25"/>
+          <p:cNvPr id="170" name="Google Shape;170;p25"/>
           <p:cNvPicPr preferRelativeResize="0"/>
           <p:nvPr/>
         </p:nvPicPr>
@@ -10520,7 +11103,7 @@
       </p:pic>
       <p:sp>
         <p:nvSpPr>
-          <p:cNvPr id="167" name="Google Shape;167;p25"/>
+          <p:cNvPr id="171" name="Google Shape;171;p25"/>
           <p:cNvSpPr txBox="1"/>
           <p:nvPr/>
         </p:nvSpPr>
@@ -10585,7 +11168,7 @@
       </p:sp>
       <p:pic>
         <p:nvPicPr>
-          <p:cNvPr id="168" name="Google Shape;168;p25"/>
+          <p:cNvPr id="172" name="Google Shape;172;p25"/>
           <p:cNvPicPr preferRelativeResize="0"/>
           <p:nvPr/>
         </p:nvPicPr>
@@ -10618,7 +11201,7 @@
       </p:pic>
       <p:sp>
         <p:nvSpPr>
-          <p:cNvPr id="169" name="Google Shape;169;p25"/>
+          <p:cNvPr id="173" name="Google Shape;173;p25"/>
           <p:cNvSpPr txBox="1"/>
           <p:nvPr/>
         </p:nvSpPr>
@@ -10806,7 +11389,7 @@
   <p:cSld>
     <p:spTree>
       <p:nvGrpSpPr>
-        <p:cNvPr id="1" name="Shape 173"/>
+        <p:cNvPr id="1" name="Shape 177"/>
         <p:cNvGrpSpPr/>
         <p:nvPr/>
       </p:nvGrpSpPr>
@@ -10820,7 +11403,7 @@
       </p:grpSpPr>
       <p:sp>
         <p:nvSpPr>
-          <p:cNvPr id="174" name="Google Shape;174;p26"/>
+          <p:cNvPr id="178" name="Google Shape;178;p26"/>
           <p:cNvSpPr txBox="1"/>
           <p:nvPr/>
         </p:nvSpPr>
@@ -10875,7 +11458,7 @@
       </p:sp>
       <p:sp>
         <p:nvSpPr>
-          <p:cNvPr id="175" name="Google Shape;175;p26"/>
+          <p:cNvPr id="179" name="Google Shape;179;p26"/>
           <p:cNvSpPr txBox="1"/>
           <p:nvPr/>
         </p:nvSpPr>
@@ -11211,7 +11794,7 @@
       </p:sp>
       <p:graphicFrame>
         <p:nvGraphicFramePr>
-          <p:cNvPr id="176" name="Google Shape;176;p26"/>
+          <p:cNvPr id="180" name="Google Shape;180;p26"/>
           <p:cNvGraphicFramePr/>
           <p:nvPr/>
         </p:nvGraphicFramePr>
@@ -11224,7 +11807,7 @@
             <a:tbl>
               <a:tblPr>
                 <a:noFill/>
-                <a:tableStyleId>{1B0C7711-56E5-4754-9238-86AEBA9C43E4}</a:tableStyleId>
+                <a:tableStyleId>{13720896-178B-45A2-AEEA-D0D2DCF17E8D}</a:tableStyleId>
               </a:tblPr>
               <a:tblGrid>
                 <a:gridCol w="1212975">
@@ -12472,7 +13055,7 @@
       </p:graphicFrame>
       <p:pic>
         <p:nvPicPr>
-          <p:cNvPr id="177" name="Google Shape;177;p26"/>
+          <p:cNvPr id="181" name="Google Shape;181;p26"/>
           <p:cNvPicPr preferRelativeResize="0"/>
           <p:nvPr/>
         </p:nvPicPr>
@@ -12504,7 +13087,7 @@
       </p:pic>
       <p:pic>
         <p:nvPicPr>
-          <p:cNvPr id="178" name="Google Shape;178;p26"/>
+          <p:cNvPr id="182" name="Google Shape;182;p26"/>
           <p:cNvPicPr preferRelativeResize="0"/>
           <p:nvPr/>
         </p:nvPicPr>
@@ -12536,7 +13119,7 @@
       </p:pic>
       <p:sp>
         <p:nvSpPr>
-          <p:cNvPr id="179" name="Google Shape;179;p26"/>
+          <p:cNvPr id="183" name="Google Shape;183;p26"/>
           <p:cNvSpPr txBox="1"/>
           <p:nvPr/>
         </p:nvSpPr>
@@ -12707,7 +13290,7 @@
   <p:cSld>
     <p:spTree>
       <p:nvGrpSpPr>
-        <p:cNvPr id="1" name="Shape 183"/>
+        <p:cNvPr id="1" name="Shape 187"/>
         <p:cNvGrpSpPr/>
         <p:nvPr/>
       </p:nvGrpSpPr>
@@ -12721,7 +13304,7 @@
       </p:grpSpPr>
       <p:sp>
         <p:nvSpPr>
-          <p:cNvPr id="184" name="Google Shape;184;p27"/>
+          <p:cNvPr id="188" name="Google Shape;188;p27"/>
           <p:cNvSpPr txBox="1"/>
           <p:nvPr/>
         </p:nvSpPr>
@@ -12776,7 +13359,7 @@
       </p:sp>
       <p:sp>
         <p:nvSpPr>
-          <p:cNvPr id="185" name="Google Shape;185;p27"/>
+          <p:cNvPr id="189" name="Google Shape;189;p27"/>
           <p:cNvSpPr txBox="1"/>
           <p:nvPr/>
         </p:nvSpPr>
@@ -13002,7 +13585,7 @@
       </p:sp>
       <p:pic>
         <p:nvPicPr>
-          <p:cNvPr id="186" name="Google Shape;186;p27"/>
+          <p:cNvPr id="190" name="Google Shape;190;p27"/>
           <p:cNvPicPr preferRelativeResize="0"/>
           <p:nvPr/>
         </p:nvPicPr>
@@ -13046,7 +13629,7 @@
   <p:cSld>
     <p:spTree>
       <p:nvGrpSpPr>
-        <p:cNvPr id="1" name="Shape 190"/>
+        <p:cNvPr id="1" name="Shape 194"/>
         <p:cNvGrpSpPr/>
         <p:nvPr/>
       </p:nvGrpSpPr>
@@ -13060,7 +13643,7 @@
       </p:grpSpPr>
       <p:sp>
         <p:nvSpPr>
-          <p:cNvPr id="191" name="Google Shape;191;p28"/>
+          <p:cNvPr id="195" name="Google Shape;195;p28"/>
           <p:cNvSpPr txBox="1"/>
           <p:nvPr/>
         </p:nvSpPr>
@@ -13115,7 +13698,7 @@
       </p:sp>
       <p:sp>
         <p:nvSpPr>
-          <p:cNvPr id="192" name="Google Shape;192;p28"/>
+          <p:cNvPr id="196" name="Google Shape;196;p28"/>
           <p:cNvSpPr txBox="1"/>
           <p:nvPr/>
         </p:nvSpPr>
@@ -13263,7 +13846,7 @@
       </p:sp>
       <p:pic>
         <p:nvPicPr>
-          <p:cNvPr id="193" name="Google Shape;193;p28"/>
+          <p:cNvPr id="197" name="Google Shape;197;p28"/>
           <p:cNvPicPr preferRelativeResize="0"/>
           <p:nvPr/>
         </p:nvPicPr>
@@ -13302,7 +13885,7 @@
       </p:pic>
       <p:pic>
         <p:nvPicPr>
-          <p:cNvPr id="194" name="Google Shape;194;p28"/>
+          <p:cNvPr id="198" name="Google Shape;198;p28"/>
           <p:cNvPicPr preferRelativeResize="0"/>
           <p:nvPr/>
         </p:nvPicPr>
@@ -13352,7 +13935,7 @@
   <p:cSld>
     <p:spTree>
       <p:nvGrpSpPr>
-        <p:cNvPr id="1" name="Shape 198"/>
+        <p:cNvPr id="1" name="Shape 202"/>
         <p:cNvGrpSpPr/>
         <p:nvPr/>
       </p:nvGrpSpPr>
@@ -13366,7 +13949,451 @@
       </p:grpSpPr>
       <p:sp>
         <p:nvSpPr>
-          <p:cNvPr id="199" name="Google Shape;199;p29"/>
+          <p:cNvPr id="203" name="Google Shape;203;p29"/>
+          <p:cNvSpPr txBox="1"/>
+          <p:nvPr/>
+        </p:nvSpPr>
+        <p:spPr>
+          <a:xfrm>
+            <a:off x="72300" y="0"/>
+            <a:ext cx="4362600" cy="326400"/>
+          </a:xfrm>
+          <a:prstGeom prst="rect">
+            <a:avLst/>
+          </a:prstGeom>
+          <a:noFill/>
+          <a:ln>
+            <a:noFill/>
+          </a:ln>
+        </p:spPr>
+        <p:txBody>
+          <a:bodyPr spcFirstLastPara="1" wrap="square" lIns="9125" tIns="9125" rIns="9125" bIns="9125" anchor="t" anchorCtr="0">
+            <a:spAutoFit/>
+          </a:bodyPr>
+          <a:lstStyle/>
+          <a:p>
+            <a:pPr marL="0" lvl="0" indent="0" algn="l" rtl="0">
+              <a:spcBef>
+                <a:spcPts val="0"/>
+              </a:spcBef>
+              <a:spcAft>
+                <a:spcPts val="0"/>
+              </a:spcAft>
+              <a:buNone/>
+            </a:pPr>
+            <a:r>
+              <a:rPr lang="en" sz="2000" b="1">
+                <a:solidFill>
+                  <a:schemeClr val="dk1"/>
+                </a:solidFill>
+                <a:latin typeface="Calibri"/>
+                <a:ea typeface="Calibri"/>
+                <a:cs typeface="Calibri"/>
+                <a:sym typeface="Calibri"/>
+              </a:rPr>
+              <a:t>Gemini Diversity Problem</a:t>
+            </a:r>
+            <a:endParaRPr sz="2000" b="1">
+              <a:latin typeface="Calibri"/>
+              <a:ea typeface="Calibri"/>
+              <a:cs typeface="Calibri"/>
+              <a:sym typeface="Calibri"/>
+            </a:endParaRPr>
+          </a:p>
+        </p:txBody>
+      </p:sp>
+      <p:sp>
+        <p:nvSpPr>
+          <p:cNvPr id="204" name="Google Shape;204;p29"/>
+          <p:cNvSpPr txBox="1"/>
+          <p:nvPr/>
+        </p:nvSpPr>
+        <p:spPr>
+          <a:xfrm>
+            <a:off x="32975" y="445725"/>
+            <a:ext cx="4362600" cy="585000"/>
+          </a:xfrm>
+          <a:prstGeom prst="rect">
+            <a:avLst/>
+          </a:prstGeom>
+          <a:solidFill>
+            <a:srgbClr val="FFF2CC"/>
+          </a:solidFill>
+          <a:ln w="9525" cap="flat" cmpd="sng">
+            <a:solidFill>
+              <a:srgbClr val="FF0000"/>
+            </a:solidFill>
+            <a:prstDash val="solid"/>
+            <a:round/>
+            <a:headEnd type="none" w="sm" len="sm"/>
+            <a:tailEnd type="none" w="sm" len="sm"/>
+          </a:ln>
+        </p:spPr>
+        <p:txBody>
+          <a:bodyPr spcFirstLastPara="1" wrap="square" lIns="91425" tIns="91425" rIns="91425" bIns="91425" anchor="t" anchorCtr="0">
+            <a:spAutoFit/>
+          </a:bodyPr>
+          <a:lstStyle/>
+          <a:p>
+            <a:pPr marL="0" lvl="0" indent="0" algn="l" rtl="0">
+              <a:spcBef>
+                <a:spcPts val="0"/>
+              </a:spcBef>
+              <a:spcAft>
+                <a:spcPts val="0"/>
+              </a:spcAft>
+              <a:buNone/>
+            </a:pPr>
+            <a:r>
+              <a:rPr lang="en" sz="1300">
+                <a:solidFill>
+                  <a:schemeClr val="dk1"/>
+                </a:solidFill>
+                <a:latin typeface="Calibri"/>
+                <a:ea typeface="Calibri"/>
+                <a:cs typeface="Calibri"/>
+                <a:sym typeface="Calibri"/>
+              </a:rPr>
+              <a:t>Gemini has problem with diversity settings (against white or jewish people) </a:t>
+            </a:r>
+            <a:r>
+              <a:rPr lang="en" sz="1000">
+                <a:solidFill>
+                  <a:schemeClr val="dk1"/>
+                </a:solidFill>
+                <a:latin typeface="Calibri"/>
+                <a:ea typeface="Calibri"/>
+                <a:cs typeface="Calibri"/>
+                <a:sym typeface="Calibri"/>
+              </a:rPr>
+              <a:t>- </a:t>
+            </a:r>
+            <a:r>
+              <a:rPr lang="en" sz="1000" u="sng">
+                <a:solidFill>
+                  <a:schemeClr val="hlink"/>
+                </a:solidFill>
+                <a:latin typeface="Calibri"/>
+                <a:ea typeface="Calibri"/>
+                <a:cs typeface="Calibri"/>
+                <a:sym typeface="Calibri"/>
+                <a:hlinkClick r:id="rId3"/>
+              </a:rPr>
+              <a:t>https://www.youtube.com/watch?v=Fr6Teh_ox-8</a:t>
+            </a:r>
+            <a:r>
+              <a:rPr lang="en" sz="1000">
+                <a:solidFill>
+                  <a:schemeClr val="dk1"/>
+                </a:solidFill>
+                <a:latin typeface="Calibri"/>
+                <a:ea typeface="Calibri"/>
+                <a:cs typeface="Calibri"/>
+                <a:sym typeface="Calibri"/>
+              </a:rPr>
+              <a:t> </a:t>
+            </a:r>
+            <a:endParaRPr sz="1000">
+              <a:latin typeface="Calibri"/>
+              <a:ea typeface="Calibri"/>
+              <a:cs typeface="Calibri"/>
+              <a:sym typeface="Calibri"/>
+            </a:endParaRPr>
+          </a:p>
+        </p:txBody>
+      </p:sp>
+      <p:pic>
+        <p:nvPicPr>
+          <p:cNvPr id="205" name="Google Shape;205;p29"/>
+          <p:cNvPicPr preferRelativeResize="0"/>
+          <p:nvPr/>
+        </p:nvPicPr>
+        <p:blipFill>
+          <a:blip r:embed="rId4" cstate="email">
+            <a:alphaModFix/>
+            <a:extLst>
+              <a:ext uri="{28A0092B-C50C-407E-A947-70E740481C1C}">
+                <a14:useLocalDpi xmlns:a14="http://schemas.microsoft.com/office/drawing/2010/main"/>
+              </a:ext>
+            </a:extLst>
+          </a:blip>
+          <a:stretch>
+            <a:fillRect/>
+          </a:stretch>
+        </p:blipFill>
+        <p:spPr>
+          <a:xfrm>
+            <a:off x="200853" y="1185000"/>
+            <a:ext cx="1922600" cy="2136225"/>
+          </a:xfrm>
+          <a:prstGeom prst="rect">
+            <a:avLst/>
+          </a:prstGeom>
+          <a:noFill/>
+          <a:ln>
+            <a:noFill/>
+          </a:ln>
+        </p:spPr>
+      </p:pic>
+      <p:pic>
+        <p:nvPicPr>
+          <p:cNvPr id="206" name="Google Shape;206;p29"/>
+          <p:cNvPicPr preferRelativeResize="0"/>
+          <p:nvPr/>
+        </p:nvPicPr>
+        <p:blipFill>
+          <a:blip r:embed="rId5" cstate="email">
+            <a:alphaModFix/>
+            <a:extLst>
+              <a:ext uri="{28A0092B-C50C-407E-A947-70E740481C1C}">
+                <a14:useLocalDpi xmlns:a14="http://schemas.microsoft.com/office/drawing/2010/main"/>
+              </a:ext>
+            </a:extLst>
+          </a:blip>
+          <a:stretch>
+            <a:fillRect/>
+          </a:stretch>
+        </p:blipFill>
+        <p:spPr>
+          <a:xfrm>
+            <a:off x="7079900" y="127826"/>
+            <a:ext cx="2018115" cy="2102200"/>
+          </a:xfrm>
+          <a:prstGeom prst="rect">
+            <a:avLst/>
+          </a:prstGeom>
+          <a:noFill/>
+          <a:ln>
+            <a:noFill/>
+          </a:ln>
+        </p:spPr>
+      </p:pic>
+      <p:pic>
+        <p:nvPicPr>
+          <p:cNvPr id="207" name="Google Shape;207;p29"/>
+          <p:cNvPicPr preferRelativeResize="0"/>
+          <p:nvPr/>
+        </p:nvPicPr>
+        <p:blipFill>
+          <a:blip r:embed="rId6" cstate="email">
+            <a:alphaModFix/>
+            <a:extLst>
+              <a:ext uri="{28A0092B-C50C-407E-A947-70E740481C1C}">
+                <a14:useLocalDpi xmlns:a14="http://schemas.microsoft.com/office/drawing/2010/main"/>
+              </a:ext>
+            </a:extLst>
+          </a:blip>
+          <a:stretch>
+            <a:fillRect/>
+          </a:stretch>
+        </p:blipFill>
+        <p:spPr>
+          <a:xfrm>
+            <a:off x="4521150" y="127825"/>
+            <a:ext cx="2018125" cy="1325297"/>
+          </a:xfrm>
+          <a:prstGeom prst="rect">
+            <a:avLst/>
+          </a:prstGeom>
+          <a:noFill/>
+          <a:ln>
+            <a:noFill/>
+          </a:ln>
+        </p:spPr>
+      </p:pic>
+      <p:pic>
+        <p:nvPicPr>
+          <p:cNvPr id="208" name="Google Shape;208;p29"/>
+          <p:cNvPicPr preferRelativeResize="0"/>
+          <p:nvPr/>
+        </p:nvPicPr>
+        <p:blipFill>
+          <a:blip r:embed="rId7" cstate="email">
+            <a:alphaModFix/>
+            <a:extLst>
+              <a:ext uri="{28A0092B-C50C-407E-A947-70E740481C1C}">
+                <a14:useLocalDpi xmlns:a14="http://schemas.microsoft.com/office/drawing/2010/main"/>
+              </a:ext>
+            </a:extLst>
+          </a:blip>
+          <a:stretch>
+            <a:fillRect/>
+          </a:stretch>
+        </p:blipFill>
+        <p:spPr>
+          <a:xfrm>
+            <a:off x="200850" y="3475500"/>
+            <a:ext cx="1922601" cy="1498024"/>
+          </a:xfrm>
+          <a:prstGeom prst="rect">
+            <a:avLst/>
+          </a:prstGeom>
+          <a:noFill/>
+          <a:ln>
+            <a:noFill/>
+          </a:ln>
+        </p:spPr>
+      </p:pic>
+      <p:pic>
+        <p:nvPicPr>
+          <p:cNvPr id="209" name="Google Shape;209;p29"/>
+          <p:cNvPicPr preferRelativeResize="0"/>
+          <p:nvPr/>
+        </p:nvPicPr>
+        <p:blipFill>
+          <a:blip r:embed="rId8" cstate="email">
+            <a:alphaModFix/>
+            <a:extLst>
+              <a:ext uri="{28A0092B-C50C-407E-A947-70E740481C1C}">
+                <a14:useLocalDpi xmlns:a14="http://schemas.microsoft.com/office/drawing/2010/main"/>
+              </a:ext>
+            </a:extLst>
+          </a:blip>
+          <a:stretch>
+            <a:fillRect/>
+          </a:stretch>
+        </p:blipFill>
+        <p:spPr>
+          <a:xfrm>
+            <a:off x="2456624" y="1150050"/>
+            <a:ext cx="1922599" cy="1942950"/>
+          </a:xfrm>
+          <a:prstGeom prst="rect">
+            <a:avLst/>
+          </a:prstGeom>
+          <a:noFill/>
+          <a:ln>
+            <a:noFill/>
+          </a:ln>
+        </p:spPr>
+      </p:pic>
+      <p:pic>
+        <p:nvPicPr>
+          <p:cNvPr id="210" name="Google Shape;210;p29"/>
+          <p:cNvPicPr preferRelativeResize="0"/>
+          <p:nvPr/>
+        </p:nvPicPr>
+        <p:blipFill>
+          <a:blip r:embed="rId9" cstate="email">
+            <a:alphaModFix/>
+            <a:extLst>
+              <a:ext uri="{28A0092B-C50C-407E-A947-70E740481C1C}">
+                <a14:useLocalDpi xmlns:a14="http://schemas.microsoft.com/office/drawing/2010/main"/>
+              </a:ext>
+            </a:extLst>
+          </a:blip>
+          <a:stretch>
+            <a:fillRect/>
+          </a:stretch>
+        </p:blipFill>
+        <p:spPr>
+          <a:xfrm>
+            <a:off x="4521155" y="1716473"/>
+            <a:ext cx="2018126" cy="3257053"/>
+          </a:xfrm>
+          <a:prstGeom prst="rect">
+            <a:avLst/>
+          </a:prstGeom>
+          <a:noFill/>
+          <a:ln>
+            <a:noFill/>
+          </a:ln>
+        </p:spPr>
+      </p:pic>
+      <p:pic>
+        <p:nvPicPr>
+          <p:cNvPr id="211" name="Google Shape;211;p29"/>
+          <p:cNvPicPr preferRelativeResize="0"/>
+          <p:nvPr/>
+        </p:nvPicPr>
+        <p:blipFill>
+          <a:blip r:embed="rId10" cstate="email">
+            <a:alphaModFix/>
+            <a:extLst>
+              <a:ext uri="{28A0092B-C50C-407E-A947-70E740481C1C}">
+                <a14:useLocalDpi xmlns:a14="http://schemas.microsoft.com/office/drawing/2010/main"/>
+              </a:ext>
+            </a:extLst>
+          </a:blip>
+          <a:stretch>
+            <a:fillRect/>
+          </a:stretch>
+        </p:blipFill>
+        <p:spPr>
+          <a:xfrm>
+            <a:off x="6721905" y="2863351"/>
+            <a:ext cx="2299920" cy="2110177"/>
+          </a:xfrm>
+          <a:prstGeom prst="rect">
+            <a:avLst/>
+          </a:prstGeom>
+          <a:noFill/>
+          <a:ln>
+            <a:noFill/>
+          </a:ln>
+        </p:spPr>
+      </p:pic>
+      <p:pic>
+        <p:nvPicPr>
+          <p:cNvPr id="212" name="Google Shape;212;p29"/>
+          <p:cNvPicPr preferRelativeResize="0"/>
+          <p:nvPr/>
+        </p:nvPicPr>
+        <p:blipFill>
+          <a:blip r:embed="rId11" cstate="email">
+            <a:alphaModFix/>
+            <a:extLst>
+              <a:ext uri="{28A0092B-C50C-407E-A947-70E740481C1C}">
+                <a14:useLocalDpi xmlns:a14="http://schemas.microsoft.com/office/drawing/2010/main"/>
+              </a:ext>
+            </a:extLst>
+          </a:blip>
+          <a:stretch>
+            <a:fillRect/>
+          </a:stretch>
+        </p:blipFill>
+        <p:spPr>
+          <a:xfrm>
+            <a:off x="2558733" y="3212325"/>
+            <a:ext cx="1718380" cy="1822275"/>
+          </a:xfrm>
+          <a:prstGeom prst="rect">
+            <a:avLst/>
+          </a:prstGeom>
+          <a:noFill/>
+          <a:ln>
+            <a:noFill/>
+          </a:ln>
+        </p:spPr>
+      </p:pic>
+    </p:spTree>
+  </p:cSld>
+  <p:clrMapOvr>
+    <a:masterClrMapping/>
+  </p:clrMapOvr>
+</p:sld>
+</file>
+
+<file path=ppt/slides/slide18.xml><?xml version="1.0" encoding="utf-8"?>
+<p:sld xmlns:a="http://schemas.openxmlformats.org/drawingml/2006/main" xmlns:r="http://schemas.openxmlformats.org/officeDocument/2006/relationships" xmlns:p="http://schemas.openxmlformats.org/presentationml/2006/main">
+  <p:cSld>
+    <p:spTree>
+      <p:nvGrpSpPr>
+        <p:cNvPr id="1" name="Shape 216"/>
+        <p:cNvGrpSpPr/>
+        <p:nvPr/>
+      </p:nvGrpSpPr>
+      <p:grpSpPr>
+        <a:xfrm>
+          <a:off x="0" y="0"/>
+          <a:ext cx="0" cy="0"/>
+          <a:chOff x="0" y="0"/>
+          <a:chExt cx="0" cy="0"/>
+        </a:xfrm>
+      </p:grpSpPr>
+      <p:sp>
+        <p:nvSpPr>
+          <p:cNvPr id="217" name="Google Shape;217;p30"/>
           <p:cNvSpPr txBox="1"/>
           <p:nvPr/>
         </p:nvSpPr>
@@ -13421,7 +14448,7 @@
       </p:sp>
       <p:sp>
         <p:nvSpPr>
-          <p:cNvPr id="200" name="Google Shape;200;p29"/>
+          <p:cNvPr id="218" name="Google Shape;218;p30"/>
           <p:cNvSpPr txBox="1"/>
           <p:nvPr/>
         </p:nvSpPr>
@@ -13746,7 +14773,7 @@
       </p:sp>
       <p:pic>
         <p:nvPicPr>
-          <p:cNvPr id="201" name="Google Shape;201;p29"/>
+          <p:cNvPr id="219" name="Google Shape;219;p30"/>
           <p:cNvPicPr preferRelativeResize="0"/>
           <p:nvPr/>
         </p:nvPicPr>
@@ -13784,12 +14811,12 @@
 </p:sld>
 </file>
 
-<file path=ppt/slides/slide18.xml><?xml version="1.0" encoding="utf-8"?>
+<file path=ppt/slides/slide19.xml><?xml version="1.0" encoding="utf-8"?>
 <p:sld xmlns:a="http://schemas.openxmlformats.org/drawingml/2006/main" xmlns:r="http://schemas.openxmlformats.org/officeDocument/2006/relationships" xmlns:p="http://schemas.openxmlformats.org/presentationml/2006/main">
   <p:cSld>
     <p:spTree>
       <p:nvGrpSpPr>
-        <p:cNvPr id="1" name="Shape 205"/>
+        <p:cNvPr id="1" name="Shape 223"/>
         <p:cNvGrpSpPr/>
         <p:nvPr/>
       </p:nvGrpSpPr>
@@ -13803,7 +14830,7 @@
       </p:grpSpPr>
       <p:sp>
         <p:nvSpPr>
-          <p:cNvPr id="206" name="Google Shape;206;p30"/>
+          <p:cNvPr id="224" name="Google Shape;224;p31"/>
           <p:cNvSpPr txBox="1"/>
           <p:nvPr/>
         </p:nvSpPr>
@@ -13903,7 +14930,7 @@
       </p:sp>
       <p:sp>
         <p:nvSpPr>
-          <p:cNvPr id="207" name="Google Shape;207;p30"/>
+          <p:cNvPr id="225" name="Google Shape;225;p31"/>
           <p:cNvSpPr txBox="1"/>
           <p:nvPr/>
         </p:nvSpPr>
@@ -14011,7 +15038,7 @@
       </p:sp>
       <p:sp>
         <p:nvSpPr>
-          <p:cNvPr id="208" name="Google Shape;208;p30"/>
+          <p:cNvPr id="226" name="Google Shape;226;p31"/>
           <p:cNvSpPr txBox="1"/>
           <p:nvPr/>
         </p:nvSpPr>
@@ -14066,7 +15093,7 @@
       </p:sp>
       <p:sp>
         <p:nvSpPr>
-          <p:cNvPr id="209" name="Google Shape;209;p30"/>
+          <p:cNvPr id="227" name="Google Shape;227;p31"/>
           <p:cNvSpPr txBox="1"/>
           <p:nvPr/>
         </p:nvSpPr>
@@ -14148,7 +15175,7 @@
       </p:sp>
       <p:pic>
         <p:nvPicPr>
-          <p:cNvPr id="210" name="Google Shape;210;p30"/>
+          <p:cNvPr id="228" name="Google Shape;228;p31"/>
           <p:cNvPicPr preferRelativeResize="0"/>
           <p:nvPr/>
         </p:nvPicPr>
@@ -14193,12 +15220,554 @@
 </p:sld>
 </file>
 
-<file path=ppt/slides/slide19.xml><?xml version="1.0" encoding="utf-8"?>
+<file path=ppt/slides/slide2.xml><?xml version="1.0" encoding="utf-8"?>
 <p:sld xmlns:a="http://schemas.openxmlformats.org/drawingml/2006/main" xmlns:r="http://schemas.openxmlformats.org/officeDocument/2006/relationships" xmlns:p="http://schemas.openxmlformats.org/presentationml/2006/main">
   <p:cSld>
     <p:spTree>
       <p:nvGrpSpPr>
-        <p:cNvPr id="1" name="Shape 214"/>
+        <p:cNvPr id="1" name="Shape 60"/>
+        <p:cNvGrpSpPr/>
+        <p:nvPr/>
+      </p:nvGrpSpPr>
+      <p:grpSpPr>
+        <a:xfrm>
+          <a:off x="0" y="0"/>
+          <a:ext cx="0" cy="0"/>
+          <a:chOff x="0" y="0"/>
+          <a:chExt cx="0" cy="0"/>
+        </a:xfrm>
+      </p:grpSpPr>
+      <p:pic>
+        <p:nvPicPr>
+          <p:cNvPr id="61" name="Google Shape;61;p14"/>
+          <p:cNvPicPr preferRelativeResize="0"/>
+          <p:nvPr/>
+        </p:nvPicPr>
+        <p:blipFill>
+          <a:blip r:embed="rId3" cstate="email">
+            <a:alphaModFix/>
+            <a:extLst>
+              <a:ext uri="{28A0092B-C50C-407E-A947-70E740481C1C}">
+                <a14:useLocalDpi xmlns:a14="http://schemas.microsoft.com/office/drawing/2010/main"/>
+              </a:ext>
+            </a:extLst>
+          </a:blip>
+          <a:stretch>
+            <a:fillRect/>
+          </a:stretch>
+        </p:blipFill>
+        <p:spPr>
+          <a:xfrm>
+            <a:off x="605238" y="1203525"/>
+            <a:ext cx="2094075" cy="2094075"/>
+          </a:xfrm>
+          <a:prstGeom prst="rect">
+            <a:avLst/>
+          </a:prstGeom>
+          <a:noFill/>
+          <a:ln>
+            <a:noFill/>
+          </a:ln>
+        </p:spPr>
+      </p:pic>
+      <p:sp>
+        <p:nvSpPr>
+          <p:cNvPr id="62" name="Google Shape;62;p14"/>
+          <p:cNvSpPr txBox="1"/>
+          <p:nvPr/>
+        </p:nvSpPr>
+        <p:spPr>
+          <a:xfrm>
+            <a:off x="-25625" y="-14775"/>
+            <a:ext cx="3355800" cy="569400"/>
+          </a:xfrm>
+          <a:prstGeom prst="rect">
+            <a:avLst/>
+          </a:prstGeom>
+          <a:noFill/>
+          <a:ln>
+            <a:noFill/>
+          </a:ln>
+        </p:spPr>
+        <p:txBody>
+          <a:bodyPr spcFirstLastPara="1" wrap="square" lIns="91425" tIns="91425" rIns="91425" bIns="91425" anchor="t" anchorCtr="0">
+            <a:spAutoFit/>
+          </a:bodyPr>
+          <a:lstStyle/>
+          <a:p>
+            <a:pPr marL="0" lvl="0" indent="0" algn="l" rtl="0">
+              <a:spcBef>
+                <a:spcPts val="0"/>
+              </a:spcBef>
+              <a:spcAft>
+                <a:spcPts val="0"/>
+              </a:spcAft>
+              <a:buNone/>
+            </a:pPr>
+            <a:r>
+              <a:rPr lang="en" sz="2500" b="1">
+                <a:latin typeface="Calibri"/>
+                <a:ea typeface="Calibri"/>
+                <a:cs typeface="Calibri"/>
+                <a:sym typeface="Calibri"/>
+              </a:rPr>
+              <a:t>About the Speaker</a:t>
+            </a:r>
+            <a:endParaRPr sz="2500" b="1">
+              <a:latin typeface="Calibri"/>
+              <a:ea typeface="Calibri"/>
+              <a:cs typeface="Calibri"/>
+              <a:sym typeface="Calibri"/>
+            </a:endParaRPr>
+          </a:p>
+        </p:txBody>
+      </p:sp>
+      <p:sp>
+        <p:nvSpPr>
+          <p:cNvPr id="63" name="Google Shape;63;p14"/>
+          <p:cNvSpPr txBox="1"/>
+          <p:nvPr/>
+        </p:nvSpPr>
+        <p:spPr>
+          <a:xfrm>
+            <a:off x="3330175" y="878750"/>
+            <a:ext cx="5621700" cy="3309300"/>
+          </a:xfrm>
+          <a:prstGeom prst="rect">
+            <a:avLst/>
+          </a:prstGeom>
+          <a:noFill/>
+          <a:ln>
+            <a:noFill/>
+          </a:ln>
+        </p:spPr>
+        <p:txBody>
+          <a:bodyPr spcFirstLastPara="1" wrap="square" lIns="91425" tIns="91425" rIns="91425" bIns="91425" anchor="t" anchorCtr="0">
+            <a:spAutoFit/>
+          </a:bodyPr>
+          <a:lstStyle/>
+          <a:p>
+            <a:pPr marL="0" lvl="0" indent="0" algn="l" rtl="0">
+              <a:spcBef>
+                <a:spcPts val="0"/>
+              </a:spcBef>
+              <a:spcAft>
+                <a:spcPts val="0"/>
+              </a:spcAft>
+              <a:buClr>
+                <a:schemeClr val="dk1"/>
+              </a:buClr>
+              <a:buSzPts val="1100"/>
+              <a:buFont typeface="Arial"/>
+              <a:buNone/>
+            </a:pPr>
+            <a:r>
+              <a:rPr lang="en" sz="2500" b="1">
+                <a:latin typeface="Calibri"/>
+                <a:ea typeface="Calibri"/>
+                <a:cs typeface="Calibri"/>
+                <a:sym typeface="Calibri"/>
+              </a:rPr>
+              <a:t>Lev Selector, Ph.D.</a:t>
+            </a:r>
+            <a:endParaRPr sz="2500" b="1">
+              <a:latin typeface="Calibri"/>
+              <a:ea typeface="Calibri"/>
+              <a:cs typeface="Calibri"/>
+              <a:sym typeface="Calibri"/>
+            </a:endParaRPr>
+          </a:p>
+          <a:p>
+            <a:pPr marL="0" lvl="0" indent="0" algn="l" rtl="0">
+              <a:spcBef>
+                <a:spcPts val="0"/>
+              </a:spcBef>
+              <a:spcAft>
+                <a:spcPts val="0"/>
+              </a:spcAft>
+              <a:buClr>
+                <a:schemeClr val="dk1"/>
+              </a:buClr>
+              <a:buSzPts val="1100"/>
+              <a:buFont typeface="Arial"/>
+              <a:buNone/>
+            </a:pPr>
+            <a:endParaRPr sz="1800">
+              <a:latin typeface="Calibri"/>
+              <a:ea typeface="Calibri"/>
+              <a:cs typeface="Calibri"/>
+              <a:sym typeface="Calibri"/>
+            </a:endParaRPr>
+          </a:p>
+          <a:p>
+            <a:pPr marL="457200" lvl="0" indent="-330200" algn="l" rtl="0">
+              <a:spcBef>
+                <a:spcPts val="0"/>
+              </a:spcBef>
+              <a:spcAft>
+                <a:spcPts val="0"/>
+              </a:spcAft>
+              <a:buSzPts val="1600"/>
+              <a:buFont typeface="Calibri"/>
+              <a:buChar char="●"/>
+            </a:pPr>
+            <a:r>
+              <a:rPr lang="en" sz="1600">
+                <a:solidFill>
+                  <a:schemeClr val="dk1"/>
+                </a:solidFill>
+                <a:latin typeface="Calibri"/>
+                <a:ea typeface="Calibri"/>
+                <a:cs typeface="Calibri"/>
+                <a:sym typeface="Calibri"/>
+              </a:rPr>
+              <a:t>40+ years of software engineering, data science, and building teams (hiring, training, and managing)</a:t>
+            </a:r>
+            <a:endParaRPr sz="1600">
+              <a:solidFill>
+                <a:schemeClr val="dk1"/>
+              </a:solidFill>
+              <a:latin typeface="Calibri"/>
+              <a:ea typeface="Calibri"/>
+              <a:cs typeface="Calibri"/>
+              <a:sym typeface="Calibri"/>
+            </a:endParaRPr>
+          </a:p>
+          <a:p>
+            <a:pPr marL="457200" lvl="0" indent="-330200" algn="l" rtl="0">
+              <a:spcBef>
+                <a:spcPts val="0"/>
+              </a:spcBef>
+              <a:spcAft>
+                <a:spcPts val="0"/>
+              </a:spcAft>
+              <a:buSzPts val="1600"/>
+              <a:buFont typeface="Calibri"/>
+              <a:buChar char="●"/>
+            </a:pPr>
+            <a:r>
+              <a:rPr lang="en" sz="1600">
+                <a:solidFill>
+                  <a:schemeClr val="dk1"/>
+                </a:solidFill>
+                <a:latin typeface="Calibri"/>
+                <a:ea typeface="Calibri"/>
+                <a:cs typeface="Calibri"/>
+                <a:sym typeface="Calibri"/>
+              </a:rPr>
+              <a:t>Ph.D. in mathematical modeling and computer simulations</a:t>
+            </a:r>
+            <a:endParaRPr sz="1600">
+              <a:latin typeface="Calibri"/>
+              <a:ea typeface="Calibri"/>
+              <a:cs typeface="Calibri"/>
+              <a:sym typeface="Calibri"/>
+            </a:endParaRPr>
+          </a:p>
+          <a:p>
+            <a:pPr marL="0" lvl="0" indent="0" algn="l" rtl="0">
+              <a:spcBef>
+                <a:spcPts val="0"/>
+              </a:spcBef>
+              <a:spcAft>
+                <a:spcPts val="0"/>
+              </a:spcAft>
+              <a:buClr>
+                <a:schemeClr val="dk1"/>
+              </a:buClr>
+              <a:buSzPts val="1100"/>
+              <a:buFont typeface="Arial"/>
+              <a:buNone/>
+            </a:pPr>
+            <a:endParaRPr sz="1600">
+              <a:latin typeface="Calibri"/>
+              <a:ea typeface="Calibri"/>
+              <a:cs typeface="Calibri"/>
+              <a:sym typeface="Calibri"/>
+            </a:endParaRPr>
+          </a:p>
+          <a:p>
+            <a:pPr marL="0" lvl="0" indent="0" algn="l" rtl="0">
+              <a:spcBef>
+                <a:spcPts val="0"/>
+              </a:spcBef>
+              <a:spcAft>
+                <a:spcPts val="0"/>
+              </a:spcAft>
+              <a:buNone/>
+            </a:pPr>
+            <a:r>
+              <a:rPr lang="en" sz="1600">
+                <a:latin typeface="Calibri"/>
+                <a:ea typeface="Calibri"/>
+                <a:cs typeface="Calibri"/>
+                <a:sym typeface="Calibri"/>
+              </a:rPr>
+              <a:t>Interests: </a:t>
+            </a:r>
+            <a:endParaRPr sz="1600">
+              <a:latin typeface="Calibri"/>
+              <a:ea typeface="Calibri"/>
+              <a:cs typeface="Calibri"/>
+              <a:sym typeface="Calibri"/>
+            </a:endParaRPr>
+          </a:p>
+          <a:p>
+            <a:pPr marL="457200" lvl="0" indent="-330200" algn="l" rtl="0">
+              <a:spcBef>
+                <a:spcPts val="0"/>
+              </a:spcBef>
+              <a:spcAft>
+                <a:spcPts val="0"/>
+              </a:spcAft>
+              <a:buSzPts val="1600"/>
+              <a:buFont typeface="Calibri"/>
+              <a:buChar char="●"/>
+            </a:pPr>
+            <a:r>
+              <a:rPr lang="en" sz="1600">
+                <a:solidFill>
+                  <a:schemeClr val="dk1"/>
+                </a:solidFill>
+                <a:latin typeface="Calibri"/>
+                <a:ea typeface="Calibri"/>
+                <a:cs typeface="Calibri"/>
+                <a:sym typeface="Calibri"/>
+              </a:rPr>
+              <a:t>Generative AI, Using LLM with your data</a:t>
+            </a:r>
+            <a:endParaRPr sz="1600">
+              <a:solidFill>
+                <a:schemeClr val="dk1"/>
+              </a:solidFill>
+              <a:latin typeface="Calibri"/>
+              <a:ea typeface="Calibri"/>
+              <a:cs typeface="Calibri"/>
+              <a:sym typeface="Calibri"/>
+            </a:endParaRPr>
+          </a:p>
+          <a:p>
+            <a:pPr marL="457200" lvl="0" indent="-330200" algn="l" rtl="0">
+              <a:spcBef>
+                <a:spcPts val="0"/>
+              </a:spcBef>
+              <a:spcAft>
+                <a:spcPts val="0"/>
+              </a:spcAft>
+              <a:buClr>
+                <a:schemeClr val="dk1"/>
+              </a:buClr>
+              <a:buSzPts val="1600"/>
+              <a:buFont typeface="Calibri"/>
+              <a:buChar char="●"/>
+            </a:pPr>
+            <a:r>
+              <a:rPr lang="en" sz="1600">
+                <a:solidFill>
+                  <a:schemeClr val="dk1"/>
+                </a:solidFill>
+                <a:latin typeface="Calibri"/>
+                <a:ea typeface="Calibri"/>
+                <a:cs typeface="Calibri"/>
+                <a:sym typeface="Calibri"/>
+              </a:rPr>
+              <a:t>Local AI for Local Private Data</a:t>
+            </a:r>
+            <a:endParaRPr sz="1600">
+              <a:solidFill>
+                <a:schemeClr val="dk1"/>
+              </a:solidFill>
+              <a:latin typeface="Calibri"/>
+              <a:ea typeface="Calibri"/>
+              <a:cs typeface="Calibri"/>
+              <a:sym typeface="Calibri"/>
+            </a:endParaRPr>
+          </a:p>
+          <a:p>
+            <a:pPr marL="457200" lvl="0" indent="-330200" algn="l" rtl="0">
+              <a:spcBef>
+                <a:spcPts val="0"/>
+              </a:spcBef>
+              <a:spcAft>
+                <a:spcPts val="0"/>
+              </a:spcAft>
+              <a:buSzPts val="1600"/>
+              <a:buFont typeface="Calibri"/>
+              <a:buChar char="●"/>
+            </a:pPr>
+            <a:r>
+              <a:rPr lang="en" sz="1600">
+                <a:latin typeface="Calibri"/>
+                <a:ea typeface="Calibri"/>
+                <a:cs typeface="Calibri"/>
+                <a:sym typeface="Calibri"/>
+              </a:rPr>
+              <a:t>Cloud architecture, fin-tech, application security</a:t>
+            </a:r>
+            <a:endParaRPr sz="1600">
+              <a:latin typeface="Calibri"/>
+              <a:ea typeface="Calibri"/>
+              <a:cs typeface="Calibri"/>
+              <a:sym typeface="Calibri"/>
+            </a:endParaRPr>
+          </a:p>
+          <a:p>
+            <a:pPr marL="0" lvl="0" indent="0" algn="l" rtl="0">
+              <a:spcBef>
+                <a:spcPts val="0"/>
+              </a:spcBef>
+              <a:spcAft>
+                <a:spcPts val="0"/>
+              </a:spcAft>
+              <a:buNone/>
+            </a:pPr>
+            <a:endParaRPr sz="1600">
+              <a:latin typeface="Calibri"/>
+              <a:ea typeface="Calibri"/>
+              <a:cs typeface="Calibri"/>
+              <a:sym typeface="Calibri"/>
+            </a:endParaRPr>
+          </a:p>
+          <a:p>
+            <a:pPr marL="0" lvl="0" indent="0" algn="l" rtl="0">
+              <a:spcBef>
+                <a:spcPts val="0"/>
+              </a:spcBef>
+              <a:spcAft>
+                <a:spcPts val="0"/>
+              </a:spcAft>
+              <a:buNone/>
+            </a:pPr>
+            <a:r>
+              <a:rPr lang="en" sz="1600">
+                <a:latin typeface="Calibri"/>
+                <a:ea typeface="Calibri"/>
+                <a:cs typeface="Calibri"/>
+                <a:sym typeface="Calibri"/>
+              </a:rPr>
+              <a:t>Find/connect: Linkedin, GitHub, YouTube, Google</a:t>
+            </a:r>
+            <a:endParaRPr sz="1600">
+              <a:latin typeface="Calibri"/>
+              <a:ea typeface="Calibri"/>
+              <a:cs typeface="Calibri"/>
+              <a:sym typeface="Calibri"/>
+            </a:endParaRPr>
+          </a:p>
+        </p:txBody>
+      </p:sp>
+      <p:pic>
+        <p:nvPicPr>
+          <p:cNvPr id="64" name="Google Shape;64;p14"/>
+          <p:cNvPicPr preferRelativeResize="0"/>
+          <p:nvPr/>
+        </p:nvPicPr>
+        <p:blipFill>
+          <a:blip r:embed="rId4" cstate="email">
+            <a:alphaModFix/>
+            <a:extLst>
+              <a:ext uri="{28A0092B-C50C-407E-A947-70E740481C1C}">
+                <a14:useLocalDpi xmlns:a14="http://schemas.microsoft.com/office/drawing/2010/main"/>
+              </a:ext>
+            </a:extLst>
+          </a:blip>
+          <a:stretch>
+            <a:fillRect/>
+          </a:stretch>
+        </p:blipFill>
+        <p:spPr>
+          <a:xfrm>
+            <a:off x="1010941" y="3664175"/>
+            <a:ext cx="1144600" cy="415875"/>
+          </a:xfrm>
+          <a:prstGeom prst="rect">
+            <a:avLst/>
+          </a:prstGeom>
+          <a:noFill/>
+          <a:ln>
+            <a:noFill/>
+          </a:ln>
+        </p:spPr>
+      </p:pic>
+      <p:sp>
+        <p:nvSpPr>
+          <p:cNvPr id="65" name="Google Shape;65;p14"/>
+          <p:cNvSpPr txBox="1"/>
+          <p:nvPr/>
+        </p:nvSpPr>
+        <p:spPr>
+          <a:xfrm>
+            <a:off x="912377" y="4005903"/>
+            <a:ext cx="1391400" cy="431100"/>
+          </a:xfrm>
+          <a:prstGeom prst="rect">
+            <a:avLst/>
+          </a:prstGeom>
+          <a:noFill/>
+          <a:ln>
+            <a:noFill/>
+          </a:ln>
+        </p:spPr>
+        <p:txBody>
+          <a:bodyPr spcFirstLastPara="1" wrap="square" lIns="91425" tIns="91425" rIns="91425" bIns="91425" anchor="t" anchorCtr="0">
+            <a:spAutoFit/>
+          </a:bodyPr>
+          <a:lstStyle/>
+          <a:p>
+            <a:pPr marL="0" lvl="0" indent="0" algn="l" rtl="0">
+              <a:spcBef>
+                <a:spcPts val="0"/>
+              </a:spcBef>
+              <a:spcAft>
+                <a:spcPts val="0"/>
+              </a:spcAft>
+              <a:buNone/>
+            </a:pPr>
+            <a:r>
+              <a:rPr lang="en" sz="1600" u="sng">
+                <a:solidFill>
+                  <a:schemeClr val="hlink"/>
+                </a:solidFill>
+                <a:latin typeface="Calibri"/>
+                <a:ea typeface="Calibri"/>
+                <a:cs typeface="Calibri"/>
+                <a:sym typeface="Calibri"/>
+                <a:hlinkClick r:id="rId5"/>
+              </a:rPr>
+              <a:t>https://eais.ai</a:t>
+            </a:r>
+            <a:r>
+              <a:rPr lang="en" sz="1600">
+                <a:latin typeface="Calibri"/>
+                <a:ea typeface="Calibri"/>
+                <a:cs typeface="Calibri"/>
+                <a:sym typeface="Calibri"/>
+              </a:rPr>
+              <a:t> </a:t>
+            </a:r>
+            <a:endParaRPr sz="1600">
+              <a:latin typeface="Calibri"/>
+              <a:ea typeface="Calibri"/>
+              <a:cs typeface="Calibri"/>
+              <a:sym typeface="Calibri"/>
+            </a:endParaRPr>
+          </a:p>
+        </p:txBody>
+      </p:sp>
+    </p:spTree>
+  </p:cSld>
+  <p:clrMapOvr>
+    <a:masterClrMapping/>
+  </p:clrMapOvr>
+</p:sld>
+</file>
+
+<file path=ppt/slides/slide20.xml><?xml version="1.0" encoding="utf-8"?>
+<p:sld xmlns:a="http://schemas.openxmlformats.org/drawingml/2006/main" xmlns:r="http://schemas.openxmlformats.org/officeDocument/2006/relationships" xmlns:p="http://schemas.openxmlformats.org/presentationml/2006/main">
+  <p:cSld>
+    <p:spTree>
+      <p:nvGrpSpPr>
+        <p:cNvPr id="1" name="Shape 232"/>
         <p:cNvGrpSpPr/>
         <p:nvPr/>
       </p:nvGrpSpPr>
@@ -14212,7 +15781,7 @@
       </p:grpSpPr>
       <p:sp>
         <p:nvSpPr>
-          <p:cNvPr id="215" name="Google Shape;215;p31"/>
+          <p:cNvPr id="233" name="Google Shape;233;p32"/>
           <p:cNvSpPr txBox="1"/>
           <p:nvPr/>
         </p:nvSpPr>
@@ -14482,7 +16051,7 @@
       </p:sp>
       <p:sp>
         <p:nvSpPr>
-          <p:cNvPr id="216" name="Google Shape;216;p31"/>
+          <p:cNvPr id="234" name="Google Shape;234;p32"/>
           <p:cNvSpPr txBox="1"/>
           <p:nvPr/>
         </p:nvSpPr>
@@ -14537,7 +16106,7 @@
       </p:sp>
       <p:pic>
         <p:nvPicPr>
-          <p:cNvPr id="217" name="Google Shape;217;p31"/>
+          <p:cNvPr id="235" name="Google Shape;235;p32"/>
           <p:cNvPicPr preferRelativeResize="0"/>
           <p:nvPr/>
         </p:nvPicPr>
@@ -14570,7 +16139,7 @@
       </p:pic>
       <p:pic>
         <p:nvPicPr>
-          <p:cNvPr id="218" name="Google Shape;218;p31"/>
+          <p:cNvPr id="236" name="Google Shape;236;p32"/>
           <p:cNvPicPr preferRelativeResize="0"/>
           <p:nvPr/>
         </p:nvPicPr>
@@ -14603,7 +16172,7 @@
       </p:pic>
       <p:pic>
         <p:nvPicPr>
-          <p:cNvPr id="219" name="Google Shape;219;p31"/>
+          <p:cNvPr id="237" name="Google Shape;237;p32"/>
           <p:cNvPicPr preferRelativeResize="0"/>
           <p:nvPr/>
         </p:nvPicPr>
@@ -14642,7 +16211,7 @@
       </p:pic>
       <p:pic>
         <p:nvPicPr>
-          <p:cNvPr id="220" name="Google Shape;220;p31"/>
+          <p:cNvPr id="238" name="Google Shape;238;p32"/>
           <p:cNvPicPr preferRelativeResize="0"/>
           <p:nvPr/>
         </p:nvPicPr>
@@ -14681,7 +16250,7 @@
       </p:pic>
       <p:pic>
         <p:nvPicPr>
-          <p:cNvPr id="221" name="Google Shape;221;p31"/>
+          <p:cNvPr id="239" name="Google Shape;239;p32"/>
           <p:cNvPicPr preferRelativeResize="0"/>
           <p:nvPr/>
         </p:nvPicPr>
@@ -14720,7 +16289,7 @@
       </p:pic>
       <p:graphicFrame>
         <p:nvGraphicFramePr>
-          <p:cNvPr id="222" name="Google Shape;222;p31"/>
+          <p:cNvPr id="240" name="Google Shape;240;p32"/>
           <p:cNvGraphicFramePr/>
           <p:nvPr/>
         </p:nvGraphicFramePr>
@@ -14733,7 +16302,7 @@
             <a:tbl>
               <a:tblPr>
                 <a:noFill/>
-                <a:tableStyleId>{3E865C45-AA70-49CF-9D23-C2631EF97349}</a:tableStyleId>
+                <a:tableStyleId>{8314E878-3E45-428C-A9B3-C2D216E8C6CA}</a:tableStyleId>
               </a:tblPr>
               <a:tblGrid>
                 <a:gridCol w="1828800">
@@ -18762,554 +20331,12 @@
 </p:sld>
 </file>
 
-<file path=ppt/slides/slide2.xml><?xml version="1.0" encoding="utf-8"?>
+<file path=ppt/slides/slide21.xml><?xml version="1.0" encoding="utf-8"?>
 <p:sld xmlns:a="http://schemas.openxmlformats.org/drawingml/2006/main" xmlns:r="http://schemas.openxmlformats.org/officeDocument/2006/relationships" xmlns:p="http://schemas.openxmlformats.org/presentationml/2006/main">
   <p:cSld>
     <p:spTree>
       <p:nvGrpSpPr>
-        <p:cNvPr id="1" name="Shape 60"/>
-        <p:cNvGrpSpPr/>
-        <p:nvPr/>
-      </p:nvGrpSpPr>
-      <p:grpSpPr>
-        <a:xfrm>
-          <a:off x="0" y="0"/>
-          <a:ext cx="0" cy="0"/>
-          <a:chOff x="0" y="0"/>
-          <a:chExt cx="0" cy="0"/>
-        </a:xfrm>
-      </p:grpSpPr>
-      <p:pic>
-        <p:nvPicPr>
-          <p:cNvPr id="61" name="Google Shape;61;p14"/>
-          <p:cNvPicPr preferRelativeResize="0"/>
-          <p:nvPr/>
-        </p:nvPicPr>
-        <p:blipFill>
-          <a:blip r:embed="rId3" cstate="email">
-            <a:alphaModFix/>
-            <a:extLst>
-              <a:ext uri="{28A0092B-C50C-407E-A947-70E740481C1C}">
-                <a14:useLocalDpi xmlns:a14="http://schemas.microsoft.com/office/drawing/2010/main"/>
-              </a:ext>
-            </a:extLst>
-          </a:blip>
-          <a:stretch>
-            <a:fillRect/>
-          </a:stretch>
-        </p:blipFill>
-        <p:spPr>
-          <a:xfrm>
-            <a:off x="605238" y="1203525"/>
-            <a:ext cx="2094075" cy="2094075"/>
-          </a:xfrm>
-          <a:prstGeom prst="rect">
-            <a:avLst/>
-          </a:prstGeom>
-          <a:noFill/>
-          <a:ln>
-            <a:noFill/>
-          </a:ln>
-        </p:spPr>
-      </p:pic>
-      <p:sp>
-        <p:nvSpPr>
-          <p:cNvPr id="62" name="Google Shape;62;p14"/>
-          <p:cNvSpPr txBox="1"/>
-          <p:nvPr/>
-        </p:nvSpPr>
-        <p:spPr>
-          <a:xfrm>
-            <a:off x="-25625" y="-14775"/>
-            <a:ext cx="3355800" cy="569400"/>
-          </a:xfrm>
-          <a:prstGeom prst="rect">
-            <a:avLst/>
-          </a:prstGeom>
-          <a:noFill/>
-          <a:ln>
-            <a:noFill/>
-          </a:ln>
-        </p:spPr>
-        <p:txBody>
-          <a:bodyPr spcFirstLastPara="1" wrap="square" lIns="91425" tIns="91425" rIns="91425" bIns="91425" anchor="t" anchorCtr="0">
-            <a:spAutoFit/>
-          </a:bodyPr>
-          <a:lstStyle/>
-          <a:p>
-            <a:pPr marL="0" lvl="0" indent="0" algn="l" rtl="0">
-              <a:spcBef>
-                <a:spcPts val="0"/>
-              </a:spcBef>
-              <a:spcAft>
-                <a:spcPts val="0"/>
-              </a:spcAft>
-              <a:buNone/>
-            </a:pPr>
-            <a:r>
-              <a:rPr lang="en" sz="2500" b="1">
-                <a:latin typeface="Calibri"/>
-                <a:ea typeface="Calibri"/>
-                <a:cs typeface="Calibri"/>
-                <a:sym typeface="Calibri"/>
-              </a:rPr>
-              <a:t>About the Speaker</a:t>
-            </a:r>
-            <a:endParaRPr sz="2500" b="1">
-              <a:latin typeface="Calibri"/>
-              <a:ea typeface="Calibri"/>
-              <a:cs typeface="Calibri"/>
-              <a:sym typeface="Calibri"/>
-            </a:endParaRPr>
-          </a:p>
-        </p:txBody>
-      </p:sp>
-      <p:sp>
-        <p:nvSpPr>
-          <p:cNvPr id="63" name="Google Shape;63;p14"/>
-          <p:cNvSpPr txBox="1"/>
-          <p:nvPr/>
-        </p:nvSpPr>
-        <p:spPr>
-          <a:xfrm>
-            <a:off x="3330175" y="878750"/>
-            <a:ext cx="5621700" cy="3309300"/>
-          </a:xfrm>
-          <a:prstGeom prst="rect">
-            <a:avLst/>
-          </a:prstGeom>
-          <a:noFill/>
-          <a:ln>
-            <a:noFill/>
-          </a:ln>
-        </p:spPr>
-        <p:txBody>
-          <a:bodyPr spcFirstLastPara="1" wrap="square" lIns="91425" tIns="91425" rIns="91425" bIns="91425" anchor="t" anchorCtr="0">
-            <a:spAutoFit/>
-          </a:bodyPr>
-          <a:lstStyle/>
-          <a:p>
-            <a:pPr marL="0" lvl="0" indent="0" algn="l" rtl="0">
-              <a:spcBef>
-                <a:spcPts val="0"/>
-              </a:spcBef>
-              <a:spcAft>
-                <a:spcPts val="0"/>
-              </a:spcAft>
-              <a:buClr>
-                <a:schemeClr val="dk1"/>
-              </a:buClr>
-              <a:buSzPts val="1100"/>
-              <a:buFont typeface="Arial"/>
-              <a:buNone/>
-            </a:pPr>
-            <a:r>
-              <a:rPr lang="en" sz="2500" b="1">
-                <a:latin typeface="Calibri"/>
-                <a:ea typeface="Calibri"/>
-                <a:cs typeface="Calibri"/>
-                <a:sym typeface="Calibri"/>
-              </a:rPr>
-              <a:t>Lev Selector, Ph.D.</a:t>
-            </a:r>
-            <a:endParaRPr sz="2500" b="1">
-              <a:latin typeface="Calibri"/>
-              <a:ea typeface="Calibri"/>
-              <a:cs typeface="Calibri"/>
-              <a:sym typeface="Calibri"/>
-            </a:endParaRPr>
-          </a:p>
-          <a:p>
-            <a:pPr marL="0" lvl="0" indent="0" algn="l" rtl="0">
-              <a:spcBef>
-                <a:spcPts val="0"/>
-              </a:spcBef>
-              <a:spcAft>
-                <a:spcPts val="0"/>
-              </a:spcAft>
-              <a:buClr>
-                <a:schemeClr val="dk1"/>
-              </a:buClr>
-              <a:buSzPts val="1100"/>
-              <a:buFont typeface="Arial"/>
-              <a:buNone/>
-            </a:pPr>
-            <a:endParaRPr sz="1800">
-              <a:latin typeface="Calibri"/>
-              <a:ea typeface="Calibri"/>
-              <a:cs typeface="Calibri"/>
-              <a:sym typeface="Calibri"/>
-            </a:endParaRPr>
-          </a:p>
-          <a:p>
-            <a:pPr marL="457200" lvl="0" indent="-330200" algn="l" rtl="0">
-              <a:spcBef>
-                <a:spcPts val="0"/>
-              </a:spcBef>
-              <a:spcAft>
-                <a:spcPts val="0"/>
-              </a:spcAft>
-              <a:buSzPts val="1600"/>
-              <a:buFont typeface="Calibri"/>
-              <a:buChar char="●"/>
-            </a:pPr>
-            <a:r>
-              <a:rPr lang="en" sz="1600">
-                <a:solidFill>
-                  <a:schemeClr val="dk1"/>
-                </a:solidFill>
-                <a:latin typeface="Calibri"/>
-                <a:ea typeface="Calibri"/>
-                <a:cs typeface="Calibri"/>
-                <a:sym typeface="Calibri"/>
-              </a:rPr>
-              <a:t>40+ years of software engineering, data science, and building teams (hiring, training, and managing)</a:t>
-            </a:r>
-            <a:endParaRPr sz="1600">
-              <a:solidFill>
-                <a:schemeClr val="dk1"/>
-              </a:solidFill>
-              <a:latin typeface="Calibri"/>
-              <a:ea typeface="Calibri"/>
-              <a:cs typeface="Calibri"/>
-              <a:sym typeface="Calibri"/>
-            </a:endParaRPr>
-          </a:p>
-          <a:p>
-            <a:pPr marL="457200" lvl="0" indent="-330200" algn="l" rtl="0">
-              <a:spcBef>
-                <a:spcPts val="0"/>
-              </a:spcBef>
-              <a:spcAft>
-                <a:spcPts val="0"/>
-              </a:spcAft>
-              <a:buSzPts val="1600"/>
-              <a:buFont typeface="Calibri"/>
-              <a:buChar char="●"/>
-            </a:pPr>
-            <a:r>
-              <a:rPr lang="en" sz="1600">
-                <a:solidFill>
-                  <a:schemeClr val="dk1"/>
-                </a:solidFill>
-                <a:latin typeface="Calibri"/>
-                <a:ea typeface="Calibri"/>
-                <a:cs typeface="Calibri"/>
-                <a:sym typeface="Calibri"/>
-              </a:rPr>
-              <a:t>Ph.D. in mathematical modeling and computer simulations</a:t>
-            </a:r>
-            <a:endParaRPr sz="1600">
-              <a:latin typeface="Calibri"/>
-              <a:ea typeface="Calibri"/>
-              <a:cs typeface="Calibri"/>
-              <a:sym typeface="Calibri"/>
-            </a:endParaRPr>
-          </a:p>
-          <a:p>
-            <a:pPr marL="0" lvl="0" indent="0" algn="l" rtl="0">
-              <a:spcBef>
-                <a:spcPts val="0"/>
-              </a:spcBef>
-              <a:spcAft>
-                <a:spcPts val="0"/>
-              </a:spcAft>
-              <a:buClr>
-                <a:schemeClr val="dk1"/>
-              </a:buClr>
-              <a:buSzPts val="1100"/>
-              <a:buFont typeface="Arial"/>
-              <a:buNone/>
-            </a:pPr>
-            <a:endParaRPr sz="1600">
-              <a:latin typeface="Calibri"/>
-              <a:ea typeface="Calibri"/>
-              <a:cs typeface="Calibri"/>
-              <a:sym typeface="Calibri"/>
-            </a:endParaRPr>
-          </a:p>
-          <a:p>
-            <a:pPr marL="0" lvl="0" indent="0" algn="l" rtl="0">
-              <a:spcBef>
-                <a:spcPts val="0"/>
-              </a:spcBef>
-              <a:spcAft>
-                <a:spcPts val="0"/>
-              </a:spcAft>
-              <a:buNone/>
-            </a:pPr>
-            <a:r>
-              <a:rPr lang="en" sz="1600">
-                <a:latin typeface="Calibri"/>
-                <a:ea typeface="Calibri"/>
-                <a:cs typeface="Calibri"/>
-                <a:sym typeface="Calibri"/>
-              </a:rPr>
-              <a:t>Interests: </a:t>
-            </a:r>
-            <a:endParaRPr sz="1600">
-              <a:latin typeface="Calibri"/>
-              <a:ea typeface="Calibri"/>
-              <a:cs typeface="Calibri"/>
-              <a:sym typeface="Calibri"/>
-            </a:endParaRPr>
-          </a:p>
-          <a:p>
-            <a:pPr marL="457200" lvl="0" indent="-330200" algn="l" rtl="0">
-              <a:spcBef>
-                <a:spcPts val="0"/>
-              </a:spcBef>
-              <a:spcAft>
-                <a:spcPts val="0"/>
-              </a:spcAft>
-              <a:buSzPts val="1600"/>
-              <a:buFont typeface="Calibri"/>
-              <a:buChar char="●"/>
-            </a:pPr>
-            <a:r>
-              <a:rPr lang="en" sz="1600">
-                <a:solidFill>
-                  <a:schemeClr val="dk1"/>
-                </a:solidFill>
-                <a:latin typeface="Calibri"/>
-                <a:ea typeface="Calibri"/>
-                <a:cs typeface="Calibri"/>
-                <a:sym typeface="Calibri"/>
-              </a:rPr>
-              <a:t>Generative AI, Using LLM with your data</a:t>
-            </a:r>
-            <a:endParaRPr sz="1600">
-              <a:solidFill>
-                <a:schemeClr val="dk1"/>
-              </a:solidFill>
-              <a:latin typeface="Calibri"/>
-              <a:ea typeface="Calibri"/>
-              <a:cs typeface="Calibri"/>
-              <a:sym typeface="Calibri"/>
-            </a:endParaRPr>
-          </a:p>
-          <a:p>
-            <a:pPr marL="457200" lvl="0" indent="-330200" algn="l" rtl="0">
-              <a:spcBef>
-                <a:spcPts val="0"/>
-              </a:spcBef>
-              <a:spcAft>
-                <a:spcPts val="0"/>
-              </a:spcAft>
-              <a:buClr>
-                <a:schemeClr val="dk1"/>
-              </a:buClr>
-              <a:buSzPts val="1600"/>
-              <a:buFont typeface="Calibri"/>
-              <a:buChar char="●"/>
-            </a:pPr>
-            <a:r>
-              <a:rPr lang="en" sz="1600">
-                <a:solidFill>
-                  <a:schemeClr val="dk1"/>
-                </a:solidFill>
-                <a:latin typeface="Calibri"/>
-                <a:ea typeface="Calibri"/>
-                <a:cs typeface="Calibri"/>
-                <a:sym typeface="Calibri"/>
-              </a:rPr>
-              <a:t>Local AI for Local Private Data</a:t>
-            </a:r>
-            <a:endParaRPr sz="1600">
-              <a:solidFill>
-                <a:schemeClr val="dk1"/>
-              </a:solidFill>
-              <a:latin typeface="Calibri"/>
-              <a:ea typeface="Calibri"/>
-              <a:cs typeface="Calibri"/>
-              <a:sym typeface="Calibri"/>
-            </a:endParaRPr>
-          </a:p>
-          <a:p>
-            <a:pPr marL="457200" lvl="0" indent="-330200" algn="l" rtl="0">
-              <a:spcBef>
-                <a:spcPts val="0"/>
-              </a:spcBef>
-              <a:spcAft>
-                <a:spcPts val="0"/>
-              </a:spcAft>
-              <a:buSzPts val="1600"/>
-              <a:buFont typeface="Calibri"/>
-              <a:buChar char="●"/>
-            </a:pPr>
-            <a:r>
-              <a:rPr lang="en" sz="1600">
-                <a:latin typeface="Calibri"/>
-                <a:ea typeface="Calibri"/>
-                <a:cs typeface="Calibri"/>
-                <a:sym typeface="Calibri"/>
-              </a:rPr>
-              <a:t>Cloud architecture, fin-tech, application security</a:t>
-            </a:r>
-            <a:endParaRPr sz="1600">
-              <a:latin typeface="Calibri"/>
-              <a:ea typeface="Calibri"/>
-              <a:cs typeface="Calibri"/>
-              <a:sym typeface="Calibri"/>
-            </a:endParaRPr>
-          </a:p>
-          <a:p>
-            <a:pPr marL="0" lvl="0" indent="0" algn="l" rtl="0">
-              <a:spcBef>
-                <a:spcPts val="0"/>
-              </a:spcBef>
-              <a:spcAft>
-                <a:spcPts val="0"/>
-              </a:spcAft>
-              <a:buNone/>
-            </a:pPr>
-            <a:endParaRPr sz="1600">
-              <a:latin typeface="Calibri"/>
-              <a:ea typeface="Calibri"/>
-              <a:cs typeface="Calibri"/>
-              <a:sym typeface="Calibri"/>
-            </a:endParaRPr>
-          </a:p>
-          <a:p>
-            <a:pPr marL="0" lvl="0" indent="0" algn="l" rtl="0">
-              <a:spcBef>
-                <a:spcPts val="0"/>
-              </a:spcBef>
-              <a:spcAft>
-                <a:spcPts val="0"/>
-              </a:spcAft>
-              <a:buNone/>
-            </a:pPr>
-            <a:r>
-              <a:rPr lang="en" sz="1600">
-                <a:latin typeface="Calibri"/>
-                <a:ea typeface="Calibri"/>
-                <a:cs typeface="Calibri"/>
-                <a:sym typeface="Calibri"/>
-              </a:rPr>
-              <a:t>Find/connect: Linkedin, GitHub, YouTube, Google</a:t>
-            </a:r>
-            <a:endParaRPr sz="1600">
-              <a:latin typeface="Calibri"/>
-              <a:ea typeface="Calibri"/>
-              <a:cs typeface="Calibri"/>
-              <a:sym typeface="Calibri"/>
-            </a:endParaRPr>
-          </a:p>
-        </p:txBody>
-      </p:sp>
-      <p:pic>
-        <p:nvPicPr>
-          <p:cNvPr id="64" name="Google Shape;64;p14"/>
-          <p:cNvPicPr preferRelativeResize="0"/>
-          <p:nvPr/>
-        </p:nvPicPr>
-        <p:blipFill>
-          <a:blip r:embed="rId4" cstate="email">
-            <a:alphaModFix/>
-            <a:extLst>
-              <a:ext uri="{28A0092B-C50C-407E-A947-70E740481C1C}">
-                <a14:useLocalDpi xmlns:a14="http://schemas.microsoft.com/office/drawing/2010/main"/>
-              </a:ext>
-            </a:extLst>
-          </a:blip>
-          <a:stretch>
-            <a:fillRect/>
-          </a:stretch>
-        </p:blipFill>
-        <p:spPr>
-          <a:xfrm>
-            <a:off x="1010941" y="3664175"/>
-            <a:ext cx="1144600" cy="415875"/>
-          </a:xfrm>
-          <a:prstGeom prst="rect">
-            <a:avLst/>
-          </a:prstGeom>
-          <a:noFill/>
-          <a:ln>
-            <a:noFill/>
-          </a:ln>
-        </p:spPr>
-      </p:pic>
-      <p:sp>
-        <p:nvSpPr>
-          <p:cNvPr id="65" name="Google Shape;65;p14"/>
-          <p:cNvSpPr txBox="1"/>
-          <p:nvPr/>
-        </p:nvSpPr>
-        <p:spPr>
-          <a:xfrm>
-            <a:off x="912377" y="4005903"/>
-            <a:ext cx="1391400" cy="431100"/>
-          </a:xfrm>
-          <a:prstGeom prst="rect">
-            <a:avLst/>
-          </a:prstGeom>
-          <a:noFill/>
-          <a:ln>
-            <a:noFill/>
-          </a:ln>
-        </p:spPr>
-        <p:txBody>
-          <a:bodyPr spcFirstLastPara="1" wrap="square" lIns="91425" tIns="91425" rIns="91425" bIns="91425" anchor="t" anchorCtr="0">
-            <a:spAutoFit/>
-          </a:bodyPr>
-          <a:lstStyle/>
-          <a:p>
-            <a:pPr marL="0" lvl="0" indent="0" algn="l" rtl="0">
-              <a:spcBef>
-                <a:spcPts val="0"/>
-              </a:spcBef>
-              <a:spcAft>
-                <a:spcPts val="0"/>
-              </a:spcAft>
-              <a:buNone/>
-            </a:pPr>
-            <a:r>
-              <a:rPr lang="en" sz="1600" u="sng">
-                <a:solidFill>
-                  <a:schemeClr val="hlink"/>
-                </a:solidFill>
-                <a:latin typeface="Calibri"/>
-                <a:ea typeface="Calibri"/>
-                <a:cs typeface="Calibri"/>
-                <a:sym typeface="Calibri"/>
-                <a:hlinkClick r:id="rId5"/>
-              </a:rPr>
-              <a:t>https://eais.ai</a:t>
-            </a:r>
-            <a:r>
-              <a:rPr lang="en" sz="1600">
-                <a:latin typeface="Calibri"/>
-                <a:ea typeface="Calibri"/>
-                <a:cs typeface="Calibri"/>
-                <a:sym typeface="Calibri"/>
-              </a:rPr>
-              <a:t> </a:t>
-            </a:r>
-            <a:endParaRPr sz="1600">
-              <a:latin typeface="Calibri"/>
-              <a:ea typeface="Calibri"/>
-              <a:cs typeface="Calibri"/>
-              <a:sym typeface="Calibri"/>
-            </a:endParaRPr>
-          </a:p>
-        </p:txBody>
-      </p:sp>
-    </p:spTree>
-  </p:cSld>
-  <p:clrMapOvr>
-    <a:masterClrMapping/>
-  </p:clrMapOvr>
-</p:sld>
-</file>
-
-<file path=ppt/slides/slide20.xml><?xml version="1.0" encoding="utf-8"?>
-<p:sld xmlns:a="http://schemas.openxmlformats.org/drawingml/2006/main" xmlns:r="http://schemas.openxmlformats.org/officeDocument/2006/relationships" xmlns:p="http://schemas.openxmlformats.org/presentationml/2006/main">
-  <p:cSld>
-    <p:spTree>
-      <p:nvGrpSpPr>
-        <p:cNvPr id="1" name="Shape 226"/>
+        <p:cNvPr id="1" name="Shape 244"/>
         <p:cNvGrpSpPr/>
         <p:nvPr/>
       </p:nvGrpSpPr>
@@ -19323,7 +20350,7 @@
       </p:grpSpPr>
       <p:sp>
         <p:nvSpPr>
-          <p:cNvPr id="227" name="Google Shape;227;p32"/>
+          <p:cNvPr id="245" name="Google Shape;245;p33"/>
           <p:cNvSpPr txBox="1"/>
           <p:nvPr/>
         </p:nvSpPr>
@@ -19378,7 +20405,7 @@
       </p:sp>
       <p:sp>
         <p:nvSpPr>
-          <p:cNvPr id="228" name="Google Shape;228;p32"/>
+          <p:cNvPr id="246" name="Google Shape;246;p33"/>
           <p:cNvSpPr txBox="1"/>
           <p:nvPr/>
         </p:nvSpPr>
@@ -19718,7 +20745,7 @@
       </p:sp>
       <p:sp>
         <p:nvSpPr>
-          <p:cNvPr id="229" name="Google Shape;229;p32"/>
+          <p:cNvPr id="247" name="Google Shape;247;p33"/>
           <p:cNvSpPr txBox="1"/>
           <p:nvPr/>
         </p:nvSpPr>
@@ -19913,12 +20940,12 @@
 </p:sld>
 </file>
 
-<file path=ppt/slides/slide21.xml><?xml version="1.0" encoding="utf-8"?>
+<file path=ppt/slides/slide22.xml><?xml version="1.0" encoding="utf-8"?>
 <p:sld xmlns:a="http://schemas.openxmlformats.org/drawingml/2006/main" xmlns:r="http://schemas.openxmlformats.org/officeDocument/2006/relationships" xmlns:p="http://schemas.openxmlformats.org/presentationml/2006/main">
   <p:cSld>
     <p:spTree>
       <p:nvGrpSpPr>
-        <p:cNvPr id="1" name="Shape 233"/>
+        <p:cNvPr id="1" name="Shape 251"/>
         <p:cNvGrpSpPr/>
         <p:nvPr/>
       </p:nvGrpSpPr>
@@ -19932,14 +20959,14 @@
       </p:grpSpPr>
       <p:sp>
         <p:nvSpPr>
-          <p:cNvPr id="234" name="Google Shape;234;p33"/>
+          <p:cNvPr id="252" name="Google Shape;252;p34"/>
           <p:cNvSpPr txBox="1"/>
           <p:nvPr/>
         </p:nvSpPr>
         <p:spPr>
           <a:xfrm>
             <a:off x="72300" y="76200"/>
-            <a:ext cx="4131300" cy="326400"/>
+            <a:ext cx="4131300" cy="634200"/>
           </a:xfrm>
           <a:prstGeom prst="rect">
             <a:avLst/>
@@ -19974,7 +21001,7 @@
                 <a:cs typeface="Calibri"/>
                 <a:sym typeface="Calibri"/>
               </a:rPr>
-              <a:t>Layoffs are not too big</a:t>
+              <a:t>Decrease in writing, translation, and some other jobs</a:t>
             </a:r>
             <a:endParaRPr sz="2000" b="1">
               <a:latin typeface="Calibri"/>
@@ -19987,155 +21014,14 @@
       </p:sp>
       <p:sp>
         <p:nvSpPr>
-          <p:cNvPr id="235" name="Google Shape;235;p33"/>
+          <p:cNvPr id="253" name="Google Shape;253;p34"/>
           <p:cNvSpPr txBox="1"/>
           <p:nvPr/>
         </p:nvSpPr>
         <p:spPr>
           <a:xfrm>
-            <a:off x="1715200" y="533263"/>
-            <a:ext cx="2002500" cy="384900"/>
-          </a:xfrm>
-          <a:prstGeom prst="rect">
-            <a:avLst/>
-          </a:prstGeom>
-          <a:noFill/>
-          <a:ln>
-            <a:noFill/>
-          </a:ln>
-        </p:spPr>
-        <p:txBody>
-          <a:bodyPr spcFirstLastPara="1" wrap="square" lIns="91425" tIns="91425" rIns="91425" bIns="91425" anchor="t" anchorCtr="0">
-            <a:spAutoFit/>
-          </a:bodyPr>
-          <a:lstStyle/>
-          <a:p>
-            <a:pPr marL="0" lvl="0" indent="0" algn="l" rtl="0">
-              <a:spcBef>
-                <a:spcPts val="0"/>
-              </a:spcBef>
-              <a:spcAft>
-                <a:spcPts val="0"/>
-              </a:spcAft>
-              <a:buNone/>
-            </a:pPr>
-            <a:r>
-              <a:rPr lang="en" sz="1300">
-                <a:solidFill>
-                  <a:srgbClr val="0F0F0F"/>
-                </a:solidFill>
-                <a:latin typeface="Calibri"/>
-                <a:ea typeface="Calibri"/>
-                <a:cs typeface="Calibri"/>
-                <a:sym typeface="Calibri"/>
-              </a:rPr>
-              <a:t>Layoffs - </a:t>
-            </a:r>
-            <a:r>
-              <a:rPr lang="en" sz="1300" u="sng">
-                <a:solidFill>
-                  <a:schemeClr val="hlink"/>
-                </a:solidFill>
-                <a:latin typeface="Calibri"/>
-                <a:ea typeface="Calibri"/>
-                <a:cs typeface="Calibri"/>
-                <a:sym typeface="Calibri"/>
-                <a:hlinkClick r:id="rId3"/>
-              </a:rPr>
-              <a:t>https://layoffs.fyi</a:t>
-            </a:r>
-            <a:r>
-              <a:rPr lang="en" sz="1300">
-                <a:solidFill>
-                  <a:srgbClr val="0F0F0F"/>
-                </a:solidFill>
-                <a:latin typeface="Calibri"/>
-                <a:ea typeface="Calibri"/>
-                <a:cs typeface="Calibri"/>
-                <a:sym typeface="Calibri"/>
-              </a:rPr>
-              <a:t> </a:t>
-            </a:r>
-            <a:endParaRPr sz="1300">
-              <a:solidFill>
-                <a:srgbClr val="0F0F0F"/>
-              </a:solidFill>
-              <a:latin typeface="Calibri"/>
-              <a:ea typeface="Calibri"/>
-              <a:cs typeface="Calibri"/>
-              <a:sym typeface="Calibri"/>
-            </a:endParaRPr>
-          </a:p>
-        </p:txBody>
-      </p:sp>
-      <p:sp>
-        <p:nvSpPr>
-          <p:cNvPr id="236" name="Google Shape;236;p33"/>
-          <p:cNvSpPr txBox="1"/>
-          <p:nvPr/>
-        </p:nvSpPr>
-        <p:spPr>
-          <a:xfrm>
-            <a:off x="643850" y="2527325"/>
-            <a:ext cx="3559800" cy="338700"/>
-          </a:xfrm>
-          <a:prstGeom prst="rect">
-            <a:avLst/>
-          </a:prstGeom>
-          <a:noFill/>
-          <a:ln>
-            <a:noFill/>
-          </a:ln>
-        </p:spPr>
-        <p:txBody>
-          <a:bodyPr spcFirstLastPara="1" wrap="square" lIns="91425" tIns="91425" rIns="91425" bIns="91425" anchor="t" anchorCtr="0">
-            <a:spAutoFit/>
-          </a:bodyPr>
-          <a:lstStyle/>
-          <a:p>
-            <a:pPr marL="0" lvl="0" indent="0" algn="l" rtl="0">
-              <a:spcBef>
-                <a:spcPts val="0"/>
-              </a:spcBef>
-              <a:spcAft>
-                <a:spcPts val="0"/>
-              </a:spcAft>
-              <a:buNone/>
-            </a:pPr>
-            <a:r>
-              <a:rPr lang="en" sz="1000">
-                <a:solidFill>
-                  <a:srgbClr val="0F0F0F"/>
-                </a:solidFill>
-                <a:latin typeface="Roboto Mono"/>
-                <a:ea typeface="Roboto Mono"/>
-                <a:cs typeface="Roboto Mono"/>
-                <a:sym typeface="Roboto Mono"/>
-              </a:rPr>
-              <a:t>2022                2023                2024</a:t>
-            </a:r>
-            <a:endParaRPr sz="1000">
-              <a:solidFill>
-                <a:srgbClr val="0F0F0F"/>
-              </a:solidFill>
-              <a:latin typeface="Roboto Mono"/>
-              <a:ea typeface="Roboto Mono"/>
-              <a:cs typeface="Roboto Mono"/>
-              <a:sym typeface="Roboto Mono"/>
-            </a:endParaRPr>
-          </a:p>
-        </p:txBody>
-      </p:sp>
-      <p:sp>
-        <p:nvSpPr>
-          <p:cNvPr id="237" name="Google Shape;237;p33"/>
-          <p:cNvSpPr txBox="1"/>
-          <p:nvPr/>
-        </p:nvSpPr>
-        <p:spPr>
-          <a:xfrm>
-            <a:off x="444213" y="3102700"/>
-            <a:ext cx="3716100" cy="218400"/>
+            <a:off x="72300" y="710400"/>
+            <a:ext cx="4975200" cy="557100"/>
           </a:xfrm>
           <a:prstGeom prst="rect">
             <a:avLst/>
@@ -20153,7 +21039,7 @@
           </a:bodyPr>
           <a:lstStyle/>
           <a:p>
-            <a:pPr marL="0" lvl="0" indent="0" algn="ctr" rtl="0">
+            <a:pPr marL="0" lvl="0" indent="0" algn="l" rtl="0">
               <a:spcBef>
                 <a:spcPts val="0"/>
               </a:spcBef>
@@ -20169,6 +21055,81 @@
             </a:pPr>
             <a:r>
               <a:rPr lang="en" sz="1300">
+                <a:latin typeface="Calibri"/>
+                <a:ea typeface="Calibri"/>
+                <a:cs typeface="Calibri"/>
+                <a:sym typeface="Calibri"/>
+              </a:rPr>
+              <a:t>I analyzed 5M freelancing jobs </a:t>
+            </a:r>
+            <a:endParaRPr sz="1300">
+              <a:latin typeface="Calibri"/>
+              <a:ea typeface="Calibri"/>
+              <a:cs typeface="Calibri"/>
+              <a:sym typeface="Calibri"/>
+            </a:endParaRPr>
+          </a:p>
+          <a:p>
+            <a:pPr marL="0" lvl="0" indent="0" algn="l" rtl="0">
+              <a:spcBef>
+                <a:spcPts val="0"/>
+              </a:spcBef>
+              <a:spcAft>
+                <a:spcPts val="0"/>
+              </a:spcAft>
+              <a:buClr>
+                <a:schemeClr val="dk1"/>
+              </a:buClr>
+              <a:buSzPts val="1100"/>
+              <a:buFont typeface="Arial"/>
+              <a:buNone/>
+            </a:pPr>
+            <a:r>
+              <a:rPr lang="en" sz="1300">
+                <a:latin typeface="Calibri"/>
+                <a:ea typeface="Calibri"/>
+                <a:cs typeface="Calibri"/>
+                <a:sym typeface="Calibri"/>
+              </a:rPr>
+              <a:t>to see what jobs are being replaced by AI</a:t>
+            </a:r>
+            <a:endParaRPr sz="1300">
+              <a:latin typeface="Calibri"/>
+              <a:ea typeface="Calibri"/>
+              <a:cs typeface="Calibri"/>
+              <a:sym typeface="Calibri"/>
+            </a:endParaRPr>
+          </a:p>
+          <a:p>
+            <a:pPr marL="0" lvl="0" indent="0" algn="l" rtl="0">
+              <a:spcBef>
+                <a:spcPts val="0"/>
+              </a:spcBef>
+              <a:spcAft>
+                <a:spcPts val="0"/>
+              </a:spcAft>
+              <a:buClr>
+                <a:schemeClr val="dk1"/>
+              </a:buClr>
+              <a:buSzPts val="1100"/>
+              <a:buFont typeface="Arial"/>
+              <a:buNone/>
+            </a:pPr>
+            <a:r>
+              <a:rPr lang="en" sz="900" u="sng">
+                <a:solidFill>
+                  <a:schemeClr val="hlink"/>
+                </a:solidFill>
+                <a:latin typeface="Calibri"/>
+                <a:ea typeface="Calibri"/>
+                <a:cs typeface="Calibri"/>
+                <a:sym typeface="Calibri"/>
+                <a:hlinkClick r:id="rId3"/>
+              </a:rPr>
+              <a:t>https://bloomberry.com/i-analyzed-5m-freelancing-jobs-to-see-what-jobs-are-being-replaced-by-ai/</a:t>
+            </a:r>
+            <a:r>
+              <a:rPr lang="en" sz="900">
                 <a:solidFill>
                   <a:schemeClr val="dk1"/>
                 </a:solidFill>
@@ -20177,9 +21138,9 @@
                 <a:cs typeface="Calibri"/>
                 <a:sym typeface="Calibri"/>
               </a:rPr>
-              <a:t>So far in 2024 layoffs are 3-times less than in 2023</a:t>
-            </a:r>
-            <a:endParaRPr sz="1300">
+              <a:t> </a:t>
+            </a:r>
+            <a:endParaRPr sz="900">
               <a:solidFill>
                 <a:schemeClr val="dk1"/>
               </a:solidFill>
@@ -20193,7 +21154,7 @@
       </p:sp>
       <p:pic>
         <p:nvPicPr>
-          <p:cNvPr id="238" name="Google Shape;238;p33"/>
+          <p:cNvPr id="254" name="Google Shape;254;p34"/>
           <p:cNvPicPr preferRelativeResize="0"/>
           <p:nvPr/>
         </p:nvPicPr>
@@ -20212,8 +21173,8 @@
         </p:blipFill>
         <p:spPr>
           <a:xfrm>
-            <a:off x="133875" y="932350"/>
-            <a:ext cx="4336776" cy="1629918"/>
+            <a:off x="5184726" y="76200"/>
+            <a:ext cx="3904400" cy="2415675"/>
           </a:xfrm>
           <a:prstGeom prst="rect">
             <a:avLst/>
@@ -20232,7 +21193,7 @@
       </p:pic>
       <p:pic>
         <p:nvPicPr>
-          <p:cNvPr id="239" name="Google Shape;239;p33"/>
+          <p:cNvPr id="255" name="Google Shape;255;p34"/>
           <p:cNvPicPr preferRelativeResize="0"/>
           <p:nvPr/>
         </p:nvPicPr>
@@ -20251,8 +21212,47 @@
         </p:blipFill>
         <p:spPr>
           <a:xfrm>
-            <a:off x="5248500" y="34300"/>
-            <a:ext cx="3849201" cy="5026949"/>
+            <a:off x="5185499" y="2584601"/>
+            <a:ext cx="3898026" cy="2415675"/>
+          </a:xfrm>
+          <a:prstGeom prst="rect">
+            <a:avLst/>
+          </a:prstGeom>
+          <a:noFill/>
+          <a:ln w="9525" cap="flat" cmpd="sng">
+            <a:solidFill>
+              <a:srgbClr val="FF0000"/>
+            </a:solidFill>
+            <a:prstDash val="solid"/>
+            <a:round/>
+            <a:headEnd type="none" w="sm" len="sm"/>
+            <a:tailEnd type="none" w="sm" len="sm"/>
+          </a:ln>
+        </p:spPr>
+      </p:pic>
+      <p:pic>
+        <p:nvPicPr>
+          <p:cNvPr id="256" name="Google Shape;256;p34"/>
+          <p:cNvPicPr preferRelativeResize="0"/>
+          <p:nvPr/>
+        </p:nvPicPr>
+        <p:blipFill>
+          <a:blip r:embed="rId6" cstate="email">
+            <a:alphaModFix/>
+            <a:extLst>
+              <a:ext uri="{28A0092B-C50C-407E-A947-70E740481C1C}">
+                <a14:useLocalDpi xmlns:a14="http://schemas.microsoft.com/office/drawing/2010/main"/>
+              </a:ext>
+            </a:extLst>
+          </a:blip>
+          <a:stretch>
+            <a:fillRect/>
+          </a:stretch>
+        </p:blipFill>
+        <p:spPr>
+          <a:xfrm>
+            <a:off x="112225" y="1919628"/>
+            <a:ext cx="4975201" cy="3080648"/>
           </a:xfrm>
           <a:prstGeom prst="rect">
             <a:avLst/>
@@ -20277,12 +21277,12 @@
 </p:sld>
 </file>
 
-<file path=ppt/slides/slide22.xml><?xml version="1.0" encoding="utf-8"?>
+<file path=ppt/slides/slide23.xml><?xml version="1.0" encoding="utf-8"?>
 <p:sld xmlns:a="http://schemas.openxmlformats.org/drawingml/2006/main" xmlns:r="http://schemas.openxmlformats.org/officeDocument/2006/relationships" xmlns:p="http://schemas.openxmlformats.org/presentationml/2006/main">
   <p:cSld>
     <p:spTree>
       <p:nvGrpSpPr>
-        <p:cNvPr id="1" name="Shape 243"/>
+        <p:cNvPr id="1" name="Shape 260"/>
         <p:cNvGrpSpPr/>
         <p:nvPr/>
       </p:nvGrpSpPr>
@@ -20296,7 +21296,268 @@
       </p:grpSpPr>
       <p:sp>
         <p:nvSpPr>
-          <p:cNvPr id="244" name="Google Shape;244;p34"/>
+          <p:cNvPr id="261" name="Google Shape;261;p35"/>
+          <p:cNvSpPr txBox="1"/>
+          <p:nvPr/>
+        </p:nvSpPr>
+        <p:spPr>
+          <a:xfrm>
+            <a:off x="72300" y="76200"/>
+            <a:ext cx="4131300" cy="326400"/>
+          </a:xfrm>
+          <a:prstGeom prst="rect">
+            <a:avLst/>
+          </a:prstGeom>
+          <a:noFill/>
+          <a:ln>
+            <a:noFill/>
+          </a:ln>
+        </p:spPr>
+        <p:txBody>
+          <a:bodyPr spcFirstLastPara="1" wrap="square" lIns="9125" tIns="9125" rIns="9125" bIns="9125" anchor="t" anchorCtr="0">
+            <a:spAutoFit/>
+          </a:bodyPr>
+          <a:lstStyle/>
+          <a:p>
+            <a:pPr marL="0" lvl="0" indent="0" algn="l" rtl="0">
+              <a:spcBef>
+                <a:spcPts val="0"/>
+              </a:spcBef>
+              <a:spcAft>
+                <a:spcPts val="0"/>
+              </a:spcAft>
+              <a:buNone/>
+            </a:pPr>
+            <a:r>
+              <a:rPr lang="en" sz="2000" b="1">
+                <a:solidFill>
+                  <a:schemeClr val="dk1"/>
+                </a:solidFill>
+                <a:latin typeface="Calibri"/>
+                <a:ea typeface="Calibri"/>
+                <a:cs typeface="Calibri"/>
+                <a:sym typeface="Calibri"/>
+              </a:rPr>
+              <a:t>Layoffs are not too big</a:t>
+            </a:r>
+            <a:endParaRPr sz="2000" b="1">
+              <a:latin typeface="Calibri"/>
+              <a:ea typeface="Calibri"/>
+              <a:cs typeface="Calibri"/>
+              <a:sym typeface="Calibri"/>
+            </a:endParaRPr>
+          </a:p>
+        </p:txBody>
+      </p:sp>
+      <p:sp>
+        <p:nvSpPr>
+          <p:cNvPr id="262" name="Google Shape;262;p35"/>
+          <p:cNvSpPr txBox="1"/>
+          <p:nvPr/>
+        </p:nvSpPr>
+        <p:spPr>
+          <a:xfrm>
+            <a:off x="6291625" y="109963"/>
+            <a:ext cx="2002500" cy="384900"/>
+          </a:xfrm>
+          <a:prstGeom prst="rect">
+            <a:avLst/>
+          </a:prstGeom>
+          <a:noFill/>
+          <a:ln>
+            <a:noFill/>
+          </a:ln>
+        </p:spPr>
+        <p:txBody>
+          <a:bodyPr spcFirstLastPara="1" wrap="square" lIns="91425" tIns="91425" rIns="91425" bIns="91425" anchor="t" anchorCtr="0">
+            <a:spAutoFit/>
+          </a:bodyPr>
+          <a:lstStyle/>
+          <a:p>
+            <a:pPr marL="0" lvl="0" indent="0" algn="l" rtl="0">
+              <a:spcBef>
+                <a:spcPts val="0"/>
+              </a:spcBef>
+              <a:spcAft>
+                <a:spcPts val="0"/>
+              </a:spcAft>
+              <a:buNone/>
+            </a:pPr>
+            <a:r>
+              <a:rPr lang="en" sz="1300">
+                <a:solidFill>
+                  <a:srgbClr val="0F0F0F"/>
+                </a:solidFill>
+                <a:latin typeface="Calibri"/>
+                <a:ea typeface="Calibri"/>
+                <a:cs typeface="Calibri"/>
+                <a:sym typeface="Calibri"/>
+              </a:rPr>
+              <a:t>Layoffs - </a:t>
+            </a:r>
+            <a:r>
+              <a:rPr lang="en" sz="1300" u="sng">
+                <a:solidFill>
+                  <a:schemeClr val="hlink"/>
+                </a:solidFill>
+                <a:latin typeface="Calibri"/>
+                <a:ea typeface="Calibri"/>
+                <a:cs typeface="Calibri"/>
+                <a:sym typeface="Calibri"/>
+                <a:hlinkClick r:id="rId3"/>
+              </a:rPr>
+              <a:t>https://layoffs.fyi</a:t>
+            </a:r>
+            <a:r>
+              <a:rPr lang="en" sz="1300">
+                <a:solidFill>
+                  <a:srgbClr val="0F0F0F"/>
+                </a:solidFill>
+                <a:latin typeface="Calibri"/>
+                <a:ea typeface="Calibri"/>
+                <a:cs typeface="Calibri"/>
+                <a:sym typeface="Calibri"/>
+              </a:rPr>
+              <a:t> </a:t>
+            </a:r>
+            <a:endParaRPr sz="1300">
+              <a:solidFill>
+                <a:srgbClr val="0F0F0F"/>
+              </a:solidFill>
+              <a:latin typeface="Calibri"/>
+              <a:ea typeface="Calibri"/>
+              <a:cs typeface="Calibri"/>
+              <a:sym typeface="Calibri"/>
+            </a:endParaRPr>
+          </a:p>
+        </p:txBody>
+      </p:sp>
+      <p:sp>
+        <p:nvSpPr>
+          <p:cNvPr id="263" name="Google Shape;263;p35"/>
+          <p:cNvSpPr txBox="1"/>
+          <p:nvPr/>
+        </p:nvSpPr>
+        <p:spPr>
+          <a:xfrm>
+            <a:off x="2452313" y="4109075"/>
+            <a:ext cx="3716100" cy="218400"/>
+          </a:xfrm>
+          <a:prstGeom prst="rect">
+            <a:avLst/>
+          </a:prstGeom>
+          <a:solidFill>
+            <a:srgbClr val="FFF2CC"/>
+          </a:solidFill>
+          <a:ln>
+            <a:noFill/>
+          </a:ln>
+        </p:spPr>
+        <p:txBody>
+          <a:bodyPr spcFirstLastPara="1" wrap="square" lIns="9125" tIns="9125" rIns="9125" bIns="9125" anchor="t" anchorCtr="0">
+            <a:spAutoFit/>
+          </a:bodyPr>
+          <a:lstStyle/>
+          <a:p>
+            <a:pPr marL="0" lvl="0" indent="0" algn="ctr" rtl="0">
+              <a:spcBef>
+                <a:spcPts val="0"/>
+              </a:spcBef>
+              <a:spcAft>
+                <a:spcPts val="0"/>
+              </a:spcAft>
+              <a:buClr>
+                <a:schemeClr val="dk1"/>
+              </a:buClr>
+              <a:buSzPts val="1100"/>
+              <a:buFont typeface="Arial"/>
+              <a:buNone/>
+            </a:pPr>
+            <a:r>
+              <a:rPr lang="en" sz="1300">
+                <a:solidFill>
+                  <a:schemeClr val="dk1"/>
+                </a:solidFill>
+                <a:latin typeface="Calibri"/>
+                <a:ea typeface="Calibri"/>
+                <a:cs typeface="Calibri"/>
+                <a:sym typeface="Calibri"/>
+              </a:rPr>
+              <a:t>So far in 2024 layoffs are 3-times less than in 2023</a:t>
+            </a:r>
+            <a:endParaRPr sz="1300">
+              <a:solidFill>
+                <a:schemeClr val="dk1"/>
+              </a:solidFill>
+              <a:latin typeface="Calibri"/>
+              <a:ea typeface="Calibri"/>
+              <a:cs typeface="Calibri"/>
+              <a:sym typeface="Calibri"/>
+            </a:endParaRPr>
+          </a:p>
+        </p:txBody>
+      </p:sp>
+      <p:pic>
+        <p:nvPicPr>
+          <p:cNvPr id="264" name="Google Shape;264;p35"/>
+          <p:cNvPicPr preferRelativeResize="0"/>
+          <p:nvPr/>
+        </p:nvPicPr>
+        <p:blipFill>
+          <a:blip r:embed="rId4" cstate="email">
+            <a:alphaModFix/>
+            <a:extLst>
+              <a:ext uri="{28A0092B-C50C-407E-A947-70E740481C1C}">
+                <a14:useLocalDpi xmlns:a14="http://schemas.microsoft.com/office/drawing/2010/main"/>
+              </a:ext>
+            </a:extLst>
+          </a:blip>
+          <a:stretch>
+            <a:fillRect/>
+          </a:stretch>
+        </p:blipFill>
+        <p:spPr>
+          <a:xfrm>
+            <a:off x="639325" y="814647"/>
+            <a:ext cx="7124034" cy="3008812"/>
+          </a:xfrm>
+          <a:prstGeom prst="rect">
+            <a:avLst/>
+          </a:prstGeom>
+          <a:noFill/>
+          <a:ln>
+            <a:noFill/>
+          </a:ln>
+        </p:spPr>
+      </p:pic>
+    </p:spTree>
+  </p:cSld>
+  <p:clrMapOvr>
+    <a:masterClrMapping/>
+  </p:clrMapOvr>
+</p:sld>
+</file>
+
+<file path=ppt/slides/slide24.xml><?xml version="1.0" encoding="utf-8"?>
+<p:sld xmlns:a="http://schemas.openxmlformats.org/drawingml/2006/main" xmlns:r="http://schemas.openxmlformats.org/officeDocument/2006/relationships" xmlns:p="http://schemas.openxmlformats.org/presentationml/2006/main">
+  <p:cSld>
+    <p:spTree>
+      <p:nvGrpSpPr>
+        <p:cNvPr id="1" name="Shape 268"/>
+        <p:cNvGrpSpPr/>
+        <p:nvPr/>
+      </p:nvGrpSpPr>
+      <p:grpSpPr>
+        <a:xfrm>
+          <a:off x="0" y="0"/>
+          <a:ext cx="0" cy="0"/>
+          <a:chOff x="0" y="0"/>
+          <a:chExt cx="0" cy="0"/>
+        </a:xfrm>
+      </p:grpSpPr>
+      <p:sp>
+        <p:nvSpPr>
+          <p:cNvPr id="269" name="Google Shape;269;p36"/>
           <p:cNvSpPr txBox="1"/>
           <p:nvPr/>
         </p:nvSpPr>
@@ -21049,8 +22310,8 @@
         </p:nvSpPr>
         <p:spPr>
           <a:xfrm>
-            <a:off x="72300" y="783600"/>
-            <a:ext cx="5931900" cy="3386400"/>
+            <a:off x="72300" y="351641"/>
+            <a:ext cx="5931900" cy="4587000"/>
           </a:xfrm>
           <a:prstGeom prst="rect">
             <a:avLst/>
@@ -21165,6 +22426,23 @@
             </a:endParaRPr>
           </a:p>
           <a:p>
+            <a:pPr marL="0" lvl="0" indent="0" algn="l" rtl="0">
+              <a:spcBef>
+                <a:spcPts val="0"/>
+              </a:spcBef>
+              <a:spcAft>
+                <a:spcPts val="0"/>
+              </a:spcAft>
+              <a:buNone/>
+            </a:pPr>
+            <a:endParaRPr sz="1300">
+              <a:latin typeface="Calibri"/>
+              <a:ea typeface="Calibri"/>
+              <a:cs typeface="Calibri"/>
+              <a:sym typeface="Calibri"/>
+            </a:endParaRPr>
+          </a:p>
+          <a:p>
             <a:pPr marL="228600" lvl="0" indent="-196850" algn="l" rtl="0">
               <a:spcBef>
                 <a:spcPts val="0"/>
@@ -21183,7 +22461,135 @@
                 <a:cs typeface="Calibri"/>
                 <a:sym typeface="Calibri"/>
               </a:rPr>
-              <a:t>Beats Llama2 7b and 13b, and even Mistral-7b</a:t>
+              <a:t>According to Google, it is better than Llama2 7b and 13b, and even Mistral-7b</a:t>
+            </a:r>
+            <a:endParaRPr sz="1300">
+              <a:latin typeface="Calibri"/>
+              <a:ea typeface="Calibri"/>
+              <a:cs typeface="Calibri"/>
+              <a:sym typeface="Calibri"/>
+            </a:endParaRPr>
+          </a:p>
+          <a:p>
+            <a:pPr marL="228600" lvl="0" indent="-196850" algn="l" rtl="0">
+              <a:spcBef>
+                <a:spcPts val="0"/>
+              </a:spcBef>
+              <a:spcAft>
+                <a:spcPts val="0"/>
+              </a:spcAft>
+              <a:buSzPts val="1300"/>
+              <a:buFont typeface="Calibri"/>
+              <a:buChar char="●"/>
+            </a:pPr>
+            <a:r>
+              <a:rPr lang="en" sz="1300">
+                <a:latin typeface="Calibri"/>
+                <a:ea typeface="Calibri"/>
+                <a:cs typeface="Calibri"/>
+                <a:sym typeface="Calibri"/>
+              </a:rPr>
+              <a:t>According to independent tests: </a:t>
+            </a:r>
+            <a:r>
+              <a:rPr lang="en" sz="1300" u="sng">
+                <a:solidFill>
+                  <a:schemeClr val="hlink"/>
+                </a:solidFill>
+                <a:latin typeface="Calibri"/>
+                <a:ea typeface="Calibri"/>
+                <a:cs typeface="Calibri"/>
+                <a:sym typeface="Calibri"/>
+                <a:hlinkClick r:id="rId5"/>
+              </a:rPr>
+              <a:t>https://www.youtube.com/watch?v=1Mn0U6HGLeg</a:t>
+            </a:r>
+            <a:r>
+              <a:rPr lang="en" sz="1300">
+                <a:latin typeface="Calibri"/>
+                <a:ea typeface="Calibri"/>
+                <a:cs typeface="Calibri"/>
+                <a:sym typeface="Calibri"/>
+              </a:rPr>
+              <a:t> - </a:t>
+            </a:r>
+            <a:r>
+              <a:rPr lang="en" sz="1300">
+                <a:solidFill>
+                  <a:schemeClr val="dk1"/>
+                </a:solidFill>
+                <a:latin typeface="Calibri"/>
+                <a:ea typeface="Calibri"/>
+                <a:cs typeface="Calibri"/>
+                <a:sym typeface="Calibri"/>
+              </a:rPr>
+              <a:t>"SHOCKINGLY BAD"</a:t>
+            </a:r>
+            <a:br>
+              <a:rPr lang="en" sz="1300">
+                <a:latin typeface="Calibri"/>
+                <a:ea typeface="Calibri"/>
+                <a:cs typeface="Calibri"/>
+                <a:sym typeface="Calibri"/>
+              </a:rPr>
+            </a:br>
+            <a:r>
+              <a:rPr lang="en" sz="1300" u="sng">
+                <a:solidFill>
+                  <a:schemeClr val="hlink"/>
+                </a:solidFill>
+                <a:latin typeface="Calibri"/>
+                <a:ea typeface="Calibri"/>
+                <a:cs typeface="Calibri"/>
+                <a:sym typeface="Calibri"/>
+                <a:hlinkClick r:id="rId6"/>
+              </a:rPr>
+              <a:t>https://www.youtube.com/watch?v=eC_Qn8t2p2E</a:t>
+            </a:r>
+            <a:r>
+              <a:rPr lang="en" sz="1300">
+                <a:latin typeface="Calibri"/>
+                <a:ea typeface="Calibri"/>
+                <a:cs typeface="Calibri"/>
+                <a:sym typeface="Calibri"/>
+              </a:rPr>
+              <a:t> - not on the level of Mistral-7B</a:t>
+            </a:r>
+            <a:br>
+              <a:rPr lang="en" sz="1300">
+                <a:latin typeface="Calibri"/>
+                <a:ea typeface="Calibri"/>
+                <a:cs typeface="Calibri"/>
+                <a:sym typeface="Calibri"/>
+              </a:rPr>
+            </a:br>
+            <a:endParaRPr sz="1300">
+              <a:latin typeface="Calibri"/>
+              <a:ea typeface="Calibri"/>
+              <a:cs typeface="Calibri"/>
+              <a:sym typeface="Calibri"/>
+            </a:endParaRPr>
+          </a:p>
+          <a:p>
+            <a:pPr marL="228600" lvl="0" indent="-196850" algn="l" rtl="0">
+              <a:spcBef>
+                <a:spcPts val="0"/>
+              </a:spcBef>
+              <a:spcAft>
+                <a:spcPts val="0"/>
+              </a:spcAft>
+              <a:buSzPts val="1300"/>
+              <a:buFont typeface="Calibri"/>
+              <a:buChar char="●"/>
+            </a:pPr>
+            <a:r>
+              <a:rPr lang="en" sz="1300">
+                <a:latin typeface="Calibri"/>
+                <a:ea typeface="Calibri"/>
+                <a:cs typeface="Calibri"/>
+                <a:sym typeface="Calibri"/>
+              </a:rPr>
+              <a:t>The size of download are surprisingly big - 34GB for a 7b model in gguf format ??</a:t>
             </a:r>
             <a:endParaRPr sz="1300">
               <a:latin typeface="Calibri"/>
@@ -21341,7 +22747,7 @@
           <p:nvPr/>
         </p:nvPicPr>
         <p:blipFill rotWithShape="1">
-          <a:blip r:embed="rId5" cstate="email">
+          <a:blip r:embed="rId7" cstate="email">
             <a:alphaModFix/>
             <a:extLst>
               <a:ext uri="{28A0092B-C50C-407E-A947-70E740481C1C}">
@@ -21454,8 +22860,8 @@
         </p:nvSpPr>
         <p:spPr>
           <a:xfrm>
-            <a:off x="72300" y="783600"/>
-            <a:ext cx="3835200" cy="1985700"/>
+            <a:off x="257650" y="412900"/>
+            <a:ext cx="3835200" cy="1785600"/>
           </a:xfrm>
           <a:prstGeom prst="rect">
             <a:avLst/>
@@ -21700,23 +23106,6 @@
               </a:rPr>
               <a:t> </a:t>
             </a:r>
-            <a:endParaRPr sz="1300">
-              <a:latin typeface="Calibri"/>
-              <a:ea typeface="Calibri"/>
-              <a:cs typeface="Calibri"/>
-              <a:sym typeface="Calibri"/>
-            </a:endParaRPr>
-          </a:p>
-          <a:p>
-            <a:pPr marL="0" lvl="0" indent="0" algn="l" rtl="0">
-              <a:spcBef>
-                <a:spcPts val="0"/>
-              </a:spcBef>
-              <a:spcAft>
-                <a:spcPts val="0"/>
-              </a:spcAft>
-              <a:buNone/>
-            </a:pPr>
             <a:endParaRPr sz="1300">
               <a:latin typeface="Calibri"/>
               <a:ea typeface="Calibri"/>
@@ -21759,6 +23148,263 @@
           </a:ln>
         </p:spPr>
       </p:pic>
+      <p:sp>
+        <p:nvSpPr>
+          <p:cNvPr id="89" name="Google Shape;89;p17"/>
+          <p:cNvSpPr txBox="1"/>
+          <p:nvPr/>
+        </p:nvSpPr>
+        <p:spPr>
+          <a:xfrm>
+            <a:off x="257625" y="3293575"/>
+            <a:ext cx="3835200" cy="1185300"/>
+          </a:xfrm>
+          <a:prstGeom prst="rect">
+            <a:avLst/>
+          </a:prstGeom>
+          <a:solidFill>
+            <a:srgbClr val="FFF2CC"/>
+          </a:solidFill>
+          <a:ln w="9525" cap="flat" cmpd="sng">
+            <a:solidFill>
+              <a:srgbClr val="FF0000"/>
+            </a:solidFill>
+            <a:prstDash val="solid"/>
+            <a:round/>
+            <a:headEnd type="none" w="sm" len="sm"/>
+            <a:tailEnd type="none" w="sm" len="sm"/>
+          </a:ln>
+        </p:spPr>
+        <p:txBody>
+          <a:bodyPr spcFirstLastPara="1" wrap="square" lIns="91425" tIns="91425" rIns="91425" bIns="91425" anchor="t" anchorCtr="0">
+            <a:spAutoFit/>
+          </a:bodyPr>
+          <a:lstStyle/>
+          <a:p>
+            <a:pPr marL="0" lvl="0" indent="0" algn="l" rtl="0">
+              <a:spcBef>
+                <a:spcPts val="0"/>
+              </a:spcBef>
+              <a:spcAft>
+                <a:spcPts val="0"/>
+              </a:spcAft>
+              <a:buNone/>
+            </a:pPr>
+            <a:r>
+              <a:rPr lang="en" sz="1300" u="sng">
+                <a:solidFill>
+                  <a:schemeClr val="hlink"/>
+                </a:solidFill>
+                <a:latin typeface="Calibri"/>
+                <a:ea typeface="Calibri"/>
+                <a:cs typeface="Calibri"/>
+                <a:sym typeface="Calibri"/>
+                <a:hlinkClick r:id="rId7"/>
+              </a:rPr>
+              <a:t>https://stability.ai/news/stable-diffusion-3</a:t>
+            </a:r>
+            <a:endParaRPr sz="1300">
+              <a:solidFill>
+                <a:schemeClr val="dk1"/>
+              </a:solidFill>
+              <a:latin typeface="Calibri"/>
+              <a:ea typeface="Calibri"/>
+              <a:cs typeface="Calibri"/>
+              <a:sym typeface="Calibri"/>
+            </a:endParaRPr>
+          </a:p>
+          <a:p>
+            <a:pPr marL="0" lvl="0" indent="0" algn="l" rtl="0">
+              <a:spcBef>
+                <a:spcPts val="0"/>
+              </a:spcBef>
+              <a:spcAft>
+                <a:spcPts val="0"/>
+              </a:spcAft>
+              <a:buNone/>
+            </a:pPr>
+            <a:r>
+              <a:rPr lang="en" sz="1300">
+                <a:solidFill>
+                  <a:schemeClr val="dk1"/>
+                </a:solidFill>
+                <a:latin typeface="Calibri"/>
+                <a:ea typeface="Calibri"/>
+                <a:cs typeface="Calibri"/>
+                <a:sym typeface="Calibri"/>
+              </a:rPr>
+              <a:t>Stable Diffusion 3 is in early preview stage.</a:t>
+            </a:r>
+            <a:endParaRPr sz="1300">
+              <a:solidFill>
+                <a:schemeClr val="dk1"/>
+              </a:solidFill>
+              <a:latin typeface="Calibri"/>
+              <a:ea typeface="Calibri"/>
+              <a:cs typeface="Calibri"/>
+              <a:sym typeface="Calibri"/>
+            </a:endParaRPr>
+          </a:p>
+          <a:p>
+            <a:pPr marL="0" lvl="0" indent="0" algn="l" rtl="0">
+              <a:spcBef>
+                <a:spcPts val="0"/>
+              </a:spcBef>
+              <a:spcAft>
+                <a:spcPts val="0"/>
+              </a:spcAft>
+              <a:buNone/>
+            </a:pPr>
+            <a:r>
+              <a:rPr lang="en" sz="1300">
+                <a:solidFill>
+                  <a:schemeClr val="dk1"/>
+                </a:solidFill>
+                <a:latin typeface="Calibri"/>
+                <a:ea typeface="Calibri"/>
+                <a:cs typeface="Calibri"/>
+                <a:sym typeface="Calibri"/>
+              </a:rPr>
+              <a:t>Up to 8 Bln parameters!</a:t>
+            </a:r>
+            <a:endParaRPr sz="1300">
+              <a:solidFill>
+                <a:schemeClr val="dk1"/>
+              </a:solidFill>
+              <a:latin typeface="Calibri"/>
+              <a:ea typeface="Calibri"/>
+              <a:cs typeface="Calibri"/>
+              <a:sym typeface="Calibri"/>
+            </a:endParaRPr>
+          </a:p>
+          <a:p>
+            <a:pPr marL="0" lvl="0" indent="0" algn="l" rtl="0">
+              <a:spcBef>
+                <a:spcPts val="0"/>
+              </a:spcBef>
+              <a:spcAft>
+                <a:spcPts val="0"/>
+              </a:spcAft>
+              <a:buNone/>
+            </a:pPr>
+            <a:r>
+              <a:rPr lang="en" sz="1300">
+                <a:solidFill>
+                  <a:schemeClr val="dk1"/>
+                </a:solidFill>
+                <a:latin typeface="Calibri"/>
+                <a:ea typeface="Calibri"/>
+                <a:cs typeface="Calibri"/>
+                <a:sym typeface="Calibri"/>
+              </a:rPr>
+              <a:t>It may use some concepts from </a:t>
+            </a:r>
+            <a:r>
+              <a:rPr lang="en" sz="1300">
+                <a:latin typeface="Calibri"/>
+                <a:ea typeface="Calibri"/>
+                <a:cs typeface="Calibri"/>
+                <a:sym typeface="Calibri"/>
+              </a:rPr>
+              <a:t>Stability.AI Cascade model.</a:t>
+            </a:r>
+            <a:endParaRPr sz="1300">
+              <a:latin typeface="Calibri"/>
+              <a:ea typeface="Calibri"/>
+              <a:cs typeface="Calibri"/>
+              <a:sym typeface="Calibri"/>
+            </a:endParaRPr>
+          </a:p>
+        </p:txBody>
+      </p:sp>
+      <p:sp>
+        <p:nvSpPr>
+          <p:cNvPr id="90" name="Google Shape;90;p17"/>
+          <p:cNvSpPr txBox="1"/>
+          <p:nvPr/>
+        </p:nvSpPr>
+        <p:spPr>
+          <a:xfrm>
+            <a:off x="72300" y="2888375"/>
+            <a:ext cx="4499700" cy="326400"/>
+          </a:xfrm>
+          <a:prstGeom prst="rect">
+            <a:avLst/>
+          </a:prstGeom>
+          <a:noFill/>
+          <a:ln>
+            <a:noFill/>
+          </a:ln>
+        </p:spPr>
+        <p:txBody>
+          <a:bodyPr spcFirstLastPara="1" wrap="square" lIns="9125" tIns="9125" rIns="9125" bIns="9125" anchor="t" anchorCtr="0">
+            <a:spAutoFit/>
+          </a:bodyPr>
+          <a:lstStyle/>
+          <a:p>
+            <a:pPr marL="0" lvl="0" indent="0" algn="l" rtl="0">
+              <a:spcBef>
+                <a:spcPts val="0"/>
+              </a:spcBef>
+              <a:spcAft>
+                <a:spcPts val="0"/>
+              </a:spcAft>
+              <a:buNone/>
+            </a:pPr>
+            <a:r>
+              <a:rPr lang="en" sz="2000" b="1">
+                <a:solidFill>
+                  <a:schemeClr val="dk1"/>
+                </a:solidFill>
+                <a:latin typeface="Calibri"/>
+                <a:ea typeface="Calibri"/>
+                <a:cs typeface="Calibri"/>
+                <a:sym typeface="Calibri"/>
+              </a:rPr>
+              <a:t>Stable Diffusion 3</a:t>
+            </a:r>
+            <a:endParaRPr sz="2000" b="1">
+              <a:latin typeface="Calibri"/>
+              <a:ea typeface="Calibri"/>
+              <a:cs typeface="Calibri"/>
+              <a:sym typeface="Calibri"/>
+            </a:endParaRPr>
+          </a:p>
+        </p:txBody>
+      </p:sp>
+      <p:pic>
+        <p:nvPicPr>
+          <p:cNvPr id="91" name="Google Shape;91;p17"/>
+          <p:cNvPicPr preferRelativeResize="0"/>
+          <p:nvPr/>
+        </p:nvPicPr>
+        <p:blipFill>
+          <a:blip r:embed="rId8" cstate="email">
+            <a:alphaModFix/>
+            <a:extLst>
+              <a:ext uri="{28A0092B-C50C-407E-A947-70E740481C1C}">
+                <a14:useLocalDpi xmlns:a14="http://schemas.microsoft.com/office/drawing/2010/main"/>
+              </a:ext>
+            </a:extLst>
+          </a:blip>
+          <a:stretch>
+            <a:fillRect/>
+          </a:stretch>
+        </p:blipFill>
+        <p:spPr>
+          <a:xfrm>
+            <a:off x="4572000" y="3462025"/>
+            <a:ext cx="4499702" cy="848380"/>
+          </a:xfrm>
+          <a:prstGeom prst="rect">
+            <a:avLst/>
+          </a:prstGeom>
+          <a:noFill/>
+          <a:ln>
+            <a:noFill/>
+          </a:ln>
+        </p:spPr>
+      </p:pic>
     </p:spTree>
   </p:cSld>
   <p:clrMapOvr>
@@ -21772,7 +23418,7 @@
   <p:cSld>
     <p:spTree>
       <p:nvGrpSpPr>
-        <p:cNvPr id="1" name="Shape 92"/>
+        <p:cNvPr id="1" name="Shape 95"/>
         <p:cNvGrpSpPr/>
         <p:nvPr/>
       </p:nvGrpSpPr>
@@ -21786,7 +23432,7 @@
       </p:grpSpPr>
       <p:sp>
         <p:nvSpPr>
-          <p:cNvPr id="93" name="Google Shape;93;p18"/>
+          <p:cNvPr id="96" name="Google Shape;96;p18"/>
           <p:cNvSpPr txBox="1"/>
           <p:nvPr/>
         </p:nvSpPr>
@@ -21841,7 +23487,7 @@
       </p:sp>
       <p:sp>
         <p:nvSpPr>
-          <p:cNvPr id="94" name="Google Shape;94;p18"/>
+          <p:cNvPr id="97" name="Google Shape;97;p18"/>
           <p:cNvSpPr txBox="1"/>
           <p:nvPr/>
         </p:nvSpPr>
@@ -21952,7 +23598,7 @@
       </p:sp>
       <p:pic>
         <p:nvPicPr>
-          <p:cNvPr id="95" name="Google Shape;95;p18"/>
+          <p:cNvPr id="98" name="Google Shape;98;p18"/>
           <p:cNvPicPr preferRelativeResize="0"/>
           <p:nvPr/>
         </p:nvPicPr>
@@ -21991,7 +23637,7 @@
       </p:pic>
       <p:sp>
         <p:nvSpPr>
-          <p:cNvPr id="96" name="Google Shape;96;p18"/>
+          <p:cNvPr id="99" name="Google Shape;99;p18"/>
           <p:cNvSpPr txBox="1"/>
           <p:nvPr/>
         </p:nvSpPr>
@@ -22264,7 +23910,7 @@
       </p:sp>
       <p:pic>
         <p:nvPicPr>
-          <p:cNvPr id="97" name="Google Shape;97;p18"/>
+          <p:cNvPr id="100" name="Google Shape;100;p18"/>
           <p:cNvPicPr preferRelativeResize="0"/>
           <p:nvPr/>
         </p:nvPicPr>
@@ -22303,7 +23949,7 @@
       </p:pic>
       <p:sp>
         <p:nvSpPr>
-          <p:cNvPr id="98" name="Google Shape;98;p18"/>
+          <p:cNvPr id="101" name="Google Shape;101;p18"/>
           <p:cNvSpPr txBox="1"/>
           <p:nvPr/>
         </p:nvSpPr>
@@ -22499,7 +24145,7 @@
       </p:sp>
       <p:sp>
         <p:nvSpPr>
-          <p:cNvPr id="99" name="Google Shape;99;p18"/>
+          <p:cNvPr id="102" name="Google Shape;102;p18"/>
           <p:cNvSpPr txBox="1"/>
           <p:nvPr/>
         </p:nvSpPr>
@@ -22622,7 +24268,7 @@
       </p:sp>
       <p:pic>
         <p:nvPicPr>
-          <p:cNvPr id="100" name="Google Shape;100;p18"/>
+          <p:cNvPr id="103" name="Google Shape;103;p18"/>
           <p:cNvPicPr preferRelativeResize="0"/>
           <p:nvPr/>
         </p:nvPicPr>
@@ -22666,7 +24312,7 @@
   <p:cSld>
     <p:spTree>
       <p:nvGrpSpPr>
-        <p:cNvPr id="1" name="Shape 104"/>
+        <p:cNvPr id="1" name="Shape 107"/>
         <p:cNvGrpSpPr/>
         <p:nvPr/>
       </p:nvGrpSpPr>
@@ -22680,7 +24326,7 @@
       </p:grpSpPr>
       <p:sp>
         <p:nvSpPr>
-          <p:cNvPr id="105" name="Google Shape;105;p19"/>
+          <p:cNvPr id="108" name="Google Shape;108;p19"/>
           <p:cNvSpPr txBox="1"/>
           <p:nvPr/>
         </p:nvSpPr>
@@ -22852,7 +24498,7 @@
       </p:sp>
       <p:pic>
         <p:nvPicPr>
-          <p:cNvPr id="106" name="Google Shape;106;p19"/>
+          <p:cNvPr id="109" name="Google Shape;109;p19"/>
           <p:cNvPicPr preferRelativeResize="0"/>
           <p:nvPr/>
         </p:nvPicPr>
@@ -22891,7 +24537,7 @@
       </p:pic>
       <p:sp>
         <p:nvSpPr>
-          <p:cNvPr id="107" name="Google Shape;107;p19"/>
+          <p:cNvPr id="110" name="Google Shape;110;p19"/>
           <p:cNvSpPr txBox="1"/>
           <p:nvPr/>
         </p:nvSpPr>
@@ -22946,7 +24592,7 @@
       </p:sp>
       <p:sp>
         <p:nvSpPr>
-          <p:cNvPr id="108" name="Google Shape;108;p19"/>
+          <p:cNvPr id="111" name="Google Shape;111;p19"/>
           <p:cNvSpPr txBox="1"/>
           <p:nvPr/>
         </p:nvSpPr>
@@ -23138,7 +24784,7 @@
       </p:sp>
       <p:sp>
         <p:nvSpPr>
-          <p:cNvPr id="109" name="Google Shape;109;p19"/>
+          <p:cNvPr id="112" name="Google Shape;112;p19"/>
           <p:cNvSpPr txBox="1"/>
           <p:nvPr/>
         </p:nvSpPr>
@@ -23272,7 +24918,7 @@
       </p:sp>
       <p:sp>
         <p:nvSpPr>
-          <p:cNvPr id="110" name="Google Shape;110;p19"/>
+          <p:cNvPr id="113" name="Google Shape;113;p19"/>
           <p:cNvSpPr txBox="1"/>
           <p:nvPr/>
         </p:nvSpPr>
@@ -23408,7 +25054,7 @@
   <p:cSld>
     <p:spTree>
       <p:nvGrpSpPr>
-        <p:cNvPr id="1" name="Shape 114"/>
+        <p:cNvPr id="1" name="Shape 117"/>
         <p:cNvGrpSpPr/>
         <p:nvPr/>
       </p:nvGrpSpPr>
@@ -23422,7 +25068,7 @@
       </p:grpSpPr>
       <p:sp>
         <p:nvSpPr>
-          <p:cNvPr id="115" name="Google Shape;115;p20"/>
+          <p:cNvPr id="118" name="Google Shape;118;p20"/>
           <p:cNvSpPr txBox="1"/>
           <p:nvPr/>
         </p:nvSpPr>
@@ -23477,7 +25123,7 @@
       </p:sp>
       <p:sp>
         <p:nvSpPr>
-          <p:cNvPr id="116" name="Google Shape;116;p20"/>
+          <p:cNvPr id="119" name="Google Shape;119;p20"/>
           <p:cNvSpPr txBox="1"/>
           <p:nvPr/>
         </p:nvSpPr>
@@ -23638,7 +25284,7 @@
       </p:sp>
       <p:pic>
         <p:nvPicPr>
-          <p:cNvPr id="117" name="Google Shape;117;p20"/>
+          <p:cNvPr id="120" name="Google Shape;120;p20"/>
           <p:cNvPicPr preferRelativeResize="0"/>
           <p:nvPr/>
         </p:nvPicPr>
@@ -23671,7 +25317,7 @@
       </p:pic>
       <p:pic>
         <p:nvPicPr>
-          <p:cNvPr id="118" name="Google Shape;118;p20"/>
+          <p:cNvPr id="121" name="Google Shape;121;p20"/>
           <p:cNvPicPr preferRelativeResize="0"/>
           <p:nvPr/>
         </p:nvPicPr>
@@ -23704,7 +25350,7 @@
       </p:pic>
       <p:pic>
         <p:nvPicPr>
-          <p:cNvPr id="119" name="Google Shape;119;p20"/>
+          <p:cNvPr id="122" name="Google Shape;122;p20"/>
           <p:cNvPicPr preferRelativeResize="0"/>
           <p:nvPr/>
         </p:nvPicPr>
@@ -23737,7 +25383,7 @@
       </p:pic>
       <p:sp>
         <p:nvSpPr>
-          <p:cNvPr id="120" name="Google Shape;120;p20"/>
+          <p:cNvPr id="123" name="Google Shape;123;p20"/>
           <p:cNvSpPr txBox="1"/>
           <p:nvPr/>
         </p:nvSpPr>
@@ -23797,7 +25443,7 @@
       </p:sp>
       <p:sp>
         <p:nvSpPr>
-          <p:cNvPr id="121" name="Google Shape;121;p20"/>
+          <p:cNvPr id="124" name="Google Shape;124;p20"/>
           <p:cNvSpPr txBox="1"/>
           <p:nvPr/>
         </p:nvSpPr>
@@ -23946,7 +25592,7 @@
   <p:cSld>
     <p:spTree>
       <p:nvGrpSpPr>
-        <p:cNvPr id="1" name="Shape 125"/>
+        <p:cNvPr id="1" name="Shape 128"/>
         <p:cNvGrpSpPr/>
         <p:nvPr/>
       </p:nvGrpSpPr>
@@ -23960,7 +25606,7 @@
       </p:grpSpPr>
       <p:sp>
         <p:nvSpPr>
-          <p:cNvPr id="126" name="Google Shape;126;p21"/>
+          <p:cNvPr id="129" name="Google Shape;129;p21"/>
           <p:cNvSpPr txBox="1"/>
           <p:nvPr/>
         </p:nvSpPr>
@@ -24015,7 +25661,7 @@
       </p:sp>
       <p:sp>
         <p:nvSpPr>
-          <p:cNvPr id="127" name="Google Shape;127;p21"/>
+          <p:cNvPr id="130" name="Google Shape;130;p21"/>
           <p:cNvSpPr txBox="1"/>
           <p:nvPr/>
         </p:nvSpPr>
@@ -24324,7 +25970,7 @@
       </p:sp>
       <p:pic>
         <p:nvPicPr>
-          <p:cNvPr id="128" name="Google Shape;128;p21"/>
+          <p:cNvPr id="131" name="Google Shape;131;p21"/>
           <p:cNvPicPr preferRelativeResize="0"/>
           <p:nvPr/>
         </p:nvPicPr>
@@ -24357,7 +26003,7 @@
       </p:pic>
       <p:sp>
         <p:nvSpPr>
-          <p:cNvPr id="129" name="Google Shape;129;p21"/>
+          <p:cNvPr id="132" name="Google Shape;132;p21"/>
           <p:cNvSpPr txBox="1"/>
           <p:nvPr/>
         </p:nvSpPr>

--- a/2024/2024-02-23-AI-Updates.pptx
+++ b/2024/2024-02-23-AI-Updates.pptx
@@ -1050,7 +1050,7 @@
   <p:cSld>
     <p:spTree>
       <p:nvGrpSpPr>
-        <p:cNvPr id="1" name="Shape 156"/>
+        <p:cNvPr id="1" name="Shape 157"/>
         <p:cNvGrpSpPr/>
         <p:nvPr/>
       </p:nvGrpSpPr>
@@ -1064,7 +1064,7 @@
       </p:grpSpPr>
       <p:sp>
         <p:nvSpPr>
-          <p:cNvPr id="157" name="Google Shape;157;g2bacc5fb6a8_0_14:notes"/>
+          <p:cNvPr id="158" name="Google Shape;158;g2bacc5fb6a8_0_14:notes"/>
           <p:cNvSpPr>
             <a:spLocks noGrp="1" noRot="1" noChangeAspect="1"/>
           </p:cNvSpPr>
@@ -1105,7 +1105,7 @@
       </p:sp>
       <p:sp>
         <p:nvSpPr>
-          <p:cNvPr id="158" name="Google Shape;158;g2bacc5fb6a8_0_14:notes"/>
+          <p:cNvPr id="159" name="Google Shape;159;g2bacc5fb6a8_0_14:notes"/>
           <p:cNvSpPr txBox="1">
             <a:spLocks noGrp="1"/>
           </p:cNvSpPr>
@@ -1154,7 +1154,7 @@
   <p:cSld>
     <p:spTree>
       <p:nvGrpSpPr>
-        <p:cNvPr id="1" name="Shape 164"/>
+        <p:cNvPr id="1" name="Shape 165"/>
         <p:cNvGrpSpPr/>
         <p:nvPr/>
       </p:nvGrpSpPr>
@@ -1168,7 +1168,7 @@
       </p:grpSpPr>
       <p:sp>
         <p:nvSpPr>
-          <p:cNvPr id="165" name="Google Shape;165;g2ba352aa90c_0_0:notes"/>
+          <p:cNvPr id="166" name="Google Shape;166;g2ba352aa90c_0_0:notes"/>
           <p:cNvSpPr>
             <a:spLocks noGrp="1" noRot="1" noChangeAspect="1"/>
           </p:cNvSpPr>
@@ -1209,7 +1209,7 @@
       </p:sp>
       <p:sp>
         <p:nvSpPr>
-          <p:cNvPr id="166" name="Google Shape;166;g2ba352aa90c_0_0:notes"/>
+          <p:cNvPr id="167" name="Google Shape;167;g2ba352aa90c_0_0:notes"/>
           <p:cNvSpPr txBox="1">
             <a:spLocks noGrp="1"/>
           </p:cNvSpPr>
@@ -1258,7 +1258,7 @@
   <p:cSld>
     <p:spTree>
       <p:nvGrpSpPr>
-        <p:cNvPr id="1" name="Shape 174"/>
+        <p:cNvPr id="1" name="Shape 175"/>
         <p:cNvGrpSpPr/>
         <p:nvPr/>
       </p:nvGrpSpPr>
@@ -1272,7 +1272,7 @@
       </p:grpSpPr>
       <p:sp>
         <p:nvSpPr>
-          <p:cNvPr id="175" name="Google Shape;175;g2bb0aac8bdd_0_0:notes"/>
+          <p:cNvPr id="176" name="Google Shape;176;g2bb0aac8bdd_0_0:notes"/>
           <p:cNvSpPr>
             <a:spLocks noGrp="1" noRot="1" noChangeAspect="1"/>
           </p:cNvSpPr>
@@ -1313,7 +1313,7 @@
       </p:sp>
       <p:sp>
         <p:nvSpPr>
-          <p:cNvPr id="176" name="Google Shape;176;g2bb0aac8bdd_0_0:notes"/>
+          <p:cNvPr id="177" name="Google Shape;177;g2bb0aac8bdd_0_0:notes"/>
           <p:cNvSpPr txBox="1">
             <a:spLocks noGrp="1"/>
           </p:cNvSpPr>
@@ -1362,7 +1362,7 @@
   <p:cSld>
     <p:spTree>
       <p:nvGrpSpPr>
-        <p:cNvPr id="1" name="Shape 184"/>
+        <p:cNvPr id="1" name="Shape 185"/>
         <p:cNvGrpSpPr/>
         <p:nvPr/>
       </p:nvGrpSpPr>
@@ -1376,7 +1376,7 @@
       </p:grpSpPr>
       <p:sp>
         <p:nvSpPr>
-          <p:cNvPr id="185" name="Google Shape;185;g2bb15e54125_0_0:notes"/>
+          <p:cNvPr id="186" name="Google Shape;186;g2bb15e54125_0_0:notes"/>
           <p:cNvSpPr>
             <a:spLocks noGrp="1" noRot="1" noChangeAspect="1"/>
           </p:cNvSpPr>
@@ -1417,7 +1417,7 @@
       </p:sp>
       <p:sp>
         <p:nvSpPr>
-          <p:cNvPr id="186" name="Google Shape;186;g2bb15e54125_0_0:notes"/>
+          <p:cNvPr id="187" name="Google Shape;187;g2bb15e54125_0_0:notes"/>
           <p:cNvSpPr txBox="1">
             <a:spLocks noGrp="1"/>
           </p:cNvSpPr>
@@ -1466,7 +1466,7 @@
   <p:cSld>
     <p:spTree>
       <p:nvGrpSpPr>
-        <p:cNvPr id="1" name="Shape 191"/>
+        <p:cNvPr id="1" name="Shape 192"/>
         <p:cNvGrpSpPr/>
         <p:nvPr/>
       </p:nvGrpSpPr>
@@ -1480,7 +1480,7 @@
       </p:grpSpPr>
       <p:sp>
         <p:nvSpPr>
-          <p:cNvPr id="192" name="Google Shape;192;g2bb15e54cb0_0_0:notes"/>
+          <p:cNvPr id="193" name="Google Shape;193;g2bb15e54cb0_0_0:notes"/>
           <p:cNvSpPr>
             <a:spLocks noGrp="1" noRot="1" noChangeAspect="1"/>
           </p:cNvSpPr>
@@ -1521,7 +1521,7 @@
       </p:sp>
       <p:sp>
         <p:nvSpPr>
-          <p:cNvPr id="193" name="Google Shape;193;g2bb15e54cb0_0_0:notes"/>
+          <p:cNvPr id="194" name="Google Shape;194;g2bb15e54cb0_0_0:notes"/>
           <p:cNvSpPr txBox="1">
             <a:spLocks noGrp="1"/>
           </p:cNvSpPr>
@@ -1570,7 +1570,7 @@
   <p:cSld>
     <p:spTree>
       <p:nvGrpSpPr>
-        <p:cNvPr id="1" name="Shape 199"/>
+        <p:cNvPr id="1" name="Shape 200"/>
         <p:cNvGrpSpPr/>
         <p:nvPr/>
       </p:nvGrpSpPr>
@@ -1584,7 +1584,7 @@
       </p:grpSpPr>
       <p:sp>
         <p:nvSpPr>
-          <p:cNvPr id="200" name="Google Shape;200;g2bbd68d928c_0_4:notes"/>
+          <p:cNvPr id="201" name="Google Shape;201;g2bbd68d928c_0_4:notes"/>
           <p:cNvSpPr>
             <a:spLocks noGrp="1" noRot="1" noChangeAspect="1"/>
           </p:cNvSpPr>
@@ -1625,7 +1625,7 @@
       </p:sp>
       <p:sp>
         <p:nvSpPr>
-          <p:cNvPr id="201" name="Google Shape;201;g2bbd68d928c_0_4:notes"/>
+          <p:cNvPr id="202" name="Google Shape;202;g2bbd68d928c_0_4:notes"/>
           <p:cNvSpPr txBox="1">
             <a:spLocks noGrp="1"/>
           </p:cNvSpPr>
@@ -1674,7 +1674,7 @@
   <p:cSld>
     <p:spTree>
       <p:nvGrpSpPr>
-        <p:cNvPr id="1" name="Shape 213"/>
+        <p:cNvPr id="1" name="Shape 214"/>
         <p:cNvGrpSpPr/>
         <p:nvPr/>
       </p:nvGrpSpPr>
@@ -1688,7 +1688,7 @@
       </p:grpSpPr>
       <p:sp>
         <p:nvSpPr>
-          <p:cNvPr id="214" name="Google Shape;214;g2bb0d5757ec_0_0:notes"/>
+          <p:cNvPr id="215" name="Google Shape;215;g2bb0d5757ec_0_0:notes"/>
           <p:cNvSpPr>
             <a:spLocks noGrp="1" noRot="1" noChangeAspect="1"/>
           </p:cNvSpPr>
@@ -1729,7 +1729,7 @@
       </p:sp>
       <p:sp>
         <p:nvSpPr>
-          <p:cNvPr id="215" name="Google Shape;215;g2bb0d5757ec_0_0:notes"/>
+          <p:cNvPr id="216" name="Google Shape;216;g2bb0d5757ec_0_0:notes"/>
           <p:cNvSpPr txBox="1">
             <a:spLocks noGrp="1"/>
           </p:cNvSpPr>
@@ -1778,7 +1778,7 @@
   <p:cSld>
     <p:spTree>
       <p:nvGrpSpPr>
-        <p:cNvPr id="1" name="Shape 220"/>
+        <p:cNvPr id="1" name="Shape 221"/>
         <p:cNvGrpSpPr/>
         <p:nvPr/>
       </p:nvGrpSpPr>
@@ -1792,7 +1792,7 @@
       </p:grpSpPr>
       <p:sp>
         <p:nvSpPr>
-          <p:cNvPr id="221" name="Google Shape;221;g2b7eafe0074_1_9:notes"/>
+          <p:cNvPr id="222" name="Google Shape;222;g2b7eafe0074_1_9:notes"/>
           <p:cNvSpPr>
             <a:spLocks noGrp="1" noRot="1" noChangeAspect="1"/>
           </p:cNvSpPr>
@@ -1833,7 +1833,7 @@
       </p:sp>
       <p:sp>
         <p:nvSpPr>
-          <p:cNvPr id="222" name="Google Shape;222;g2b7eafe0074_1_9:notes"/>
+          <p:cNvPr id="223" name="Google Shape;223;g2b7eafe0074_1_9:notes"/>
           <p:cNvSpPr txBox="1">
             <a:spLocks noGrp="1"/>
           </p:cNvSpPr>
@@ -1986,7 +1986,7 @@
   <p:cSld>
     <p:spTree>
       <p:nvGrpSpPr>
-        <p:cNvPr id="1" name="Shape 229"/>
+        <p:cNvPr id="1" name="Shape 230"/>
         <p:cNvGrpSpPr/>
         <p:nvPr/>
       </p:nvGrpSpPr>
@@ -2000,7 +2000,7 @@
       </p:grpSpPr>
       <p:sp>
         <p:nvSpPr>
-          <p:cNvPr id="230" name="Google Shape;230;g2bb63b346ef_0_0:notes"/>
+          <p:cNvPr id="231" name="Google Shape;231;g2bb63b346ef_0_0:notes"/>
           <p:cNvSpPr>
             <a:spLocks noGrp="1" noRot="1" noChangeAspect="1"/>
           </p:cNvSpPr>
@@ -2041,7 +2041,7 @@
       </p:sp>
       <p:sp>
         <p:nvSpPr>
-          <p:cNvPr id="231" name="Google Shape;231;g2bb63b346ef_0_0:notes"/>
+          <p:cNvPr id="232" name="Google Shape;232;g2bb63b346ef_0_0:notes"/>
           <p:cNvSpPr txBox="1">
             <a:spLocks noGrp="1"/>
           </p:cNvSpPr>
@@ -2090,7 +2090,7 @@
   <p:cSld>
     <p:spTree>
       <p:nvGrpSpPr>
-        <p:cNvPr id="1" name="Shape 241"/>
+        <p:cNvPr id="1" name="Shape 242"/>
         <p:cNvGrpSpPr/>
         <p:nvPr/>
       </p:nvGrpSpPr>
@@ -2104,7 +2104,7 @@
       </p:grpSpPr>
       <p:sp>
         <p:nvSpPr>
-          <p:cNvPr id="242" name="Google Shape;242;g2bb63ba8922_0_0:notes"/>
+          <p:cNvPr id="243" name="Google Shape;243;g2bb63ba8922_0_0:notes"/>
           <p:cNvSpPr>
             <a:spLocks noGrp="1" noRot="1" noChangeAspect="1"/>
           </p:cNvSpPr>
@@ -2145,7 +2145,7 @@
       </p:sp>
       <p:sp>
         <p:nvSpPr>
-          <p:cNvPr id="243" name="Google Shape;243;g2bb63ba8922_0_0:notes"/>
+          <p:cNvPr id="244" name="Google Shape;244;g2bb63ba8922_0_0:notes"/>
           <p:cNvSpPr txBox="1">
             <a:spLocks noGrp="1"/>
           </p:cNvSpPr>
@@ -2194,7 +2194,7 @@
   <p:cSld>
     <p:spTree>
       <p:nvGrpSpPr>
-        <p:cNvPr id="1" name="Shape 248"/>
+        <p:cNvPr id="1" name="Shape 249"/>
         <p:cNvGrpSpPr/>
         <p:nvPr/>
       </p:nvGrpSpPr>
@@ -2208,7 +2208,7 @@
       </p:grpSpPr>
       <p:sp>
         <p:nvSpPr>
-          <p:cNvPr id="249" name="Google Shape;249;g2bbdf1cc35a_0_3:notes"/>
+          <p:cNvPr id="250" name="Google Shape;250;g2bbdf1cc35a_0_3:notes"/>
           <p:cNvSpPr>
             <a:spLocks noGrp="1" noRot="1" noChangeAspect="1"/>
           </p:cNvSpPr>
@@ -2249,7 +2249,7 @@
       </p:sp>
       <p:sp>
         <p:nvSpPr>
-          <p:cNvPr id="250" name="Google Shape;250;g2bbdf1cc35a_0_3:notes"/>
+          <p:cNvPr id="251" name="Google Shape;251;g2bbdf1cc35a_0_3:notes"/>
           <p:cNvSpPr txBox="1">
             <a:spLocks noGrp="1"/>
           </p:cNvSpPr>
@@ -2298,7 +2298,7 @@
   <p:cSld>
     <p:spTree>
       <p:nvGrpSpPr>
-        <p:cNvPr id="1" name="Shape 257"/>
+        <p:cNvPr id="1" name="Shape 258"/>
         <p:cNvGrpSpPr/>
         <p:nvPr/>
       </p:nvGrpSpPr>
@@ -2312,7 +2312,7 @@
       </p:grpSpPr>
       <p:sp>
         <p:nvSpPr>
-          <p:cNvPr id="258" name="Google Shape;258;g2b9ba3ebc86_0_3:notes"/>
+          <p:cNvPr id="259" name="Google Shape;259;g2b9ba3ebc86_0_3:notes"/>
           <p:cNvSpPr>
             <a:spLocks noGrp="1" noRot="1" noChangeAspect="1"/>
           </p:cNvSpPr>
@@ -2353,7 +2353,7 @@
       </p:sp>
       <p:sp>
         <p:nvSpPr>
-          <p:cNvPr id="259" name="Google Shape;259;g2b9ba3ebc86_0_3:notes"/>
+          <p:cNvPr id="260" name="Google Shape;260;g2b9ba3ebc86_0_3:notes"/>
           <p:cNvSpPr txBox="1">
             <a:spLocks noGrp="1"/>
           </p:cNvSpPr>
@@ -2402,7 +2402,7 @@
   <p:cSld>
     <p:spTree>
       <p:nvGrpSpPr>
-        <p:cNvPr id="1" name="Shape 265"/>
+        <p:cNvPr id="1" name="Shape 266"/>
         <p:cNvGrpSpPr/>
         <p:nvPr/>
       </p:nvGrpSpPr>
@@ -2416,7 +2416,7 @@
       </p:grpSpPr>
       <p:sp>
         <p:nvSpPr>
-          <p:cNvPr id="266" name="Google Shape;266;g2b7eafe0074_1_29:notes"/>
+          <p:cNvPr id="267" name="Google Shape;267;g2b7eafe0074_1_29:notes"/>
           <p:cNvSpPr>
             <a:spLocks noGrp="1" noRot="1" noChangeAspect="1"/>
           </p:cNvSpPr>
@@ -2457,7 +2457,7 @@
       </p:sp>
       <p:sp>
         <p:nvSpPr>
-          <p:cNvPr id="267" name="Google Shape;267;g2b7eafe0074_1_29:notes"/>
+          <p:cNvPr id="268" name="Google Shape;268;g2b7eafe0074_1_29:notes"/>
           <p:cNvSpPr txBox="1">
             <a:spLocks noGrp="1"/>
           </p:cNvSpPr>
@@ -10554,6 +10554,92 @@
           </a:p>
         </p:txBody>
       </p:sp>
+      <p:sp>
+        <p:nvSpPr>
+          <p:cNvPr id="156" name="Google Shape;156;p23"/>
+          <p:cNvSpPr txBox="1"/>
+          <p:nvPr/>
+        </p:nvSpPr>
+        <p:spPr>
+          <a:xfrm>
+            <a:off x="40350" y="3174150"/>
+            <a:ext cx="4362600" cy="585000"/>
+          </a:xfrm>
+          <a:prstGeom prst="rect">
+            <a:avLst/>
+          </a:prstGeom>
+          <a:solidFill>
+            <a:srgbClr val="FFF2CC"/>
+          </a:solidFill>
+          <a:ln w="9525" cap="flat" cmpd="sng">
+            <a:solidFill>
+              <a:srgbClr val="FF0000"/>
+            </a:solidFill>
+            <a:prstDash val="solid"/>
+            <a:round/>
+            <a:headEnd type="none" w="sm" len="sm"/>
+            <a:tailEnd type="none" w="sm" len="sm"/>
+          </a:ln>
+        </p:spPr>
+        <p:txBody>
+          <a:bodyPr spcFirstLastPara="1" wrap="square" lIns="91425" tIns="91425" rIns="91425" bIns="91425" anchor="t" anchorCtr="0">
+            <a:spAutoFit/>
+          </a:bodyPr>
+          <a:lstStyle/>
+          <a:p>
+            <a:pPr marL="0" lvl="0" indent="0" algn="l" rtl="0">
+              <a:spcBef>
+                <a:spcPts val="0"/>
+              </a:spcBef>
+              <a:spcAft>
+                <a:spcPts val="0"/>
+              </a:spcAft>
+              <a:buNone/>
+            </a:pPr>
+            <a:r>
+              <a:rPr lang="en" sz="1300">
+                <a:latin typeface="Calibri"/>
+                <a:ea typeface="Calibri"/>
+                <a:cs typeface="Calibri"/>
+                <a:sym typeface="Calibri"/>
+              </a:rPr>
+              <a:t>GPT-4 Knowledge Cutoff is now up to December 2023</a:t>
+            </a:r>
+            <a:endParaRPr sz="1300">
+              <a:latin typeface="Calibri"/>
+              <a:ea typeface="Calibri"/>
+              <a:cs typeface="Calibri"/>
+              <a:sym typeface="Calibri"/>
+            </a:endParaRPr>
+          </a:p>
+          <a:p>
+            <a:pPr marL="0" lvl="0" indent="0" algn="l" rtl="0">
+              <a:spcBef>
+                <a:spcPts val="0"/>
+              </a:spcBef>
+              <a:spcAft>
+                <a:spcPts val="0"/>
+              </a:spcAft>
+              <a:buNone/>
+            </a:pPr>
+            <a:r>
+              <a:rPr lang="en" sz="1300">
+                <a:latin typeface="Calibri"/>
+                <a:ea typeface="Calibri"/>
+                <a:cs typeface="Calibri"/>
+                <a:sym typeface="Calibri"/>
+              </a:rPr>
+              <a:t>GPT-3.5 is still up to January 2022 :( </a:t>
+            </a:r>
+            <a:endParaRPr sz="1300">
+              <a:latin typeface="Calibri"/>
+              <a:ea typeface="Calibri"/>
+              <a:cs typeface="Calibri"/>
+              <a:sym typeface="Calibri"/>
+            </a:endParaRPr>
+          </a:p>
+        </p:txBody>
+      </p:sp>
     </p:spTree>
   </p:cSld>
   <p:clrMapOvr>
@@ -10567,7 +10653,7 @@
   <p:cSld>
     <p:spTree>
       <p:nvGrpSpPr>
-        <p:cNvPr id="1" name="Shape 159"/>
+        <p:cNvPr id="1" name="Shape 160"/>
         <p:cNvGrpSpPr/>
         <p:nvPr/>
       </p:nvGrpSpPr>
@@ -10581,7 +10667,7 @@
       </p:grpSpPr>
       <p:sp>
         <p:nvSpPr>
-          <p:cNvPr id="160" name="Google Shape;160;p24"/>
+          <p:cNvPr id="161" name="Google Shape;161;p24"/>
           <p:cNvSpPr txBox="1"/>
           <p:nvPr/>
         </p:nvSpPr>
@@ -10680,7 +10766,7 @@
       </p:sp>
       <p:sp>
         <p:nvSpPr>
-          <p:cNvPr id="161" name="Google Shape;161;p24"/>
+          <p:cNvPr id="162" name="Google Shape;162;p24"/>
           <p:cNvSpPr txBox="1"/>
           <p:nvPr/>
         </p:nvSpPr>
@@ -10735,7 +10821,7 @@
       </p:sp>
       <p:pic>
         <p:nvPicPr>
-          <p:cNvPr id="162" name="Google Shape;162;p24"/>
+          <p:cNvPr id="163" name="Google Shape;163;p24"/>
           <p:cNvPicPr preferRelativeResize="0"/>
           <p:nvPr/>
         </p:nvPicPr>
@@ -10774,7 +10860,7 @@
       </p:pic>
       <p:sp>
         <p:nvSpPr>
-          <p:cNvPr id="163" name="Google Shape;163;p24"/>
+          <p:cNvPr id="164" name="Google Shape;164;p24"/>
           <p:cNvSpPr txBox="1"/>
           <p:nvPr/>
         </p:nvSpPr>
@@ -10880,7 +10966,7 @@
   <p:cSld>
     <p:spTree>
       <p:nvGrpSpPr>
-        <p:cNvPr id="1" name="Shape 167"/>
+        <p:cNvPr id="1" name="Shape 168"/>
         <p:cNvGrpSpPr/>
         <p:nvPr/>
       </p:nvGrpSpPr>
@@ -10894,7 +10980,7 @@
       </p:grpSpPr>
       <p:sp>
         <p:nvSpPr>
-          <p:cNvPr id="168" name="Google Shape;168;p25"/>
+          <p:cNvPr id="169" name="Google Shape;169;p25"/>
           <p:cNvSpPr txBox="1"/>
           <p:nvPr/>
         </p:nvSpPr>
@@ -10949,7 +11035,7 @@
       </p:sp>
       <p:sp>
         <p:nvSpPr>
-          <p:cNvPr id="169" name="Google Shape;169;p25"/>
+          <p:cNvPr id="170" name="Google Shape;170;p25"/>
           <p:cNvSpPr txBox="1"/>
           <p:nvPr/>
         </p:nvSpPr>
@@ -11070,7 +11156,7 @@
       </p:sp>
       <p:pic>
         <p:nvPicPr>
-          <p:cNvPr id="170" name="Google Shape;170;p25"/>
+          <p:cNvPr id="171" name="Google Shape;171;p25"/>
           <p:cNvPicPr preferRelativeResize="0"/>
           <p:nvPr/>
         </p:nvPicPr>
@@ -11103,7 +11189,7 @@
       </p:pic>
       <p:sp>
         <p:nvSpPr>
-          <p:cNvPr id="171" name="Google Shape;171;p25"/>
+          <p:cNvPr id="172" name="Google Shape;172;p25"/>
           <p:cNvSpPr txBox="1"/>
           <p:nvPr/>
         </p:nvSpPr>
@@ -11168,7 +11254,7 @@
       </p:sp>
       <p:pic>
         <p:nvPicPr>
-          <p:cNvPr id="172" name="Google Shape;172;p25"/>
+          <p:cNvPr id="173" name="Google Shape;173;p25"/>
           <p:cNvPicPr preferRelativeResize="0"/>
           <p:nvPr/>
         </p:nvPicPr>
@@ -11201,7 +11287,7 @@
       </p:pic>
       <p:sp>
         <p:nvSpPr>
-          <p:cNvPr id="173" name="Google Shape;173;p25"/>
+          <p:cNvPr id="174" name="Google Shape;174;p25"/>
           <p:cNvSpPr txBox="1"/>
           <p:nvPr/>
         </p:nvSpPr>
@@ -11389,7 +11475,7 @@
   <p:cSld>
     <p:spTree>
       <p:nvGrpSpPr>
-        <p:cNvPr id="1" name="Shape 177"/>
+        <p:cNvPr id="1" name="Shape 178"/>
         <p:cNvGrpSpPr/>
         <p:nvPr/>
       </p:nvGrpSpPr>
@@ -11403,7 +11489,7 @@
       </p:grpSpPr>
       <p:sp>
         <p:nvSpPr>
-          <p:cNvPr id="178" name="Google Shape;178;p26"/>
+          <p:cNvPr id="179" name="Google Shape;179;p26"/>
           <p:cNvSpPr txBox="1"/>
           <p:nvPr/>
         </p:nvSpPr>
@@ -11458,7 +11544,7 @@
       </p:sp>
       <p:sp>
         <p:nvSpPr>
-          <p:cNvPr id="179" name="Google Shape;179;p26"/>
+          <p:cNvPr id="180" name="Google Shape;180;p26"/>
           <p:cNvSpPr txBox="1"/>
           <p:nvPr/>
         </p:nvSpPr>
@@ -11794,7 +11880,7 @@
       </p:sp>
       <p:graphicFrame>
         <p:nvGraphicFramePr>
-          <p:cNvPr id="180" name="Google Shape;180;p26"/>
+          <p:cNvPr id="181" name="Google Shape;181;p26"/>
           <p:cNvGraphicFramePr/>
           <p:nvPr/>
         </p:nvGraphicFramePr>
@@ -11807,7 +11893,7 @@
             <a:tbl>
               <a:tblPr>
                 <a:noFill/>
-                <a:tableStyleId>{13720896-178B-45A2-AEEA-D0D2DCF17E8D}</a:tableStyleId>
+                <a:tableStyleId>{1120B560-108E-4AD4-960E-68453626D397}</a:tableStyleId>
               </a:tblPr>
               <a:tblGrid>
                 <a:gridCol w="1212975">
@@ -13055,7 +13141,7 @@
       </p:graphicFrame>
       <p:pic>
         <p:nvPicPr>
-          <p:cNvPr id="181" name="Google Shape;181;p26"/>
+          <p:cNvPr id="182" name="Google Shape;182;p26"/>
           <p:cNvPicPr preferRelativeResize="0"/>
           <p:nvPr/>
         </p:nvPicPr>
@@ -13087,7 +13173,7 @@
       </p:pic>
       <p:pic>
         <p:nvPicPr>
-          <p:cNvPr id="182" name="Google Shape;182;p26"/>
+          <p:cNvPr id="183" name="Google Shape;183;p26"/>
           <p:cNvPicPr preferRelativeResize="0"/>
           <p:nvPr/>
         </p:nvPicPr>
@@ -13119,7 +13205,7 @@
       </p:pic>
       <p:sp>
         <p:nvSpPr>
-          <p:cNvPr id="183" name="Google Shape;183;p26"/>
+          <p:cNvPr id="184" name="Google Shape;184;p26"/>
           <p:cNvSpPr txBox="1"/>
           <p:nvPr/>
         </p:nvSpPr>
@@ -13290,7 +13376,7 @@
   <p:cSld>
     <p:spTree>
       <p:nvGrpSpPr>
-        <p:cNvPr id="1" name="Shape 187"/>
+        <p:cNvPr id="1" name="Shape 188"/>
         <p:cNvGrpSpPr/>
         <p:nvPr/>
       </p:nvGrpSpPr>
@@ -13304,7 +13390,7 @@
       </p:grpSpPr>
       <p:sp>
         <p:nvSpPr>
-          <p:cNvPr id="188" name="Google Shape;188;p27"/>
+          <p:cNvPr id="189" name="Google Shape;189;p27"/>
           <p:cNvSpPr txBox="1"/>
           <p:nvPr/>
         </p:nvSpPr>
@@ -13359,7 +13445,7 @@
       </p:sp>
       <p:sp>
         <p:nvSpPr>
-          <p:cNvPr id="189" name="Google Shape;189;p27"/>
+          <p:cNvPr id="190" name="Google Shape;190;p27"/>
           <p:cNvSpPr txBox="1"/>
           <p:nvPr/>
         </p:nvSpPr>
@@ -13585,7 +13671,7 @@
       </p:sp>
       <p:pic>
         <p:nvPicPr>
-          <p:cNvPr id="190" name="Google Shape;190;p27"/>
+          <p:cNvPr id="191" name="Google Shape;191;p27"/>
           <p:cNvPicPr preferRelativeResize="0"/>
           <p:nvPr/>
         </p:nvPicPr>
@@ -13629,7 +13715,7 @@
   <p:cSld>
     <p:spTree>
       <p:nvGrpSpPr>
-        <p:cNvPr id="1" name="Shape 194"/>
+        <p:cNvPr id="1" name="Shape 195"/>
         <p:cNvGrpSpPr/>
         <p:nvPr/>
       </p:nvGrpSpPr>
@@ -13643,7 +13729,7 @@
       </p:grpSpPr>
       <p:sp>
         <p:nvSpPr>
-          <p:cNvPr id="195" name="Google Shape;195;p28"/>
+          <p:cNvPr id="196" name="Google Shape;196;p28"/>
           <p:cNvSpPr txBox="1"/>
           <p:nvPr/>
         </p:nvSpPr>
@@ -13698,7 +13784,7 @@
       </p:sp>
       <p:sp>
         <p:nvSpPr>
-          <p:cNvPr id="196" name="Google Shape;196;p28"/>
+          <p:cNvPr id="197" name="Google Shape;197;p28"/>
           <p:cNvSpPr txBox="1"/>
           <p:nvPr/>
         </p:nvSpPr>
@@ -13846,7 +13932,7 @@
       </p:sp>
       <p:pic>
         <p:nvPicPr>
-          <p:cNvPr id="197" name="Google Shape;197;p28"/>
+          <p:cNvPr id="198" name="Google Shape;198;p28"/>
           <p:cNvPicPr preferRelativeResize="0"/>
           <p:nvPr/>
         </p:nvPicPr>
@@ -13885,7 +13971,7 @@
       </p:pic>
       <p:pic>
         <p:nvPicPr>
-          <p:cNvPr id="198" name="Google Shape;198;p28"/>
+          <p:cNvPr id="199" name="Google Shape;199;p28"/>
           <p:cNvPicPr preferRelativeResize="0"/>
           <p:nvPr/>
         </p:nvPicPr>
@@ -13935,7 +14021,7 @@
   <p:cSld>
     <p:spTree>
       <p:nvGrpSpPr>
-        <p:cNvPr id="1" name="Shape 202"/>
+        <p:cNvPr id="1" name="Shape 203"/>
         <p:cNvGrpSpPr/>
         <p:nvPr/>
       </p:nvGrpSpPr>
@@ -13949,7 +14035,7 @@
       </p:grpSpPr>
       <p:sp>
         <p:nvSpPr>
-          <p:cNvPr id="203" name="Google Shape;203;p29"/>
+          <p:cNvPr id="204" name="Google Shape;204;p29"/>
           <p:cNvSpPr txBox="1"/>
           <p:nvPr/>
         </p:nvSpPr>
@@ -14004,7 +14090,7 @@
       </p:sp>
       <p:sp>
         <p:nvSpPr>
-          <p:cNvPr id="204" name="Google Shape;204;p29"/>
+          <p:cNvPr id="205" name="Google Shape;205;p29"/>
           <p:cNvSpPr txBox="1"/>
           <p:nvPr/>
         </p:nvSpPr>
@@ -14104,7 +14190,7 @@
       </p:sp>
       <p:pic>
         <p:nvPicPr>
-          <p:cNvPr id="205" name="Google Shape;205;p29"/>
+          <p:cNvPr id="206" name="Google Shape;206;p29"/>
           <p:cNvPicPr preferRelativeResize="0"/>
           <p:nvPr/>
         </p:nvPicPr>
@@ -14137,7 +14223,7 @@
       </p:pic>
       <p:pic>
         <p:nvPicPr>
-          <p:cNvPr id="206" name="Google Shape;206;p29"/>
+          <p:cNvPr id="207" name="Google Shape;207;p29"/>
           <p:cNvPicPr preferRelativeResize="0"/>
           <p:nvPr/>
         </p:nvPicPr>
@@ -14170,7 +14256,7 @@
       </p:pic>
       <p:pic>
         <p:nvPicPr>
-          <p:cNvPr id="207" name="Google Shape;207;p29"/>
+          <p:cNvPr id="208" name="Google Shape;208;p29"/>
           <p:cNvPicPr preferRelativeResize="0"/>
           <p:nvPr/>
         </p:nvPicPr>
@@ -14203,7 +14289,7 @@
       </p:pic>
       <p:pic>
         <p:nvPicPr>
-          <p:cNvPr id="208" name="Google Shape;208;p29"/>
+          <p:cNvPr id="209" name="Google Shape;209;p29"/>
           <p:cNvPicPr preferRelativeResize="0"/>
           <p:nvPr/>
         </p:nvPicPr>
@@ -14236,7 +14322,7 @@
       </p:pic>
       <p:pic>
         <p:nvPicPr>
-          <p:cNvPr id="209" name="Google Shape;209;p29"/>
+          <p:cNvPr id="210" name="Google Shape;210;p29"/>
           <p:cNvPicPr preferRelativeResize="0"/>
           <p:nvPr/>
         </p:nvPicPr>
@@ -14269,7 +14355,7 @@
       </p:pic>
       <p:pic>
         <p:nvPicPr>
-          <p:cNvPr id="210" name="Google Shape;210;p29"/>
+          <p:cNvPr id="211" name="Google Shape;211;p29"/>
           <p:cNvPicPr preferRelativeResize="0"/>
           <p:nvPr/>
         </p:nvPicPr>
@@ -14302,7 +14388,7 @@
       </p:pic>
       <p:pic>
         <p:nvPicPr>
-          <p:cNvPr id="211" name="Google Shape;211;p29"/>
+          <p:cNvPr id="212" name="Google Shape;212;p29"/>
           <p:cNvPicPr preferRelativeResize="0"/>
           <p:nvPr/>
         </p:nvPicPr>
@@ -14335,7 +14421,7 @@
       </p:pic>
       <p:pic>
         <p:nvPicPr>
-          <p:cNvPr id="212" name="Google Shape;212;p29"/>
+          <p:cNvPr id="213" name="Google Shape;213;p29"/>
           <p:cNvPicPr preferRelativeResize="0"/>
           <p:nvPr/>
         </p:nvPicPr>
@@ -14379,7 +14465,7 @@
   <p:cSld>
     <p:spTree>
       <p:nvGrpSpPr>
-        <p:cNvPr id="1" name="Shape 216"/>
+        <p:cNvPr id="1" name="Shape 217"/>
         <p:cNvGrpSpPr/>
         <p:nvPr/>
       </p:nvGrpSpPr>
@@ -14393,7 +14479,7 @@
       </p:grpSpPr>
       <p:sp>
         <p:nvSpPr>
-          <p:cNvPr id="217" name="Google Shape;217;p30"/>
+          <p:cNvPr id="218" name="Google Shape;218;p30"/>
           <p:cNvSpPr txBox="1"/>
           <p:nvPr/>
         </p:nvSpPr>
@@ -14448,7 +14534,7 @@
       </p:sp>
       <p:sp>
         <p:nvSpPr>
-          <p:cNvPr id="218" name="Google Shape;218;p30"/>
+          <p:cNvPr id="219" name="Google Shape;219;p30"/>
           <p:cNvSpPr txBox="1"/>
           <p:nvPr/>
         </p:nvSpPr>
@@ -14773,7 +14859,7 @@
       </p:sp>
       <p:pic>
         <p:nvPicPr>
-          <p:cNvPr id="219" name="Google Shape;219;p30"/>
+          <p:cNvPr id="220" name="Google Shape;220;p30"/>
           <p:cNvPicPr preferRelativeResize="0"/>
           <p:nvPr/>
         </p:nvPicPr>
@@ -14816,7 +14902,7 @@
   <p:cSld>
     <p:spTree>
       <p:nvGrpSpPr>
-        <p:cNvPr id="1" name="Shape 223"/>
+        <p:cNvPr id="1" name="Shape 224"/>
         <p:cNvGrpSpPr/>
         <p:nvPr/>
       </p:nvGrpSpPr>
@@ -14830,7 +14916,7 @@
       </p:grpSpPr>
       <p:sp>
         <p:nvSpPr>
-          <p:cNvPr id="224" name="Google Shape;224;p31"/>
+          <p:cNvPr id="225" name="Google Shape;225;p31"/>
           <p:cNvSpPr txBox="1"/>
           <p:nvPr/>
         </p:nvSpPr>
@@ -14930,7 +15016,7 @@
       </p:sp>
       <p:sp>
         <p:nvSpPr>
-          <p:cNvPr id="225" name="Google Shape;225;p31"/>
+          <p:cNvPr id="226" name="Google Shape;226;p31"/>
           <p:cNvSpPr txBox="1"/>
           <p:nvPr/>
         </p:nvSpPr>
@@ -15038,7 +15124,7 @@
       </p:sp>
       <p:sp>
         <p:nvSpPr>
-          <p:cNvPr id="226" name="Google Shape;226;p31"/>
+          <p:cNvPr id="227" name="Google Shape;227;p31"/>
           <p:cNvSpPr txBox="1"/>
           <p:nvPr/>
         </p:nvSpPr>
@@ -15093,7 +15179,7 @@
       </p:sp>
       <p:sp>
         <p:nvSpPr>
-          <p:cNvPr id="227" name="Google Shape;227;p31"/>
+          <p:cNvPr id="228" name="Google Shape;228;p31"/>
           <p:cNvSpPr txBox="1"/>
           <p:nvPr/>
         </p:nvSpPr>
@@ -15175,7 +15261,7 @@
       </p:sp>
       <p:pic>
         <p:nvPicPr>
-          <p:cNvPr id="228" name="Google Shape;228;p31"/>
+          <p:cNvPr id="229" name="Google Shape;229;p31"/>
           <p:cNvPicPr preferRelativeResize="0"/>
           <p:nvPr/>
         </p:nvPicPr>
@@ -15767,7 +15853,7 @@
   <p:cSld>
     <p:spTree>
       <p:nvGrpSpPr>
-        <p:cNvPr id="1" name="Shape 232"/>
+        <p:cNvPr id="1" name="Shape 233"/>
         <p:cNvGrpSpPr/>
         <p:nvPr/>
       </p:nvGrpSpPr>
@@ -15781,7 +15867,7 @@
       </p:grpSpPr>
       <p:sp>
         <p:nvSpPr>
-          <p:cNvPr id="233" name="Google Shape;233;p32"/>
+          <p:cNvPr id="234" name="Google Shape;234;p32"/>
           <p:cNvSpPr txBox="1"/>
           <p:nvPr/>
         </p:nvSpPr>
@@ -16051,7 +16137,7 @@
       </p:sp>
       <p:sp>
         <p:nvSpPr>
-          <p:cNvPr id="234" name="Google Shape;234;p32"/>
+          <p:cNvPr id="235" name="Google Shape;235;p32"/>
           <p:cNvSpPr txBox="1"/>
           <p:nvPr/>
         </p:nvSpPr>
@@ -16106,7 +16192,7 @@
       </p:sp>
       <p:pic>
         <p:nvPicPr>
-          <p:cNvPr id="235" name="Google Shape;235;p32"/>
+          <p:cNvPr id="236" name="Google Shape;236;p32"/>
           <p:cNvPicPr preferRelativeResize="0"/>
           <p:nvPr/>
         </p:nvPicPr>
@@ -16139,7 +16225,7 @@
       </p:pic>
       <p:pic>
         <p:nvPicPr>
-          <p:cNvPr id="236" name="Google Shape;236;p32"/>
+          <p:cNvPr id="237" name="Google Shape;237;p32"/>
           <p:cNvPicPr preferRelativeResize="0"/>
           <p:nvPr/>
         </p:nvPicPr>
@@ -16172,7 +16258,7 @@
       </p:pic>
       <p:pic>
         <p:nvPicPr>
-          <p:cNvPr id="237" name="Google Shape;237;p32"/>
+          <p:cNvPr id="238" name="Google Shape;238;p32"/>
           <p:cNvPicPr preferRelativeResize="0"/>
           <p:nvPr/>
         </p:nvPicPr>
@@ -16211,7 +16297,7 @@
       </p:pic>
       <p:pic>
         <p:nvPicPr>
-          <p:cNvPr id="238" name="Google Shape;238;p32"/>
+          <p:cNvPr id="239" name="Google Shape;239;p32"/>
           <p:cNvPicPr preferRelativeResize="0"/>
           <p:nvPr/>
         </p:nvPicPr>
@@ -16250,7 +16336,7 @@
       </p:pic>
       <p:pic>
         <p:nvPicPr>
-          <p:cNvPr id="239" name="Google Shape;239;p32"/>
+          <p:cNvPr id="240" name="Google Shape;240;p32"/>
           <p:cNvPicPr preferRelativeResize="0"/>
           <p:nvPr/>
         </p:nvPicPr>
@@ -16289,7 +16375,7 @@
       </p:pic>
       <p:graphicFrame>
         <p:nvGraphicFramePr>
-          <p:cNvPr id="240" name="Google Shape;240;p32"/>
+          <p:cNvPr id="241" name="Google Shape;241;p32"/>
           <p:cNvGraphicFramePr/>
           <p:nvPr/>
         </p:nvGraphicFramePr>
@@ -16302,7 +16388,7 @@
             <a:tbl>
               <a:tblPr>
                 <a:noFill/>
-                <a:tableStyleId>{8314E878-3E45-428C-A9B3-C2D216E8C6CA}</a:tableStyleId>
+                <a:tableStyleId>{D8B46A9F-0D07-4F26-9343-ADCFB06C3056}</a:tableStyleId>
               </a:tblPr>
               <a:tblGrid>
                 <a:gridCol w="1828800">
@@ -20336,7 +20422,7 @@
   <p:cSld>
     <p:spTree>
       <p:nvGrpSpPr>
-        <p:cNvPr id="1" name="Shape 244"/>
+        <p:cNvPr id="1" name="Shape 245"/>
         <p:cNvGrpSpPr/>
         <p:nvPr/>
       </p:nvGrpSpPr>
@@ -20350,7 +20436,7 @@
       </p:grpSpPr>
       <p:sp>
         <p:nvSpPr>
-          <p:cNvPr id="245" name="Google Shape;245;p33"/>
+          <p:cNvPr id="246" name="Google Shape;246;p33"/>
           <p:cNvSpPr txBox="1"/>
           <p:nvPr/>
         </p:nvSpPr>
@@ -20405,7 +20491,7 @@
       </p:sp>
       <p:sp>
         <p:nvSpPr>
-          <p:cNvPr id="246" name="Google Shape;246;p33"/>
+          <p:cNvPr id="247" name="Google Shape;247;p33"/>
           <p:cNvSpPr txBox="1"/>
           <p:nvPr/>
         </p:nvSpPr>
@@ -20745,7 +20831,7 @@
       </p:sp>
       <p:sp>
         <p:nvSpPr>
-          <p:cNvPr id="247" name="Google Shape;247;p33"/>
+          <p:cNvPr id="248" name="Google Shape;248;p33"/>
           <p:cNvSpPr txBox="1"/>
           <p:nvPr/>
         </p:nvSpPr>
@@ -20945,7 +21031,7 @@
   <p:cSld>
     <p:spTree>
       <p:nvGrpSpPr>
-        <p:cNvPr id="1" name="Shape 251"/>
+        <p:cNvPr id="1" name="Shape 252"/>
         <p:cNvGrpSpPr/>
         <p:nvPr/>
       </p:nvGrpSpPr>
@@ -20959,7 +21045,7 @@
       </p:grpSpPr>
       <p:sp>
         <p:nvSpPr>
-          <p:cNvPr id="252" name="Google Shape;252;p34"/>
+          <p:cNvPr id="253" name="Google Shape;253;p34"/>
           <p:cNvSpPr txBox="1"/>
           <p:nvPr/>
         </p:nvSpPr>
@@ -21014,7 +21100,7 @@
       </p:sp>
       <p:sp>
         <p:nvSpPr>
-          <p:cNvPr id="253" name="Google Shape;253;p34"/>
+          <p:cNvPr id="254" name="Google Shape;254;p34"/>
           <p:cNvSpPr txBox="1"/>
           <p:nvPr/>
         </p:nvSpPr>
@@ -21154,7 +21240,7 @@
       </p:sp>
       <p:pic>
         <p:nvPicPr>
-          <p:cNvPr id="254" name="Google Shape;254;p34"/>
+          <p:cNvPr id="255" name="Google Shape;255;p34"/>
           <p:cNvPicPr preferRelativeResize="0"/>
           <p:nvPr/>
         </p:nvPicPr>
@@ -21193,7 +21279,7 @@
       </p:pic>
       <p:pic>
         <p:nvPicPr>
-          <p:cNvPr id="255" name="Google Shape;255;p34"/>
+          <p:cNvPr id="256" name="Google Shape;256;p34"/>
           <p:cNvPicPr preferRelativeResize="0"/>
           <p:nvPr/>
         </p:nvPicPr>
@@ -21232,7 +21318,7 @@
       </p:pic>
       <p:pic>
         <p:nvPicPr>
-          <p:cNvPr id="256" name="Google Shape;256;p34"/>
+          <p:cNvPr id="257" name="Google Shape;257;p34"/>
           <p:cNvPicPr preferRelativeResize="0"/>
           <p:nvPr/>
         </p:nvPicPr>
@@ -21282,7 +21368,7 @@
   <p:cSld>
     <p:spTree>
       <p:nvGrpSpPr>
-        <p:cNvPr id="1" name="Shape 260"/>
+        <p:cNvPr id="1" name="Shape 261"/>
         <p:cNvGrpSpPr/>
         <p:nvPr/>
       </p:nvGrpSpPr>
@@ -21296,7 +21382,7 @@
       </p:grpSpPr>
       <p:sp>
         <p:nvSpPr>
-          <p:cNvPr id="261" name="Google Shape;261;p35"/>
+          <p:cNvPr id="262" name="Google Shape;262;p35"/>
           <p:cNvSpPr txBox="1"/>
           <p:nvPr/>
         </p:nvSpPr>
@@ -21351,7 +21437,7 @@
       </p:sp>
       <p:sp>
         <p:nvSpPr>
-          <p:cNvPr id="262" name="Google Shape;262;p35"/>
+          <p:cNvPr id="263" name="Google Shape;263;p35"/>
           <p:cNvSpPr txBox="1"/>
           <p:nvPr/>
         </p:nvSpPr>
@@ -21434,7 +21520,7 @@
       </p:sp>
       <p:sp>
         <p:nvSpPr>
-          <p:cNvPr id="263" name="Google Shape;263;p35"/>
+          <p:cNvPr id="264" name="Google Shape;264;p35"/>
           <p:cNvSpPr txBox="1"/>
           <p:nvPr/>
         </p:nvSpPr>
@@ -21499,7 +21585,7 @@
       </p:sp>
       <p:pic>
         <p:nvPicPr>
-          <p:cNvPr id="264" name="Google Shape;264;p35"/>
+          <p:cNvPr id="265" name="Google Shape;265;p35"/>
           <p:cNvPicPr preferRelativeResize="0"/>
           <p:nvPr/>
         </p:nvPicPr>
@@ -21543,7 +21629,7 @@
   <p:cSld>
     <p:spTree>
       <p:nvGrpSpPr>
-        <p:cNvPr id="1" name="Shape 268"/>
+        <p:cNvPr id="1" name="Shape 269"/>
         <p:cNvGrpSpPr/>
         <p:nvPr/>
       </p:nvGrpSpPr>
@@ -21557,7 +21643,7 @@
       </p:grpSpPr>
       <p:sp>
         <p:nvSpPr>
-          <p:cNvPr id="269" name="Google Shape;269;p36"/>
+          <p:cNvPr id="270" name="Google Shape;270;p36"/>
           <p:cNvSpPr txBox="1"/>
           <p:nvPr/>
         </p:nvSpPr>
